--- a/docs/presentation/mini5/20260731_GSoC_mini5.pptx
+++ b/docs/presentation/mini5/20260731_GSoC_mini5.pptx
@@ -1970,7 +1970,7 @@
                 <a:ea typeface="Arial" pitchFamily="34" charset="-122"/>
                 <a:cs typeface="Arial" pitchFamily="34" charset="-120"/>
               </a:rPr>
-              <a:t>July 31, 2026  ·  commit 635ca17  ·  experiment/bench-v2-real-llm-cost-minimal</a:t>
+              <a:t>July 31, 2026  ·  commit be1b93c  ·  experiment/bench-v2-real-llm-cost-minimal</a:t>
             </a:r>
             <a:endParaRPr lang="en-US" sz="1200" dirty="0"/>
           </a:p>
@@ -2101,7 +2101,7 @@
               <a:buNone/>
             </a:pPr>
             <a:r>
-              <a:rPr lang="en-US" sz="1900" b="1" dirty="0">
+              <a:rPr lang="en-US" sz="1700" b="1" dirty="0">
                 <a:solidFill>
                   <a:srgbClr val="9FE3C0"/>
                 </a:solidFill>
@@ -2111,7 +2111,7 @@
               </a:rPr>
               <a:t>Supported by this run</a:t>
             </a:r>
-            <a:endParaRPr lang="en-US" sz="1900" dirty="0"/>
+            <a:endParaRPr lang="en-US" sz="1700" dirty="0"/>
           </a:p>
         </p:txBody>
       </p:sp>
@@ -2287,7 +2287,7 @@
               <a:buNone/>
             </a:pPr>
             <a:r>
-              <a:rPr lang="en-US" sz="1900" b="1" dirty="0">
+              <a:rPr lang="en-US" sz="1700" b="1" dirty="0">
                 <a:solidFill>
                   <a:srgbClr val="FFC4B8"/>
                 </a:solidFill>
@@ -2297,7 +2297,7 @@
               </a:rPr>
               <a:t>NOT supported</a:t>
             </a:r>
-            <a:endParaRPr lang="en-US" sz="1900" dirty="0"/>
+            <a:endParaRPr lang="en-US" sz="1700" dirty="0"/>
           </a:p>
         </p:txBody>
       </p:sp>
@@ -2656,12 +2656,12 @@
         </p:nvSpPr>
         <p:spPr>
           <a:xfrm>
-            <a:off x="548640" y="1508760"/>
-            <a:ext cx="5486400" cy="2286000"/>
+            <a:off x="548640" y="1463040"/>
+            <a:ext cx="5486400" cy="2788920"/>
           </a:xfrm>
           <a:prstGeom prst="roundRect">
             <a:avLst>
-              <a:gd name="adj" fmla="val 4000"/>
+              <a:gd name="adj" fmla="val 3279"/>
             </a:avLst>
           </a:prstGeom>
           <a:solidFill>
@@ -2683,7 +2683,7 @@
         </p:nvSpPr>
         <p:spPr>
           <a:xfrm>
-            <a:off x="777240" y="1627632"/>
+            <a:off x="777240" y="1572768"/>
             <a:ext cx="5029200" cy="365760"/>
           </a:xfrm>
           <a:prstGeom prst="rect">
@@ -2700,7 +2700,7 @@
               <a:buNone/>
             </a:pPr>
             <a:r>
-              <a:rPr lang="en-US" sz="1900" b="1" dirty="0">
+              <a:rPr lang="en-US" sz="1700" b="1" dirty="0">
                 <a:solidFill>
                   <a:srgbClr val="55606E"/>
                 </a:solidFill>
@@ -2710,7 +2710,7 @@
               </a:rPr>
               <a:t>Last week (2026-07-24 pilot)</a:t>
             </a:r>
-            <a:endParaRPr lang="en-US" sz="1900" dirty="0"/>
+            <a:endParaRPr lang="en-US" sz="1700" dirty="0"/>
           </a:p>
         </p:txBody>
       </p:sp>
@@ -2722,8 +2722,8 @@
         </p:nvSpPr>
         <p:spPr>
           <a:xfrm>
-            <a:off x="841248" y="2121408"/>
-            <a:ext cx="4937760" cy="1554480"/>
+            <a:off x="841248" y="2057400"/>
+            <a:ext cx="4937760" cy="2148840"/>
           </a:xfrm>
           <a:prstGeom prst="rect">
             <a:avLst/>
@@ -2740,13 +2740,13 @@
                 <a:spcPct val="112000"/>
               </a:lnSpc>
               <a:spcAft>
-                <a:spcPts val="700"/>
+                <a:spcPts val="500"/>
               </a:spcAft>
               <a:buSzPct val="100000"/>
               <a:buChar char="•"/>
             </a:pPr>
             <a:r>
-              <a:rPr lang="en-US" sz="1550" dirty="0">
+              <a:rPr lang="en-US" sz="1300" dirty="0">
                 <a:solidFill>
                   <a:srgbClr val="1A1A2E"/>
                 </a:solidFill>
@@ -2756,7 +2756,7 @@
               </a:rPr>
               <a:t>Circuit body: 1 to 5 gates - length was itself a choice</a:t>
             </a:r>
-            <a:endParaRPr lang="en-US" sz="1550" dirty="0"/>
+            <a:endParaRPr lang="en-US" sz="1300" dirty="0"/>
           </a:p>
           <a:p>
             <a:pPr marL="342900" indent="-342900">
@@ -2764,13 +2764,13 @@
                 <a:spcPct val="112000"/>
               </a:lnSpc>
               <a:spcAft>
-                <a:spcPts val="700"/>
+                <a:spcPts val="500"/>
               </a:spcAft>
               <a:buSzPct val="100000"/>
               <a:buChar char="•"/>
             </a:pPr>
             <a:r>
-              <a:rPr lang="en-US" sz="1550" dirty="0">
+              <a:rPr lang="en-US" sz="1300" dirty="0">
                 <a:solidFill>
                   <a:srgbClr val="1A1A2E"/>
                 </a:solidFill>
@@ -2780,7 +2780,7 @@
               </a:rPr>
               <a:t>Budget B = 4 candidates, 2 seeds</a:t>
             </a:r>
-            <a:endParaRPr lang="en-US" sz="1550" dirty="0"/>
+            <a:endParaRPr lang="en-US" sz="1300" dirty="0"/>
           </a:p>
           <a:p>
             <a:pPr marL="342900" indent="-342900">
@@ -2788,13 +2788,13 @@
                 <a:spcPct val="112000"/>
               </a:lnSpc>
               <a:spcAft>
-                <a:spcPts val="700"/>
+                <a:spcPts val="500"/>
               </a:spcAft>
               <a:buSzPct val="100000"/>
               <a:buChar char="•"/>
             </a:pPr>
             <a:r>
-              <a:rPr lang="en-US" sz="1550" dirty="0">
+              <a:rPr lang="en-US" sz="1300" dirty="0">
                 <a:solidFill>
                   <a:srgbClr val="1A1A2E"/>
                 </a:solidFill>
@@ -2802,9 +2802,9 @@
                 <a:ea typeface="Arial" pitchFamily="34" charset="-122"/>
                 <a:cs typeface="Arial" pitchFamily="34" charset="-120"/>
               </a:rPr>
-              <a:t>Reported: LLM open-loop 0.155 vs Random 0.189</a:t>
-            </a:r>
-            <a:endParaRPr lang="en-US" sz="1550" dirty="0"/>
+              <a:t>Reported: LLM open-loop 0.155 vs Random 0.189 (test RMSE; with 2 seeds mean = median)</a:t>
+            </a:r>
+            <a:endParaRPr lang="en-US" sz="1300" dirty="0"/>
           </a:p>
           <a:p>
             <a:pPr marL="342900" indent="-342900">
@@ -2812,13 +2812,13 @@
                 <a:spcPct val="112000"/>
               </a:lnSpc>
               <a:spcAft>
-                <a:spcPts val="700"/>
+                <a:spcPts val="500"/>
               </a:spcAft>
               <a:buSzPct val="100000"/>
               <a:buChar char="•"/>
             </a:pPr>
             <a:r>
-              <a:rPr lang="en-US" sz="1550" dirty="0">
+              <a:rPr lang="en-US" sz="1300" dirty="0">
                 <a:solidFill>
                   <a:srgbClr val="1A1A2E"/>
                 </a:solidFill>
@@ -2826,9 +2826,33 @@
                 <a:ea typeface="Arial" pitchFamily="34" charset="-122"/>
                 <a:cs typeface="Arial" pitchFamily="34" charset="-120"/>
               </a:rPr>
-              <a:t>Its own config file said: "integration/smoke demonstration only; not a statistically powered result"</a:t>
-            </a:r>
-            <a:endParaRPr lang="en-US" sz="1550" dirty="0"/>
+              <a:t>Task generator amplitude_n3_smoke_v1 - not the one used this week</a:t>
+            </a:r>
+            <a:endParaRPr lang="en-US" sz="1300" dirty="0"/>
+          </a:p>
+          <a:p>
+            <a:pPr marL="342900" indent="-342900">
+              <a:lnSpc>
+                <a:spcPct val="112000"/>
+              </a:lnSpc>
+              <a:spcAft>
+                <a:spcPts val="500"/>
+              </a:spcAft>
+              <a:buSzPct val="100000"/>
+              <a:buChar char="•"/>
+            </a:pPr>
+            <a:r>
+              <a:rPr lang="en-US" sz="1300" dirty="0">
+                <a:solidFill>
+                  <a:srgbClr val="1A1A2E"/>
+                </a:solidFill>
+                <a:latin typeface="Arial" pitchFamily="34" charset="0"/>
+                <a:ea typeface="Arial" pitchFamily="34" charset="-122"/>
+                <a:cs typeface="Arial" pitchFamily="34" charset="-120"/>
+              </a:rPr>
+              <a:t>Its config: "integration/smoke demonstration only; not a statistically powered result"</a:t>
+            </a:r>
+            <a:endParaRPr lang="en-US" sz="1300" dirty="0"/>
           </a:p>
         </p:txBody>
       </p:sp>
@@ -2840,12 +2864,12 @@
         </p:nvSpPr>
         <p:spPr>
           <a:xfrm>
-            <a:off x="6172200" y="1508760"/>
-            <a:ext cx="5486400" cy="2286000"/>
+            <a:off x="6172200" y="1463040"/>
+            <a:ext cx="5486400" cy="2788920"/>
           </a:xfrm>
           <a:prstGeom prst="roundRect">
             <a:avLst>
-              <a:gd name="adj" fmla="val 4000"/>
+              <a:gd name="adj" fmla="val 3279"/>
             </a:avLst>
           </a:prstGeom>
           <a:solidFill>
@@ -2867,7 +2891,7 @@
         </p:nvSpPr>
         <p:spPr>
           <a:xfrm>
-            <a:off x="6400800" y="1627632"/>
+            <a:off x="6400800" y="1572768"/>
             <a:ext cx="5029200" cy="365760"/>
           </a:xfrm>
           <a:prstGeom prst="rect">
@@ -2884,7 +2908,7 @@
               <a:buNone/>
             </a:pPr>
             <a:r>
-              <a:rPr lang="en-US" sz="1900" b="1" dirty="0">
+              <a:rPr lang="en-US" sz="1700" b="1" dirty="0">
                 <a:solidFill>
                   <a:srgbClr val="1E3A5F"/>
                 </a:solidFill>
@@ -2892,9 +2916,9 @@
                 <a:ea typeface="Arial" pitchFamily="34" charset="-122"/>
                 <a:cs typeface="Arial" pitchFamily="34" charset="-120"/>
               </a:rPr>
-              <a:t>This week</a:t>
-            </a:r>
-            <a:endParaRPr lang="en-US" sz="1900" dirty="0"/>
+              <a:t>This week - three conditions, 10 seeds each</a:t>
+            </a:r>
+            <a:endParaRPr lang="en-US" sz="1700" dirty="0"/>
           </a:p>
         </p:txBody>
       </p:sp>
@@ -2906,8 +2930,8 @@
         </p:nvSpPr>
         <p:spPr>
           <a:xfrm>
-            <a:off x="6464808" y="2121408"/>
-            <a:ext cx="4937760" cy="1554480"/>
+            <a:off x="6464808" y="2057400"/>
+            <a:ext cx="4937760" cy="2148840"/>
           </a:xfrm>
           <a:prstGeom prst="rect">
             <a:avLst/>
@@ -2924,13 +2948,13 @@
                 <a:spcPct val="112000"/>
               </a:lnSpc>
               <a:spcAft>
-                <a:spcPts val="700"/>
+                <a:spcPts val="500"/>
               </a:spcAft>
               <a:buSzPct val="100000"/>
               <a:buChar char="•"/>
             </a:pPr>
             <a:r>
-              <a:rPr lang="en-US" sz="1550" dirty="0">
+              <a:rPr lang="en-US" sz="1300" dirty="0">
                 <a:solidFill>
                   <a:srgbClr val="1A1A2E"/>
                 </a:solidFill>
@@ -2938,9 +2962,9 @@
                 <a:ea typeface="Arial" pitchFamily="34" charset="-122"/>
                 <a:cs typeface="Arial" pitchFamily="34" charset="-120"/>
               </a:rPr>
-              <a:t>Circuit body: EXACTLY 5 gates - length is fixed for every method</a:t>
-            </a:r>
-            <a:endParaRPr lang="en-US" sz="1550" dirty="0"/>
+              <a:t>PRIMARY: exactly 5 gates, B = 8. Length is fixed for every method, so it cannot be a source of advantage. Slides 6, 7 and 9 report this.</a:t>
+            </a:r>
+            <a:endParaRPr lang="en-US" sz="1300" dirty="0"/>
           </a:p>
           <a:p>
             <a:pPr marL="342900" indent="-342900">
@@ -2948,13 +2972,13 @@
                 <a:spcPct val="112000"/>
               </a:lnSpc>
               <a:spcAft>
-                <a:spcPts val="700"/>
+                <a:spcPts val="500"/>
               </a:spcAft>
               <a:buSzPct val="100000"/>
               <a:buChar char="•"/>
             </a:pPr>
             <a:r>
-              <a:rPr lang="en-US" sz="1550" dirty="0">
+              <a:rPr lang="en-US" sz="1300" dirty="0">
                 <a:solidFill>
                   <a:srgbClr val="1A1A2E"/>
                 </a:solidFill>
@@ -2962,9 +2986,9 @@
                 <a:ea typeface="Arial" pitchFamily="34" charset="-122"/>
                 <a:cs typeface="Arial" pitchFamily="34" charset="-120"/>
               </a:rPr>
-              <a:t>Budget B = 8 candidates, 10 seeds</a:t>
-            </a:r>
-            <a:endParaRPr lang="en-US" sz="1550" dirty="0"/>
+              <a:t>CONTROL A: 1 to 5 gates, B = 8 - length freed again, budget unchanged</a:t>
+            </a:r>
+            <a:endParaRPr lang="en-US" sz="1300" dirty="0"/>
           </a:p>
           <a:p>
             <a:pPr marL="342900" indent="-342900">
@@ -2972,13 +2996,13 @@
                 <a:spcPct val="112000"/>
               </a:lnSpc>
               <a:spcAft>
-                <a:spcPts val="700"/>
+                <a:spcPts val="500"/>
               </a:spcAft>
               <a:buSzPct val="100000"/>
               <a:buChar char="•"/>
             </a:pPr>
             <a:r>
-              <a:rPr lang="en-US" sz="1550" dirty="0">
+              <a:rPr lang="en-US" sz="1300" dirty="0">
                 <a:solidFill>
                   <a:srgbClr val="1A1A2E"/>
                 </a:solidFill>
@@ -2986,9 +3010,9 @@
                 <a:ea typeface="Arial" pitchFamily="34" charset="-122"/>
                 <a:cs typeface="Arial" pitchFamily="34" charset="-120"/>
               </a:rPr>
-              <a:t>Five arms instead of three</a:t>
-            </a:r>
-            <a:endParaRPr lang="en-US" sz="1550" dirty="0"/>
+              <a:t>CONTROL B: 1 to 5 gates, B = 4 - the pilot's own setting, rebuilt</a:t>
+            </a:r>
+            <a:endParaRPr lang="en-US" sz="1300" dirty="0"/>
           </a:p>
           <a:p>
             <a:pPr marL="342900" indent="-342900">
@@ -2996,13 +3020,13 @@
                 <a:spcPct val="112000"/>
               </a:lnSpc>
               <a:spcAft>
-                <a:spcPts val="700"/>
+                <a:spcPts val="500"/>
               </a:spcAft>
               <a:buSzPct val="100000"/>
               <a:buChar char="•"/>
             </a:pPr>
             <a:r>
-              <a:rPr lang="en-US" sz="1550" dirty="0">
+              <a:rPr lang="en-US" sz="1300" dirty="0">
                 <a:solidFill>
                   <a:srgbClr val="1A1A2E"/>
                 </a:solidFill>
@@ -3010,9 +3034,9 @@
                 <a:ea typeface="Arial" pitchFamily="34" charset="-122"/>
                 <a:cs typeface="Arial" pitchFamily="34" charset="-120"/>
               </a:rPr>
-              <a:t>Three conditions run so the difference can be attributed, not guessed</a:t>
-            </a:r>
-            <a:endParaRPr lang="en-US" sz="1550" dirty="0"/>
+              <a:t>Five arms in all three, up from three arms</a:t>
+            </a:r>
+            <a:endParaRPr lang="en-US" sz="1300" dirty="0"/>
           </a:p>
         </p:txBody>
       </p:sp>
@@ -3024,12 +3048,12 @@
         </p:nvSpPr>
         <p:spPr>
           <a:xfrm>
-            <a:off x="548640" y="4069080"/>
-            <a:ext cx="11109960" cy="1371600"/>
+            <a:off x="548640" y="4480560"/>
+            <a:ext cx="11109960" cy="1481328"/>
           </a:xfrm>
           <a:prstGeom prst="roundRect">
             <a:avLst>
-              <a:gd name="adj" fmla="val 6667"/>
+              <a:gd name="adj" fmla="val 6173"/>
             </a:avLst>
           </a:prstGeom>
           <a:solidFill>
@@ -3051,8 +3075,8 @@
         </p:nvSpPr>
         <p:spPr>
           <a:xfrm>
-            <a:off x="822960" y="4206240"/>
-            <a:ext cx="10607040" cy="1097280"/>
+            <a:off x="822960" y="4599432"/>
+            <a:ext cx="10607040" cy="1234440"/>
           </a:xfrm>
           <a:prstGeom prst="rect">
             <a:avLst/>
@@ -3068,7 +3092,7 @@
               <a:buNone/>
             </a:pPr>
             <a:r>
-              <a:rPr lang="en-US" sz="1800" b="1" dirty="0">
+              <a:rPr lang="en-US" sz="1700" b="1" dirty="0">
                 <a:solidFill>
                   <a:srgbClr val="1A1A2E"/>
                 </a:solidFill>
@@ -3082,7 +3106,7 @@
               <a:buNone/>
             </a:pPr>
             <a:r>
-              <a:rPr lang="en-US" sz="1800" dirty="0">
+              <a:rPr lang="en-US" sz="1700" dirty="0">
                 <a:solidFill>
                   <a:srgbClr val="1A1A2E"/>
                 </a:solidFill>
@@ -3090,9 +3114,38 @@
                 <a:ea typeface="Arial" pitchFamily="34" charset="-122"/>
                 <a:cs typeface="Arial" pitchFamily="34" charset="-120"/>
               </a:rPr>
-              <a:t>if circuit length is a free variable and longer circuits are usually better, then any proposer that simply always asks for the maximum length wins - without designing anything.</a:t>
-            </a:r>
-            <a:endParaRPr lang="en-US" sz="1800" dirty="0"/>
+              <a:t>if circuit length is a free variable and longer circuits are usually better, then any proposer that simply always asks for the maximum length wins - without designing anything.
+</a:t>
+            </a:r>
+            <a:pPr indent="0" marL="0">
+              <a:buNone/>
+            </a:pPr>
+            <a:r>
+              <a:rPr lang="en-US" sz="1550" b="1" dirty="0">
+                <a:solidFill>
+                  <a:srgbClr val="B3261E"/>
+                </a:solidFill>
+                <a:latin typeface="Arial" pitchFamily="34" charset="0"/>
+                <a:ea typeface="Arial" pitchFamily="34" charset="-122"/>
+                <a:cs typeface="Arial" pitchFamily="34" charset="-120"/>
+              </a:rPr>
+              <a:t>The two data generators differ, so the pilot's numbers and this week's are NOT directly comparable. </a:t>
+            </a:r>
+            <a:pPr indent="0" marL="0">
+              <a:buNone/>
+            </a:pPr>
+            <a:r>
+              <a:rPr lang="en-US" sz="1550" dirty="0">
+                <a:solidFill>
+                  <a:srgbClr val="1A1A2E"/>
+                </a:solidFill>
+                <a:latin typeface="Arial" pitchFamily="34" charset="0"/>
+                <a:ea typeface="Arial" pitchFamily="34" charset="-122"/>
+                <a:cs typeface="Arial" pitchFamily="34" charset="-120"/>
+              </a:rPr>
+              <a:t>Slide 8 compares the three conditions above against each other - one codebase, one task, one model - so it does not depend on the pilot's numbers at all.</a:t>
+            </a:r>
+            <a:endParaRPr lang="en-US" sz="1700" dirty="0"/>
           </a:p>
         </p:txBody>
       </p:sp>
@@ -3129,7 +3182,7 @@
                 <a:ea typeface="Arial" pitchFamily="34" charset="-122"/>
                 <a:cs typeface="Arial" pitchFamily="34" charset="-120"/>
               </a:rPr>
-              <a:t>Pilot config: outputs/free_amplitude_fixed_readout_v1/EXPERIMENT_CONFIG.json (max_gates 5, budget_per_arm 4, seeds 2)</a:t>
+              <a:t>Verified against outputs/free_amplitude_fixed_readout_v1/EXPERIMENT_CONFIG.json: max_gates 5 (candidates ranged 1-5), budget_per_arm 4, seeds 2, 3 arms</a:t>
             </a:r>
             <a:endParaRPr lang="en-US" sz="1100" dirty="0"/>
           </a:p>

--- a/docs/presentation/mini5/20260731_GSoC_mini5.pptx
+++ b/docs/presentation/mini5/20260731_GSoC_mini5.pptx
@@ -1970,7 +1970,7 @@
                 <a:ea typeface="Arial" pitchFamily="34" charset="-122"/>
                 <a:cs typeface="Arial" pitchFamily="34" charset="-120"/>
               </a:rPr>
-              <a:t>July 31, 2026  ·  commit be1b93c  ·  experiment/bench-v2-real-llm-cost-minimal</a:t>
+              <a:t>July 31, 2026  ·  commit 0c7dff9  ·  experiment/bench-v2-real-llm-cost-minimal</a:t>
             </a:r>
             <a:endParaRPr lang="en-US" sz="1200" dirty="0"/>
           </a:p>
@@ -3298,6 +3298,86 @@
           </a:p>
         </p:txBody>
       </p:sp>
+      <p:sp>
+        <p:nvSpPr>
+          <p:cNvPr id="4" name="Shape 2"/>
+          <p:cNvSpPr/>
+          <p:nvPr/>
+        </p:nvSpPr>
+        <p:spPr>
+          <a:xfrm>
+            <a:off x="5699455" y="256032"/>
+            <a:ext cx="5989320" cy="402336"/>
+          </a:xfrm>
+          <a:prstGeom prst="roundRect">
+            <a:avLst>
+              <a:gd name="adj" fmla="val 15909"/>
+            </a:avLst>
+          </a:prstGeom>
+          <a:solidFill>
+            <a:srgbClr val="F4F6FA"/>
+          </a:solidFill>
+          <a:ln w="12700">
+            <a:solidFill>
+              <a:srgbClr val="D8DDE6"/>
+            </a:solidFill>
+            <a:prstDash val="solid"/>
+          </a:ln>
+        </p:spPr>
+      </p:sp>
+      <p:sp>
+        <p:nvSpPr>
+          <p:cNvPr id="5" name="Text 3"/>
+          <p:cNvSpPr/>
+          <p:nvPr/>
+        </p:nvSpPr>
+        <p:spPr>
+          <a:xfrm>
+            <a:off x="5836615" y="274320"/>
+            <a:ext cx="5715000" cy="365760"/>
+          </a:xfrm>
+          <a:prstGeom prst="rect">
+            <a:avLst/>
+          </a:prstGeom>
+          <a:noFill/>
+          <a:ln/>
+        </p:spPr>
+        <p:txBody>
+          <a:bodyPr wrap="square" lIns="0" tIns="0" rIns="0" bIns="0" rtlCol="0" anchor="ctr"/>
+          <a:lstStyle/>
+          <a:p>
+            <a:pPr algn="r" indent="0" marL="0">
+              <a:buNone/>
+            </a:pPr>
+            <a:r>
+              <a:rPr lang="en-US" sz="1150" b="1" dirty="0">
+                <a:solidFill>
+                  <a:srgbClr val="1E3A5F"/>
+                </a:solidFill>
+                <a:latin typeface="Arial" pitchFamily="34" charset="0"/>
+                <a:ea typeface="Arial" pitchFamily="34" charset="-122"/>
+                <a:cs typeface="Arial" pitchFamily="34" charset="-120"/>
+              </a:rPr>
+              <a:t>Applies to all three conditions</a:t>
+            </a:r>
+            <a:pPr algn="r" indent="0" marL="0">
+              <a:buNone/>
+            </a:pPr>
+            <a:r>
+              <a:rPr lang="en-US" sz="1150" dirty="0">
+                <a:solidFill>
+                  <a:srgbClr val="55606E"/>
+                </a:solidFill>
+                <a:latin typeface="Arial" pitchFamily="34" charset="0"/>
+                <a:ea typeface="Arial" pitchFamily="34" charset="-122"/>
+                <a:cs typeface="Arial" pitchFamily="34" charset="-120"/>
+              </a:rPr>
+              <a:t>   only gate count and B differ between them</a:t>
+            </a:r>
+            <a:endParaRPr lang="en-US" sz="1150" dirty="0"/>
+          </a:p>
+        </p:txBody>
+      </p:sp>
       <p:graphicFrame>
         <p:nvGraphicFramePr>
           <p:cNvPr id="4" name="Table 0"/>
@@ -3313,7 +3393,7 @@
           </p:nvPr>
         </p:nvGraphicFramePr>
         <p:xfrm>
-          <a:off x="548640" y="1463040"/>
+          <a:off x="548640" y="1371600"/>
           <a:ext cx="11109960" cy="914400"/>
         </p:xfrm>
         <a:graphic>
@@ -3321,10 +3401,10 @@
             <a:tbl>
               <a:tblPr/>
               <a:tblGrid>
-                <a:gridCol w="2514600"/>
-                <a:gridCol w="8595360"/>
+                <a:gridCol w="2194560"/>
+                <a:gridCol w="8915400"/>
               </a:tblGrid>
-              <a:tr h="402336">
+              <a:tr h="365760">
                 <a:tc>
                   <a:txBody>
                     <a:bodyPr/>
@@ -3334,7 +3414,7 @@
                         <a:buNone/>
                       </a:pPr>
                       <a:r>
-                        <a:rPr lang="en-US" sz="1400" b="1" dirty="0">
+                        <a:rPr lang="en-US" sz="1250" b="1" dirty="0">
                           <a:solidFill>
                             <a:srgbClr val="FFFFFF"/>
                           </a:solidFill>
@@ -3344,14 +3424,14 @@
                         </a:rPr>
                         <a:t>Constraint</a:t>
                       </a:r>
-                      <a:endParaRPr lang="en-US" sz="1400" dirty="0">
+                      <a:endParaRPr lang="en-US" sz="1250" dirty="0">
                         <a:latin typeface="Arial" charset="0"/>
                         <a:ea typeface="Arial" charset="0"/>
                         <a:cs typeface="Arial" charset="0"/>
                       </a:endParaRPr>
                     </a:p>
                   </a:txBody>
-                  <a:tcPr marL="64008" marR="64008" marT="64008" marB="64008" anchor="ctr">
+                  <a:tcPr marL="54864" marR="54864" marT="54864" marB="54864" anchor="ctr">
                     <a:lnL w="9525" cap="flat" cmpd="sng" algn="ctr">
                       <a:solidFill>
                         <a:srgbClr val="D8DDE6"/>
@@ -3402,7 +3482,7 @@
                         <a:buNone/>
                       </a:pPr>
                       <a:r>
-                        <a:rPr lang="en-US" sz="1400" b="1" dirty="0">
+                        <a:rPr lang="en-US" sz="1250" b="1" dirty="0">
                           <a:solidFill>
                             <a:srgbClr val="FFFFFF"/>
                           </a:solidFill>
@@ -3412,14 +3492,14 @@
                         </a:rPr>
                         <a:t>Value</a:t>
                       </a:r>
-                      <a:endParaRPr lang="en-US" sz="1400" dirty="0">
+                      <a:endParaRPr lang="en-US" sz="1250" dirty="0">
                         <a:latin typeface="Arial" charset="0"/>
                         <a:ea typeface="Arial" charset="0"/>
                         <a:cs typeface="Arial" charset="0"/>
                       </a:endParaRPr>
                     </a:p>
                   </a:txBody>
-                  <a:tcPr marL="64008" marR="64008" marT="64008" marB="64008" anchor="ctr">
+                  <a:tcPr marL="54864" marR="54864" marT="54864" marB="54864" anchor="ctr">
                     <a:lnL w="9525" cap="flat" cmpd="sng" algn="ctr">
                       <a:solidFill>
                         <a:srgbClr val="D8DDE6"/>
@@ -3462,7 +3542,7 @@
                   </a:tcPr>
                 </a:tc>
               </a:tr>
-              <a:tr h="402336">
+              <a:tr h="365760">
                 <a:tc>
                   <a:txBody>
                     <a:bodyPr/>
@@ -3472,7 +3552,7 @@
                         <a:buNone/>
                       </a:pPr>
                       <a:r>
-                        <a:rPr lang="en-US" sz="1400" dirty="0">
+                        <a:rPr lang="en-US" sz="1250" dirty="0">
                           <a:solidFill>
                             <a:srgbClr val="000000"/>
                           </a:solidFill>
@@ -3480,16 +3560,16 @@
                           <a:ea typeface="Arial" pitchFamily="34" charset="-122"/>
                           <a:cs typeface="Arial" pitchFamily="34" charset="-120"/>
                         </a:rPr>
-                        <a:t>Qubits</a:t>
+                        <a:t>Tasks</a:t>
                       </a:r>
-                      <a:endParaRPr lang="en-US" sz="1400" dirty="0">
+                      <a:endParaRPr lang="en-US" sz="1250" dirty="0">
                         <a:latin typeface="Arial" charset="0"/>
                         <a:ea typeface="Arial" charset="0"/>
                         <a:cs typeface="Arial" charset="0"/>
                       </a:endParaRPr>
                     </a:p>
                   </a:txBody>
-                  <a:tcPr marL="64008" marR="64008" marT="64008" marB="64008" anchor="ctr">
+                  <a:tcPr marL="54864" marR="54864" marT="54864" marB="54864" anchor="ctr">
                     <a:lnL w="9525" cap="flat" cmpd="sng" algn="ctr">
                       <a:solidFill>
                         <a:srgbClr val="D8DDE6"/>
@@ -3537,7 +3617,7 @@
                         <a:buNone/>
                       </a:pPr>
                       <a:r>
-                        <a:rPr lang="en-US" sz="1400" dirty="0">
+                        <a:rPr lang="en-US" sz="1250" dirty="0">
                           <a:solidFill>
                             <a:srgbClr val="000000"/>
                           </a:solidFill>
@@ -3545,16 +3625,16 @@
                           <a:ea typeface="Arial" pitchFamily="34" charset="-122"/>
                           <a:cs typeface="Arial" pitchFamily="34" charset="-120"/>
                         </a:rPr>
-                        <a:t>3 for T1 and T2 (2^3 = 8 amplitudes); 5 for T3 and T4 (2^5 = 32)</a:t>
+                        <a:t>T1 Gaussian peak position · T2 sinusoid frequency · T3 change-point location · T4 one peak vs two (binary)</a:t>
                       </a:r>
-                      <a:endParaRPr lang="en-US" sz="1400" dirty="0">
+                      <a:endParaRPr lang="en-US" sz="1250" dirty="0">
                         <a:latin typeface="Arial" charset="0"/>
                         <a:ea typeface="Arial" charset="0"/>
                         <a:cs typeface="Arial" charset="0"/>
                       </a:endParaRPr>
                     </a:p>
                   </a:txBody>
-                  <a:tcPr marL="64008" marR="64008" marT="64008" marB="64008" anchor="ctr">
+                  <a:tcPr marL="54864" marR="54864" marT="54864" marB="54864" anchor="ctr">
                     <a:lnL w="9525" cap="flat" cmpd="sng" algn="ctr">
                       <a:solidFill>
                         <a:srgbClr val="D8DDE6"/>
@@ -3594,7 +3674,7 @@
                   </a:tcPr>
                 </a:tc>
               </a:tr>
-              <a:tr h="402336">
+              <a:tr h="365760">
                 <a:tc>
                   <a:txBody>
                     <a:bodyPr/>
@@ -3604,7 +3684,7 @@
                         <a:buNone/>
                       </a:pPr>
                       <a:r>
-                        <a:rPr lang="en-US" sz="1400" dirty="0">
+                        <a:rPr lang="en-US" sz="1250" dirty="0">
                           <a:solidFill>
                             <a:srgbClr val="000000"/>
                           </a:solidFill>
@@ -3612,16 +3692,16 @@
                           <a:ea typeface="Arial" pitchFamily="34" charset="-122"/>
                           <a:cs typeface="Arial" pitchFamily="34" charset="-120"/>
                         </a:rPr>
-                        <a:t>Gate count</a:t>
+                        <a:t>Qubits</a:t>
                       </a:r>
-                      <a:endParaRPr lang="en-US" sz="1400" dirty="0">
+                      <a:endParaRPr lang="en-US" sz="1250" dirty="0">
                         <a:latin typeface="Arial" charset="0"/>
                         <a:ea typeface="Arial" charset="0"/>
                         <a:cs typeface="Arial" charset="0"/>
                       </a:endParaRPr>
                     </a:p>
                   </a:txBody>
-                  <a:tcPr marL="64008" marR="64008" marT="64008" marB="64008" anchor="ctr">
+                  <a:tcPr marL="54864" marR="54864" marT="54864" marB="54864" anchor="ctr">
                     <a:lnL w="9525" cap="flat" cmpd="sng" algn="ctr">
                       <a:solidFill>
                         <a:srgbClr val="D8DDE6"/>
@@ -3669,7 +3749,7 @@
                         <a:buNone/>
                       </a:pPr>
                       <a:r>
-                        <a:rPr lang="en-US" sz="1400" dirty="0">
+                        <a:rPr lang="en-US" sz="1250" dirty="0">
                           <a:solidFill>
                             <a:srgbClr val="000000"/>
                           </a:solidFill>
@@ -3677,16 +3757,16 @@
                           <a:ea typeface="Arial" pitchFamily="34" charset="-122"/>
                           <a:cs typeface="Arial" pitchFamily="34" charset="-120"/>
                         </a:rPr>
-                        <a:t>EXACTLY 5 - not a maximum, not a range. Identical for every method.</a:t>
+                        <a:t>3 for T1, T2 (2^3 = 8 amplitudes); 5 for T3, T4 (2^5 = 32) - T3 and T4 are only frozen at n=5</a:t>
                       </a:r>
-                      <a:endParaRPr lang="en-US" sz="1400" dirty="0">
+                      <a:endParaRPr lang="en-US" sz="1250" dirty="0">
                         <a:latin typeface="Arial" charset="0"/>
                         <a:ea typeface="Arial" charset="0"/>
                         <a:cs typeface="Arial" charset="0"/>
                       </a:endParaRPr>
                     </a:p>
                   </a:txBody>
-                  <a:tcPr marL="64008" marR="64008" marT="64008" marB="64008" anchor="ctr">
+                  <a:tcPr marL="54864" marR="54864" marT="54864" marB="54864" anchor="ctr">
                     <a:lnL w="9525" cap="flat" cmpd="sng" algn="ctr">
                       <a:solidFill>
                         <a:srgbClr val="D8DDE6"/>
@@ -3726,7 +3806,7 @@
                   </a:tcPr>
                 </a:tc>
               </a:tr>
-              <a:tr h="402336">
+              <a:tr h="365760">
                 <a:tc>
                   <a:txBody>
                     <a:bodyPr/>
@@ -3736,7 +3816,7 @@
                         <a:buNone/>
                       </a:pPr>
                       <a:r>
-                        <a:rPr lang="en-US" sz="1400" dirty="0">
+                        <a:rPr lang="en-US" sz="1250" dirty="0">
                           <a:solidFill>
                             <a:srgbClr val="000000"/>
                           </a:solidFill>
@@ -3744,16 +3824,16 @@
                           <a:ea typeface="Arial" pitchFamily="34" charset="-122"/>
                           <a:cs typeface="Arial" pitchFamily="34" charset="-120"/>
                         </a:rPr>
-                        <a:t>Gate set (7 types)</a:t>
+                        <a:t>Gate count</a:t>
                       </a:r>
-                      <a:endParaRPr lang="en-US" sz="1400" dirty="0">
+                      <a:endParaRPr lang="en-US" sz="1250" dirty="0">
                         <a:latin typeface="Arial" charset="0"/>
                         <a:ea typeface="Arial" charset="0"/>
                         <a:cs typeface="Arial" charset="0"/>
                       </a:endParaRPr>
                     </a:p>
                   </a:txBody>
-                  <a:tcPr marL="64008" marR="64008" marT="64008" marB="64008" anchor="ctr">
+                  <a:tcPr marL="54864" marR="54864" marT="54864" marB="54864" anchor="ctr">
                     <a:lnL w="9525" cap="flat" cmpd="sng" algn="ctr">
                       <a:solidFill>
                         <a:srgbClr val="D8DDE6"/>
@@ -3801,7 +3881,7 @@
                         <a:buNone/>
                       </a:pPr>
                       <a:r>
-                        <a:rPr lang="en-US" sz="1400" dirty="0">
+                        <a:rPr lang="en-US" sz="1250" dirty="0">
                           <a:solidFill>
                             <a:srgbClr val="000000"/>
                           </a:solidFill>
@@ -3809,16 +3889,16 @@
                           <a:ea typeface="Arial" pitchFamily="34" charset="-122"/>
                           <a:cs typeface="Arial" pitchFamily="34" charset="-120"/>
                         </a:rPr>
-                        <a:t>one wire: H, RX, RY, RZ      two wires: CRX, CRY, CRZ</a:t>
+                        <a:t>PRIMARY exactly 5 (not a max, not a range); Controls A and B relax it to 1-5. Every arm faces the same setting.</a:t>
                       </a:r>
-                      <a:endParaRPr lang="en-US" sz="1400" dirty="0">
+                      <a:endParaRPr lang="en-US" sz="1250" dirty="0">
                         <a:latin typeface="Arial" charset="0"/>
                         <a:ea typeface="Arial" charset="0"/>
                         <a:cs typeface="Arial" charset="0"/>
                       </a:endParaRPr>
                     </a:p>
                   </a:txBody>
-                  <a:tcPr marL="64008" marR="64008" marT="64008" marB="64008" anchor="ctr">
+                  <a:tcPr marL="54864" marR="54864" marT="54864" marB="54864" anchor="ctr">
                     <a:lnL w="9525" cap="flat" cmpd="sng" algn="ctr">
                       <a:solidFill>
                         <a:srgbClr val="D8DDE6"/>
@@ -3858,7 +3938,7 @@
                   </a:tcPr>
                 </a:tc>
               </a:tr>
-              <a:tr h="402336">
+              <a:tr h="365760">
                 <a:tc>
                   <a:txBody>
                     <a:bodyPr/>
@@ -3868,7 +3948,7 @@
                         <a:buNone/>
                       </a:pPr>
                       <a:r>
-                        <a:rPr lang="en-US" sz="1400" dirty="0">
+                        <a:rPr lang="en-US" sz="1250" dirty="0">
                           <a:solidFill>
                             <a:srgbClr val="000000"/>
                           </a:solidFill>
@@ -3876,16 +3956,16 @@
                           <a:ea typeface="Arial" pitchFamily="34" charset="-122"/>
                           <a:cs typeface="Arial" pitchFamily="34" charset="-120"/>
                         </a:rPr>
-                        <a:t>Angles</a:t>
+                        <a:t>Gate set (7 types)</a:t>
                       </a:r>
-                      <a:endParaRPr lang="en-US" sz="1400" dirty="0">
+                      <a:endParaRPr lang="en-US" sz="1250" dirty="0">
                         <a:latin typeface="Arial" charset="0"/>
                         <a:ea typeface="Arial" charset="0"/>
                         <a:cs typeface="Arial" charset="0"/>
                       </a:endParaRPr>
                     </a:p>
                   </a:txBody>
-                  <a:tcPr marL="64008" marR="64008" marT="64008" marB="64008" anchor="ctr">
+                  <a:tcPr marL="54864" marR="54864" marT="54864" marB="54864" anchor="ctr">
                     <a:lnL w="9525" cap="flat" cmpd="sng" algn="ctr">
                       <a:solidFill>
                         <a:srgbClr val="D8DDE6"/>
@@ -3933,7 +4013,7 @@
                         <a:buNone/>
                       </a:pPr>
                       <a:r>
-                        <a:rPr lang="en-US" sz="1400" dirty="0">
+                        <a:rPr lang="en-US" sz="1250" dirty="0">
                           <a:solidFill>
                             <a:srgbClr val="000000"/>
                           </a:solidFill>
@@ -3941,16 +4021,16 @@
                           <a:ea typeface="Arial" pitchFamily="34" charset="-122"/>
                           <a:cs typeface="Arial" pitchFamily="34" charset="-120"/>
                         </a:rPr>
-                        <a:t>one continuous theta per gate in [-pi, pi]; H carries none</a:t>
+                        <a:t>one wire: H, RX, RY, RZ      two wires: CRX, CRY, CRZ</a:t>
                       </a:r>
-                      <a:endParaRPr lang="en-US" sz="1400" dirty="0">
+                      <a:endParaRPr lang="en-US" sz="1250" dirty="0">
                         <a:latin typeface="Arial" charset="0"/>
                         <a:ea typeface="Arial" charset="0"/>
                         <a:cs typeface="Arial" charset="0"/>
                       </a:endParaRPr>
                     </a:p>
                   </a:txBody>
-                  <a:tcPr marL="64008" marR="64008" marT="64008" marB="64008" anchor="ctr">
+                  <a:tcPr marL="54864" marR="54864" marT="54864" marB="54864" anchor="ctr">
                     <a:lnL w="9525" cap="flat" cmpd="sng" algn="ctr">
                       <a:solidFill>
                         <a:srgbClr val="D8DDE6"/>
@@ -3990,7 +4070,7 @@
                   </a:tcPr>
                 </a:tc>
               </a:tr>
-              <a:tr h="402336">
+              <a:tr h="365760">
                 <a:tc>
                   <a:txBody>
                     <a:bodyPr/>
@@ -4000,7 +4080,7 @@
                         <a:buNone/>
                       </a:pPr>
                       <a:r>
-                        <a:rPr lang="en-US" sz="1400" dirty="0">
+                        <a:rPr lang="en-US" sz="1250" dirty="0">
                           <a:solidFill>
                             <a:srgbClr val="000000"/>
                           </a:solidFill>
@@ -4008,16 +4088,16 @@
                           <a:ea typeface="Arial" pitchFamily="34" charset="-122"/>
                           <a:cs typeface="Arial" pitchFamily="34" charset="-120"/>
                         </a:rPr>
-                        <a:t>Training</a:t>
+                        <a:t>Angles</a:t>
                       </a:r>
-                      <a:endParaRPr lang="en-US" sz="1400" dirty="0">
+                      <a:endParaRPr lang="en-US" sz="1250" dirty="0">
                         <a:latin typeface="Arial" charset="0"/>
                         <a:ea typeface="Arial" charset="0"/>
                         <a:cs typeface="Arial" charset="0"/>
                       </a:endParaRPr>
                     </a:p>
                   </a:txBody>
-                  <a:tcPr marL="64008" marR="64008" marT="64008" marB="64008" anchor="ctr">
+                  <a:tcPr marL="54864" marR="54864" marT="54864" marB="54864" anchor="ctr">
                     <a:lnL w="9525" cap="flat" cmpd="sng" algn="ctr">
                       <a:solidFill>
                         <a:srgbClr val="D8DDE6"/>
@@ -4065,7 +4145,7 @@
                         <a:buNone/>
                       </a:pPr>
                       <a:r>
-                        <a:rPr lang="en-US" sz="1400" dirty="0">
+                        <a:rPr lang="en-US" sz="1250" dirty="0">
                           <a:solidFill>
                             <a:srgbClr val="000000"/>
                           </a:solidFill>
@@ -4073,16 +4153,16 @@
                           <a:ea typeface="Arial" pitchFamily="34" charset="-122"/>
                           <a:cs typeface="Arial" pitchFamily="34" charset="-120"/>
                         </a:rPr>
-                        <a:t>NONE. The proposed angles are evaluated verbatim - no optimizer exists on this path.</a:t>
+                        <a:t>one continuous theta per gate in [-pi, pi]; H carries none</a:t>
                       </a:r>
-                      <a:endParaRPr lang="en-US" sz="1400" dirty="0">
+                      <a:endParaRPr lang="en-US" sz="1250" dirty="0">
                         <a:latin typeface="Arial" charset="0"/>
                         <a:ea typeface="Arial" charset="0"/>
                         <a:cs typeface="Arial" charset="0"/>
                       </a:endParaRPr>
                     </a:p>
                   </a:txBody>
-                  <a:tcPr marL="64008" marR="64008" marT="64008" marB="64008" anchor="ctr">
+                  <a:tcPr marL="54864" marR="54864" marT="54864" marB="54864" anchor="ctr">
                     <a:lnL w="9525" cap="flat" cmpd="sng" algn="ctr">
                       <a:solidFill>
                         <a:srgbClr val="D8DDE6"/>
@@ -4122,7 +4202,7 @@
                   </a:tcPr>
                 </a:tc>
               </a:tr>
-              <a:tr h="402336">
+              <a:tr h="365760">
                 <a:tc>
                   <a:txBody>
                     <a:bodyPr/>
@@ -4132,7 +4212,7 @@
                         <a:buNone/>
                       </a:pPr>
                       <a:r>
-                        <a:rPr lang="en-US" sz="1400" dirty="0">
+                        <a:rPr lang="en-US" sz="1250" dirty="0">
                           <a:solidFill>
                             <a:srgbClr val="000000"/>
                           </a:solidFill>
@@ -4140,16 +4220,16 @@
                           <a:ea typeface="Arial" pitchFamily="34" charset="-122"/>
                           <a:cs typeface="Arial" pitchFamily="34" charset="-120"/>
                         </a:rPr>
-                        <a:t>Encoding / readout</a:t>
+                        <a:t>Budget</a:t>
                       </a:r>
-                      <a:endParaRPr lang="en-US" sz="1400" dirty="0">
+                      <a:endParaRPr lang="en-US" sz="1250" dirty="0">
                         <a:latin typeface="Arial" charset="0"/>
                         <a:ea typeface="Arial" charset="0"/>
                         <a:cs typeface="Arial" charset="0"/>
                       </a:endParaRPr>
                     </a:p>
                   </a:txBody>
-                  <a:tcPr marL="64008" marR="64008" marT="64008" marB="64008" anchor="ctr">
+                  <a:tcPr marL="54864" marR="54864" marT="54864" marB="54864" anchor="ctr">
                     <a:lnL w="9525" cap="flat" cmpd="sng" algn="ctr">
                       <a:solidFill>
                         <a:srgbClr val="D8DDE6"/>
@@ -4197,7 +4277,7 @@
                         <a:buNone/>
                       </a:pPr>
                       <a:r>
-                        <a:rPr lang="en-US" sz="1400" dirty="0">
+                        <a:rPr lang="en-US" sz="1250" dirty="0">
                           <a:solidFill>
                             <a:srgbClr val="000000"/>
                           </a:solidFill>
@@ -4205,16 +4285,16 @@
                           <a:ea typeface="Arial" pitchFamily="34" charset="-122"/>
                           <a:cs typeface="Arial" pitchFamily="34" charset="-120"/>
                         </a:rPr>
-                        <a:t>amplitude encoding; Pauli-Z on qubit 0; prediction = (1 - &lt;Z0&gt;)/2</a:t>
+                        <a:t>PRIMARY and Control A: B = 8 unique candidates. Control B: B = 4, the pilot's setting. 10 seeds throughout.</a:t>
                       </a:r>
-                      <a:endParaRPr lang="en-US" sz="1400" dirty="0">
+                      <a:endParaRPr lang="en-US" sz="1250" dirty="0">
                         <a:latin typeface="Arial" charset="0"/>
                         <a:ea typeface="Arial" charset="0"/>
                         <a:cs typeface="Arial" charset="0"/>
                       </a:endParaRPr>
                     </a:p>
                   </a:txBody>
-                  <a:tcPr marL="64008" marR="64008" marT="64008" marB="64008" anchor="ctr">
+                  <a:tcPr marL="54864" marR="54864" marT="54864" marB="54864" anchor="ctr">
                     <a:lnL w="9525" cap="flat" cmpd="sng" algn="ctr">
                       <a:solidFill>
                         <a:srgbClr val="D8DDE6"/>
@@ -4254,7 +4334,7 @@
                   </a:tcPr>
                 </a:tc>
               </a:tr>
-              <a:tr h="402336">
+              <a:tr h="365760">
                 <a:tc>
                   <a:txBody>
                     <a:bodyPr/>
@@ -4264,7 +4344,7 @@
                         <a:buNone/>
                       </a:pPr>
                       <a:r>
-                        <a:rPr lang="en-US" sz="1400" dirty="0">
+                        <a:rPr lang="en-US" sz="1250" dirty="0">
                           <a:solidFill>
                             <a:srgbClr val="000000"/>
                           </a:solidFill>
@@ -4272,16 +4352,16 @@
                           <a:ea typeface="Arial" pitchFamily="34" charset="-122"/>
                           <a:cs typeface="Arial" pitchFamily="34" charset="-120"/>
                         </a:rPr>
-                        <a:t>Classical parameters</a:t>
+                        <a:t>Training</a:t>
                       </a:r>
-                      <a:endParaRPr lang="en-US" sz="1400" dirty="0">
+                      <a:endParaRPr lang="en-US" sz="1250" dirty="0">
                         <a:latin typeface="Arial" charset="0"/>
                         <a:ea typeface="Arial" charset="0"/>
                         <a:cs typeface="Arial" charset="0"/>
                       </a:endParaRPr>
                     </a:p>
                   </a:txBody>
-                  <a:tcPr marL="64008" marR="64008" marT="64008" marB="64008" anchor="ctr">
+                  <a:tcPr marL="54864" marR="54864" marT="54864" marB="54864" anchor="ctr">
                     <a:lnL w="9525" cap="flat" cmpd="sng" algn="ctr">
                       <a:solidFill>
                         <a:srgbClr val="D8DDE6"/>
@@ -4329,7 +4409,271 @@
                         <a:buNone/>
                       </a:pPr>
                       <a:r>
-                        <a:rPr lang="en-US" sz="1400" dirty="0">
+                        <a:rPr lang="en-US" sz="1250" dirty="0">
+                          <a:solidFill>
+                            <a:srgbClr val="000000"/>
+                          </a:solidFill>
+                          <a:latin typeface="Arial" pitchFamily="34" charset="0"/>
+                          <a:ea typeface="Arial" pitchFamily="34" charset="-122"/>
+                          <a:cs typeface="Arial" pitchFamily="34" charset="-120"/>
+                        </a:rPr>
+                        <a:t>NONE. The proposed angles are evaluated verbatim - no optimizer exists on this path.</a:t>
+                      </a:r>
+                      <a:endParaRPr lang="en-US" sz="1250" dirty="0">
+                        <a:latin typeface="Arial" charset="0"/>
+                        <a:ea typeface="Arial" charset="0"/>
+                        <a:cs typeface="Arial" charset="0"/>
+                      </a:endParaRPr>
+                    </a:p>
+                  </a:txBody>
+                  <a:tcPr marL="54864" marR="54864" marT="54864" marB="54864" anchor="ctr">
+                    <a:lnL w="9525" cap="flat" cmpd="sng" algn="ctr">
+                      <a:solidFill>
+                        <a:srgbClr val="D8DDE6"/>
+                      </a:solidFill>
+                      <a:prstDash val="solid"/>
+                      <a:round/>
+                      <a:headEnd type="none" w="med" len="med"/>
+                      <a:tailEnd type="none" w="med" len="med"/>
+                    </a:lnL>
+                    <a:lnR w="9525" cap="flat" cmpd="sng" algn="ctr">
+                      <a:solidFill>
+                        <a:srgbClr val="D8DDE6"/>
+                      </a:solidFill>
+                      <a:prstDash val="solid"/>
+                      <a:round/>
+                      <a:headEnd type="none" w="med" len="med"/>
+                      <a:tailEnd type="none" w="med" len="med"/>
+                    </a:lnR>
+                    <a:lnT w="9525" cap="flat" cmpd="sng" algn="ctr">
+                      <a:solidFill>
+                        <a:srgbClr val="D8DDE6"/>
+                      </a:solidFill>
+                      <a:prstDash val="solid"/>
+                      <a:round/>
+                      <a:headEnd type="none" w="med" len="med"/>
+                      <a:tailEnd type="none" w="med" len="med"/>
+                    </a:lnT>
+                    <a:lnB w="9525" cap="flat" cmpd="sng" algn="ctr">
+                      <a:solidFill>
+                        <a:srgbClr val="D8DDE6"/>
+                      </a:solidFill>
+                      <a:prstDash val="solid"/>
+                      <a:round/>
+                      <a:headEnd type="none" w="med" len="med"/>
+                      <a:tailEnd type="none" w="med" len="med"/>
+                    </a:lnB>
+                  </a:tcPr>
+                </a:tc>
+              </a:tr>
+              <a:tr h="365760">
+                <a:tc>
+                  <a:txBody>
+                    <a:bodyPr/>
+                    <a:lstStyle/>
+                    <a:p>
+                      <a:pPr indent="0" marL="0">
+                        <a:buNone/>
+                      </a:pPr>
+                      <a:r>
+                        <a:rPr lang="en-US" sz="1250" dirty="0">
+                          <a:solidFill>
+                            <a:srgbClr val="000000"/>
+                          </a:solidFill>
+                          <a:latin typeface="Arial" pitchFamily="34" charset="0"/>
+                          <a:ea typeface="Arial" pitchFamily="34" charset="-122"/>
+                          <a:cs typeface="Arial" pitchFamily="34" charset="-120"/>
+                        </a:rPr>
+                        <a:t>Encoding / readout</a:t>
+                      </a:r>
+                      <a:endParaRPr lang="en-US" sz="1250" dirty="0">
+                        <a:latin typeface="Arial" charset="0"/>
+                        <a:ea typeface="Arial" charset="0"/>
+                        <a:cs typeface="Arial" charset="0"/>
+                      </a:endParaRPr>
+                    </a:p>
+                  </a:txBody>
+                  <a:tcPr marL="54864" marR="54864" marT="54864" marB="54864" anchor="ctr">
+                    <a:lnL w="9525" cap="flat" cmpd="sng" algn="ctr">
+                      <a:solidFill>
+                        <a:srgbClr val="D8DDE6"/>
+                      </a:solidFill>
+                      <a:prstDash val="solid"/>
+                      <a:round/>
+                      <a:headEnd type="none" w="med" len="med"/>
+                      <a:tailEnd type="none" w="med" len="med"/>
+                    </a:lnL>
+                    <a:lnR w="9525" cap="flat" cmpd="sng" algn="ctr">
+                      <a:solidFill>
+                        <a:srgbClr val="D8DDE6"/>
+                      </a:solidFill>
+                      <a:prstDash val="solid"/>
+                      <a:round/>
+                      <a:headEnd type="none" w="med" len="med"/>
+                      <a:tailEnd type="none" w="med" len="med"/>
+                    </a:lnR>
+                    <a:lnT w="9525" cap="flat" cmpd="sng" algn="ctr">
+                      <a:solidFill>
+                        <a:srgbClr val="D8DDE6"/>
+                      </a:solidFill>
+                      <a:prstDash val="solid"/>
+                      <a:round/>
+                      <a:headEnd type="none" w="med" len="med"/>
+                      <a:tailEnd type="none" w="med" len="med"/>
+                    </a:lnT>
+                    <a:lnB w="9525" cap="flat" cmpd="sng" algn="ctr">
+                      <a:solidFill>
+                        <a:srgbClr val="D8DDE6"/>
+                      </a:solidFill>
+                      <a:prstDash val="solid"/>
+                      <a:round/>
+                      <a:headEnd type="none" w="med" len="med"/>
+                      <a:tailEnd type="none" w="med" len="med"/>
+                    </a:lnB>
+                  </a:tcPr>
+                </a:tc>
+                <a:tc>
+                  <a:txBody>
+                    <a:bodyPr/>
+                    <a:lstStyle/>
+                    <a:p>
+                      <a:pPr indent="0" marL="0">
+                        <a:buNone/>
+                      </a:pPr>
+                      <a:r>
+                        <a:rPr lang="en-US" sz="1250" dirty="0">
+                          <a:solidFill>
+                            <a:srgbClr val="000000"/>
+                          </a:solidFill>
+                          <a:latin typeface="Arial" pitchFamily="34" charset="0"/>
+                          <a:ea typeface="Arial" pitchFamily="34" charset="-122"/>
+                          <a:cs typeface="Arial" pitchFamily="34" charset="-120"/>
+                        </a:rPr>
+                        <a:t>amplitude encoding; Pauli-Z on qubit 0; prediction = (1 - &lt;Z0&gt;)/2</a:t>
+                      </a:r>
+                      <a:endParaRPr lang="en-US" sz="1250" dirty="0">
+                        <a:latin typeface="Arial" charset="0"/>
+                        <a:ea typeface="Arial" charset="0"/>
+                        <a:cs typeface="Arial" charset="0"/>
+                      </a:endParaRPr>
+                    </a:p>
+                  </a:txBody>
+                  <a:tcPr marL="54864" marR="54864" marT="54864" marB="54864" anchor="ctr">
+                    <a:lnL w="9525" cap="flat" cmpd="sng" algn="ctr">
+                      <a:solidFill>
+                        <a:srgbClr val="D8DDE6"/>
+                      </a:solidFill>
+                      <a:prstDash val="solid"/>
+                      <a:round/>
+                      <a:headEnd type="none" w="med" len="med"/>
+                      <a:tailEnd type="none" w="med" len="med"/>
+                    </a:lnL>
+                    <a:lnR w="9525" cap="flat" cmpd="sng" algn="ctr">
+                      <a:solidFill>
+                        <a:srgbClr val="D8DDE6"/>
+                      </a:solidFill>
+                      <a:prstDash val="solid"/>
+                      <a:round/>
+                      <a:headEnd type="none" w="med" len="med"/>
+                      <a:tailEnd type="none" w="med" len="med"/>
+                    </a:lnR>
+                    <a:lnT w="9525" cap="flat" cmpd="sng" algn="ctr">
+                      <a:solidFill>
+                        <a:srgbClr val="D8DDE6"/>
+                      </a:solidFill>
+                      <a:prstDash val="solid"/>
+                      <a:round/>
+                      <a:headEnd type="none" w="med" len="med"/>
+                      <a:tailEnd type="none" w="med" len="med"/>
+                    </a:lnT>
+                    <a:lnB w="9525" cap="flat" cmpd="sng" algn="ctr">
+                      <a:solidFill>
+                        <a:srgbClr val="D8DDE6"/>
+                      </a:solidFill>
+                      <a:prstDash val="solid"/>
+                      <a:round/>
+                      <a:headEnd type="none" w="med" len="med"/>
+                      <a:tailEnd type="none" w="med" len="med"/>
+                    </a:lnB>
+                  </a:tcPr>
+                </a:tc>
+              </a:tr>
+              <a:tr h="365760">
+                <a:tc>
+                  <a:txBody>
+                    <a:bodyPr/>
+                    <a:lstStyle/>
+                    <a:p>
+                      <a:pPr indent="0" marL="0">
+                        <a:buNone/>
+                      </a:pPr>
+                      <a:r>
+                        <a:rPr lang="en-US" sz="1250" dirty="0">
+                          <a:solidFill>
+                            <a:srgbClr val="000000"/>
+                          </a:solidFill>
+                          <a:latin typeface="Arial" pitchFamily="34" charset="0"/>
+                          <a:ea typeface="Arial" pitchFamily="34" charset="-122"/>
+                          <a:cs typeface="Arial" pitchFamily="34" charset="-120"/>
+                        </a:rPr>
+                        <a:t>Classical params</a:t>
+                      </a:r>
+                      <a:endParaRPr lang="en-US" sz="1250" dirty="0">
+                        <a:latin typeface="Arial" charset="0"/>
+                        <a:ea typeface="Arial" charset="0"/>
+                        <a:cs typeface="Arial" charset="0"/>
+                      </a:endParaRPr>
+                    </a:p>
+                  </a:txBody>
+                  <a:tcPr marL="54864" marR="54864" marT="54864" marB="54864" anchor="ctr">
+                    <a:lnL w="9525" cap="flat" cmpd="sng" algn="ctr">
+                      <a:solidFill>
+                        <a:srgbClr val="D8DDE6"/>
+                      </a:solidFill>
+                      <a:prstDash val="solid"/>
+                      <a:round/>
+                      <a:headEnd type="none" w="med" len="med"/>
+                      <a:tailEnd type="none" w="med" len="med"/>
+                    </a:lnL>
+                    <a:lnR w="9525" cap="flat" cmpd="sng" algn="ctr">
+                      <a:solidFill>
+                        <a:srgbClr val="D8DDE6"/>
+                      </a:solidFill>
+                      <a:prstDash val="solid"/>
+                      <a:round/>
+                      <a:headEnd type="none" w="med" len="med"/>
+                      <a:tailEnd type="none" w="med" len="med"/>
+                    </a:lnR>
+                    <a:lnT w="9525" cap="flat" cmpd="sng" algn="ctr">
+                      <a:solidFill>
+                        <a:srgbClr val="D8DDE6"/>
+                      </a:solidFill>
+                      <a:prstDash val="solid"/>
+                      <a:round/>
+                      <a:headEnd type="none" w="med" len="med"/>
+                      <a:tailEnd type="none" w="med" len="med"/>
+                    </a:lnT>
+                    <a:lnB w="9525" cap="flat" cmpd="sng" algn="ctr">
+                      <a:solidFill>
+                        <a:srgbClr val="D8DDE6"/>
+                      </a:solidFill>
+                      <a:prstDash val="solid"/>
+                      <a:round/>
+                      <a:headEnd type="none" w="med" len="med"/>
+                      <a:tailEnd type="none" w="med" len="med"/>
+                    </a:lnB>
+                  </a:tcPr>
+                </a:tc>
+                <a:tc>
+                  <a:txBody>
+                    <a:bodyPr/>
+                    <a:lstStyle/>
+                    <a:p>
+                      <a:pPr indent="0" marL="0">
+                        <a:buNone/>
+                      </a:pPr>
+                      <a:r>
+                        <a:rPr lang="en-US" sz="1250" dirty="0">
                           <a:solidFill>
                             <a:srgbClr val="000000"/>
                           </a:solidFill>
@@ -4339,14 +4683,14 @@
                         </a:rPr>
                         <a:t>zero - no dense layer can rescue a weak circuit</a:t>
                       </a:r>
-                      <a:endParaRPr lang="en-US" sz="1400" dirty="0">
+                      <a:endParaRPr lang="en-US" sz="1250" dirty="0">
                         <a:latin typeface="Arial" charset="0"/>
                         <a:ea typeface="Arial" charset="0"/>
                         <a:cs typeface="Arial" charset="0"/>
                       </a:endParaRPr>
                     </a:p>
                   </a:txBody>
-                  <a:tcPr marL="64008" marR="64008" marT="64008" marB="64008" anchor="ctr">
+                  <a:tcPr marL="54864" marR="54864" marT="54864" marB="54864" anchor="ctr">
                     <a:lnL w="9525" cap="flat" cmpd="sng" algn="ctr">
                       <a:solidFill>
                         <a:srgbClr val="D8DDE6"/>
@@ -4392,18 +4736,18 @@
       </p:graphicFrame>
       <p:sp>
         <p:nvSpPr>
-          <p:cNvPr id="5" name="Shape 2"/>
+          <p:cNvPr id="7" name="Shape 4"/>
           <p:cNvSpPr/>
           <p:nvPr/>
         </p:nvSpPr>
         <p:spPr>
           <a:xfrm>
-            <a:off x="548640" y="5029200"/>
-            <a:ext cx="11109960" cy="1051560"/>
+            <a:off x="548640" y="5440680"/>
+            <a:ext cx="11109960" cy="822960"/>
           </a:xfrm>
           <a:prstGeom prst="roundRect">
             <a:avLst>
-              <a:gd name="adj" fmla="val 6957"/>
+              <a:gd name="adj" fmla="val 8889"/>
             </a:avLst>
           </a:prstGeom>
           <a:solidFill>
@@ -4419,14 +4763,14 @@
       </p:sp>
       <p:sp>
         <p:nvSpPr>
-          <p:cNvPr id="6" name="Text 3"/>
+          <p:cNvPr id="8" name="Text 5"/>
           <p:cNvSpPr/>
           <p:nvPr/>
         </p:nvSpPr>
         <p:spPr>
           <a:xfrm>
-            <a:off x="777240" y="5138928"/>
-            <a:ext cx="10607040" cy="822960"/>
+            <a:off x="777240" y="5513832"/>
+            <a:ext cx="10607040" cy="685800"/>
           </a:xfrm>
           <a:prstGeom prst="rect">
             <a:avLst/>
@@ -4472,7 +4816,7 @@
       </p:sp>
       <p:sp>
         <p:nvSpPr>
-          <p:cNvPr id="7" name="Text 4"/>
+          <p:cNvPr id="9" name="Text 6"/>
           <p:cNvSpPr/>
           <p:nvPr/>
         </p:nvSpPr>
@@ -4963,6 +5307,86 @@
               <a:t>Five arms, one shared budget of unique candidates</a:t>
             </a:r>
             <a:endParaRPr lang="en-US" sz="3000" dirty="0"/>
+          </a:p>
+        </p:txBody>
+      </p:sp>
+      <p:sp>
+        <p:nvSpPr>
+          <p:cNvPr id="4" name="Shape 2"/>
+          <p:cNvSpPr/>
+          <p:nvPr/>
+        </p:nvSpPr>
+        <p:spPr>
+          <a:xfrm>
+            <a:off x="5699455" y="256032"/>
+            <a:ext cx="5989320" cy="402336"/>
+          </a:xfrm>
+          <a:prstGeom prst="roundRect">
+            <a:avLst>
+              <a:gd name="adj" fmla="val 15909"/>
+            </a:avLst>
+          </a:prstGeom>
+          <a:solidFill>
+            <a:srgbClr val="F4F6FA"/>
+          </a:solidFill>
+          <a:ln w="12700">
+            <a:solidFill>
+              <a:srgbClr val="D8DDE6"/>
+            </a:solidFill>
+            <a:prstDash val="solid"/>
+          </a:ln>
+        </p:spPr>
+      </p:sp>
+      <p:sp>
+        <p:nvSpPr>
+          <p:cNvPr id="5" name="Text 3"/>
+          <p:cNvSpPr/>
+          <p:nvPr/>
+        </p:nvSpPr>
+        <p:spPr>
+          <a:xfrm>
+            <a:off x="5836615" y="274320"/>
+            <a:ext cx="5715000" cy="365760"/>
+          </a:xfrm>
+          <a:prstGeom prst="rect">
+            <a:avLst/>
+          </a:prstGeom>
+          <a:noFill/>
+          <a:ln/>
+        </p:spPr>
+        <p:txBody>
+          <a:bodyPr wrap="square" lIns="0" tIns="0" rIns="0" bIns="0" rtlCol="0" anchor="ctr"/>
+          <a:lstStyle/>
+          <a:p>
+            <a:pPr algn="r" indent="0" marL="0">
+              <a:buNone/>
+            </a:pPr>
+            <a:r>
+              <a:rPr lang="en-US" sz="1150" b="1" dirty="0">
+                <a:solidFill>
+                  <a:srgbClr val="1E3A5F"/>
+                </a:solidFill>
+                <a:latin typeface="Arial" pitchFamily="34" charset="0"/>
+                <a:ea typeface="Arial" pitchFamily="34" charset="-122"/>
+                <a:cs typeface="Arial" pitchFamily="34" charset="-120"/>
+              </a:rPr>
+              <a:t>Applies to all three conditions</a:t>
+            </a:r>
+            <a:pPr algn="r" indent="0" marL="0">
+              <a:buNone/>
+            </a:pPr>
+            <a:r>
+              <a:rPr lang="en-US" sz="1150" dirty="0">
+                <a:solidFill>
+                  <a:srgbClr val="55606E"/>
+                </a:solidFill>
+                <a:latin typeface="Arial" pitchFamily="34" charset="0"/>
+                <a:ea typeface="Arial" pitchFamily="34" charset="-122"/>
+                <a:cs typeface="Arial" pitchFamily="34" charset="-120"/>
+              </a:rPr>
+              <a:t>   arms are identical throughout</a:t>
+            </a:r>
+            <a:endParaRPr lang="en-US" sz="1150" dirty="0"/>
           </a:p>
         </p:txBody>
       </p:sp>
@@ -6190,7 +6614,7 @@
       </p:graphicFrame>
       <p:sp>
         <p:nvSpPr>
-          <p:cNvPr id="5" name="Shape 2"/>
+          <p:cNvPr id="7" name="Shape 4"/>
           <p:cNvSpPr/>
           <p:nvPr/>
         </p:nvSpPr>
@@ -6217,7 +6641,7 @@
       </p:sp>
       <p:sp>
         <p:nvSpPr>
-          <p:cNvPr id="6" name="Text 3"/>
+          <p:cNvPr id="8" name="Text 5"/>
           <p:cNvSpPr/>
           <p:nvPr/>
         </p:nvSpPr>
@@ -6270,7 +6694,7 @@
       </p:sp>
       <p:sp>
         <p:nvSpPr>
-          <p:cNvPr id="7" name="Text 4"/>
+          <p:cNvPr id="9" name="Text 6"/>
           <p:cNvSpPr/>
           <p:nvPr/>
         </p:nvSpPr>
@@ -6417,9 +6841,89 @@
           </a:p>
         </p:txBody>
       </p:sp>
+      <p:sp>
+        <p:nvSpPr>
+          <p:cNvPr id="4" name="Shape 2"/>
+          <p:cNvSpPr/>
+          <p:nvPr/>
+        </p:nvSpPr>
+        <p:spPr>
+          <a:xfrm>
+            <a:off x="5699455" y="256032"/>
+            <a:ext cx="5989320" cy="402336"/>
+          </a:xfrm>
+          <a:prstGeom prst="roundRect">
+            <a:avLst>
+              <a:gd name="adj" fmla="val 15909"/>
+            </a:avLst>
+          </a:prstGeom>
+          <a:solidFill>
+            <a:srgbClr val="F4F6FA"/>
+          </a:solidFill>
+          <a:ln w="12700">
+            <a:solidFill>
+              <a:srgbClr val="D8DDE6"/>
+            </a:solidFill>
+            <a:prstDash val="solid"/>
+          </a:ln>
+        </p:spPr>
+      </p:sp>
+      <p:sp>
+        <p:nvSpPr>
+          <p:cNvPr id="5" name="Text 3"/>
+          <p:cNvSpPr/>
+          <p:nvPr/>
+        </p:nvSpPr>
+        <p:spPr>
+          <a:xfrm>
+            <a:off x="5836615" y="274320"/>
+            <a:ext cx="5715000" cy="365760"/>
+          </a:xfrm>
+          <a:prstGeom prst="rect">
+            <a:avLst/>
+          </a:prstGeom>
+          <a:noFill/>
+          <a:ln/>
+        </p:spPr>
+        <p:txBody>
+          <a:bodyPr wrap="square" lIns="0" tIns="0" rIns="0" bIns="0" rtlCol="0" anchor="ctr"/>
+          <a:lstStyle/>
+          <a:p>
+            <a:pPr algn="r" indent="0" marL="0">
+              <a:buNone/>
+            </a:pPr>
+            <a:r>
+              <a:rPr lang="en-US" sz="1150" b="1" dirty="0">
+                <a:solidFill>
+                  <a:srgbClr val="1E3A5F"/>
+                </a:solidFill>
+                <a:latin typeface="Arial" pitchFamily="34" charset="0"/>
+                <a:ea typeface="Arial" pitchFamily="34" charset="-122"/>
+                <a:cs typeface="Arial" pitchFamily="34" charset="-120"/>
+              </a:rPr>
+              <a:t>PRIMARY: exactly 5 gates, B = 8, 10 seeds</a:t>
+            </a:r>
+            <a:pPr algn="r" indent="0" marL="0">
+              <a:buNone/>
+            </a:pPr>
+            <a:r>
+              <a:rPr lang="en-US" sz="1150" dirty="0">
+                <a:solidFill>
+                  <a:srgbClr val="55606E"/>
+                </a:solidFill>
+                <a:latin typeface="Arial" pitchFamily="34" charset="0"/>
+                <a:ea typeface="Arial" pitchFamily="34" charset="-122"/>
+                <a:cs typeface="Arial" pitchFamily="34" charset="-120"/>
+              </a:rPr>
+              <a:t>   all four tasks, T1-T4</a:t>
+            </a:r>
+            <a:endParaRPr lang="en-US" sz="1150" dirty="0"/>
+          </a:p>
+        </p:txBody>
+      </p:sp>
       <p:pic>
         <p:nvPicPr>
-          <p:cNvPr id="4" name="Image 0" descr="/Users/hatanakatomoya/Developer/Sim/llm-vqc/.claude/worktrees/github-author-config-faee6e/docs/presentation/mini5/figures/fig_main.png">    </p:cNvPr>
+          <p:cNvPr id="6" name="Image 0" descr="/Users/hatanakatomoya/Developer/Sim/llm-vqc/.claude/worktrees/github-author-config-faee6e/docs/presentation/mini5/figures/fig_main.png">    </p:cNvPr>
           <p:cNvPicPr>
             <a:picLocks noChangeAspect="1"/>
           </p:cNvPicPr>
@@ -6443,7 +6947,7 @@
       </p:pic>
       <p:sp>
         <p:nvSpPr>
-          <p:cNvPr id="5" name="Shape 2"/>
+          <p:cNvPr id="7" name="Shape 4"/>
           <p:cNvSpPr/>
           <p:nvPr/>
         </p:nvSpPr>
@@ -6470,7 +6974,7 @@
       </p:sp>
       <p:sp>
         <p:nvSpPr>
-          <p:cNvPr id="6" name="Text 3"/>
+          <p:cNvPr id="8" name="Text 5"/>
           <p:cNvSpPr/>
           <p:nvPr/>
         </p:nvSpPr>
@@ -6537,7 +7041,7 @@
       </p:sp>
       <p:sp>
         <p:nvSpPr>
-          <p:cNvPr id="7" name="Text 4"/>
+          <p:cNvPr id="9" name="Text 6"/>
           <p:cNvSpPr/>
           <p:nvPr/>
         </p:nvSpPr>
@@ -6684,9 +7188,89 @@
           </a:p>
         </p:txBody>
       </p:sp>
+      <p:sp>
+        <p:nvSpPr>
+          <p:cNvPr id="4" name="Shape 2"/>
+          <p:cNvSpPr/>
+          <p:nvPr/>
+        </p:nvSpPr>
+        <p:spPr>
+          <a:xfrm>
+            <a:off x="5699455" y="256032"/>
+            <a:ext cx="5989320" cy="402336"/>
+          </a:xfrm>
+          <a:prstGeom prst="roundRect">
+            <a:avLst>
+              <a:gd name="adj" fmla="val 15909"/>
+            </a:avLst>
+          </a:prstGeom>
+          <a:solidFill>
+            <a:srgbClr val="F4F6FA"/>
+          </a:solidFill>
+          <a:ln w="12700">
+            <a:solidFill>
+              <a:srgbClr val="D8DDE6"/>
+            </a:solidFill>
+            <a:prstDash val="solid"/>
+          </a:ln>
+        </p:spPr>
+      </p:sp>
+      <p:sp>
+        <p:nvSpPr>
+          <p:cNvPr id="5" name="Text 3"/>
+          <p:cNvSpPr/>
+          <p:nvPr/>
+        </p:nvSpPr>
+        <p:spPr>
+          <a:xfrm>
+            <a:off x="5836615" y="274320"/>
+            <a:ext cx="5715000" cy="365760"/>
+          </a:xfrm>
+          <a:prstGeom prst="rect">
+            <a:avLst/>
+          </a:prstGeom>
+          <a:noFill/>
+          <a:ln/>
+        </p:spPr>
+        <p:txBody>
+          <a:bodyPr wrap="square" lIns="0" tIns="0" rIns="0" bIns="0" rtlCol="0" anchor="ctr"/>
+          <a:lstStyle/>
+          <a:p>
+            <a:pPr algn="r" indent="0" marL="0">
+              <a:buNone/>
+            </a:pPr>
+            <a:r>
+              <a:rPr lang="en-US" sz="1150" b="1" dirty="0">
+                <a:solidFill>
+                  <a:srgbClr val="1E3A5F"/>
+                </a:solidFill>
+                <a:latin typeface="Arial" pitchFamily="34" charset="0"/>
+                <a:ea typeface="Arial" pitchFamily="34" charset="-122"/>
+                <a:cs typeface="Arial" pitchFamily="34" charset="-120"/>
+              </a:rPr>
+              <a:t>PRIMARY: exactly 5 gates, B = 8, 10 seeds</a:t>
+            </a:r>
+            <a:pPr algn="r" indent="0" marL="0">
+              <a:buNone/>
+            </a:pPr>
+            <a:r>
+              <a:rPr lang="en-US" sz="1150" dirty="0">
+                <a:solidFill>
+                  <a:srgbClr val="55606E"/>
+                </a:solidFill>
+                <a:latin typeface="Arial" pitchFamily="34" charset="0"/>
+                <a:ea typeface="Arial" pitchFamily="34" charset="-122"/>
+                <a:cs typeface="Arial" pitchFamily="34" charset="-120"/>
+              </a:rPr>
+              <a:t>   T4 only (peak count, 5 qubits)</a:t>
+            </a:r>
+            <a:endParaRPr lang="en-US" sz="1150" dirty="0"/>
+          </a:p>
+        </p:txBody>
+      </p:sp>
       <p:pic>
         <p:nvPicPr>
-          <p:cNvPr id="4" name="Image 0" descr="/Users/hatanakatomoya/Developer/Sim/llm-vqc/.claude/worktrees/github-author-config-faee6e/docs/presentation/mini5/figures/fig_t4_check.png">    </p:cNvPr>
+          <p:cNvPr id="6" name="Image 0" descr="/Users/hatanakatomoya/Developer/Sim/llm-vqc/.claude/worktrees/github-author-config-faee6e/docs/presentation/mini5/figures/fig_t4_check.png">    </p:cNvPr>
           <p:cNvPicPr>
             <a:picLocks noChangeAspect="1"/>
           </p:cNvPicPr>
@@ -6710,7 +7294,7 @@
       </p:pic>
       <p:sp>
         <p:nvSpPr>
-          <p:cNvPr id="5" name="Text 2"/>
+          <p:cNvPr id="7" name="Text 4"/>
           <p:cNvSpPr/>
           <p:nvPr/>
         </p:nvSpPr>
@@ -6828,7 +7412,7 @@
       </p:sp>
       <p:sp>
         <p:nvSpPr>
-          <p:cNvPr id="6" name="Shape 3"/>
+          <p:cNvPr id="8" name="Shape 5"/>
           <p:cNvSpPr/>
           <p:nvPr/>
         </p:nvSpPr>
@@ -6855,7 +7439,7 @@
       </p:sp>
       <p:sp>
         <p:nvSpPr>
-          <p:cNvPr id="7" name="Text 4"/>
+          <p:cNvPr id="9" name="Text 6"/>
           <p:cNvSpPr/>
           <p:nvPr/>
         </p:nvSpPr>
@@ -6908,7 +7492,7 @@
       </p:sp>
       <p:sp>
         <p:nvSpPr>
-          <p:cNvPr id="8" name="Text 5"/>
+          <p:cNvPr id="10" name="Text 7"/>
           <p:cNvSpPr/>
           <p:nvPr/>
         </p:nvSpPr>
@@ -7055,9 +7639,89 @@
           </a:p>
         </p:txBody>
       </p:sp>
+      <p:sp>
+        <p:nvSpPr>
+          <p:cNvPr id="4" name="Shape 2"/>
+          <p:cNvSpPr/>
+          <p:nvPr/>
+        </p:nvSpPr>
+        <p:spPr>
+          <a:xfrm>
+            <a:off x="5699455" y="256032"/>
+            <a:ext cx="5989320" cy="402336"/>
+          </a:xfrm>
+          <a:prstGeom prst="roundRect">
+            <a:avLst>
+              <a:gd name="adj" fmla="val 15909"/>
+            </a:avLst>
+          </a:prstGeom>
+          <a:solidFill>
+            <a:srgbClr val="F4F6FA"/>
+          </a:solidFill>
+          <a:ln w="12700">
+            <a:solidFill>
+              <a:srgbClr val="D8DDE6"/>
+            </a:solidFill>
+            <a:prstDash val="solid"/>
+          </a:ln>
+        </p:spPr>
+      </p:sp>
+      <p:sp>
+        <p:nvSpPr>
+          <p:cNvPr id="5" name="Text 3"/>
+          <p:cNvSpPr/>
+          <p:nvPr/>
+        </p:nvSpPr>
+        <p:spPr>
+          <a:xfrm>
+            <a:off x="5836615" y="274320"/>
+            <a:ext cx="5715000" cy="365760"/>
+          </a:xfrm>
+          <a:prstGeom prst="rect">
+            <a:avLst/>
+          </a:prstGeom>
+          <a:noFill/>
+          <a:ln/>
+        </p:spPr>
+        <p:txBody>
+          <a:bodyPr wrap="square" lIns="0" tIns="0" rIns="0" bIns="0" rtlCol="0" anchor="ctr"/>
+          <a:lstStyle/>
+          <a:p>
+            <a:pPr algn="r" indent="0" marL="0">
+              <a:buNone/>
+            </a:pPr>
+            <a:r>
+              <a:rPr lang="en-US" sz="1150" b="1" dirty="0">
+                <a:solidFill>
+                  <a:srgbClr val="1E3A5F"/>
+                </a:solidFill>
+                <a:latin typeface="Arial" pitchFamily="34" charset="0"/>
+                <a:ea typeface="Arial" pitchFamily="34" charset="-122"/>
+                <a:cs typeface="Arial" pitchFamily="34" charset="-120"/>
+              </a:rPr>
+              <a:t>ALL THREE CONDITIONS side by side</a:t>
+            </a:r>
+            <a:pPr algn="r" indent="0" marL="0">
+              <a:buNone/>
+            </a:pPr>
+            <a:r>
+              <a:rPr lang="en-US" sz="1150" dirty="0">
+                <a:solidFill>
+                  <a:srgbClr val="55606E"/>
+                </a:solidFill>
+                <a:latin typeface="Arial" pitchFamily="34" charset="0"/>
+                <a:ea typeface="Arial" pitchFamily="34" charset="-122"/>
+                <a:cs typeface="Arial" pitchFamily="34" charset="-120"/>
+              </a:rPr>
+              <a:t>   T1 only (Gaussian peak, 3 qubits)</a:t>
+            </a:r>
+            <a:endParaRPr lang="en-US" sz="1150" dirty="0"/>
+          </a:p>
+        </p:txBody>
+      </p:sp>
       <p:pic>
         <p:nvPicPr>
-          <p:cNvPr id="4" name="Image 0" descr="/Users/hatanakatomoya/Developer/Sim/llm-vqc/.claude/worktrees/github-author-config-faee6e/docs/presentation/mini5/figures/fig_size_confound.png">    </p:cNvPr>
+          <p:cNvPr id="6" name="Image 0" descr="/Users/hatanakatomoya/Developer/Sim/llm-vqc/.claude/worktrees/github-author-config-faee6e/docs/presentation/mini5/figures/fig_size_confound.png">    </p:cNvPr>
           <p:cNvPicPr>
             <a:picLocks noChangeAspect="1"/>
           </p:cNvPicPr>
@@ -7081,7 +7745,7 @@
       </p:pic>
       <p:sp>
         <p:nvSpPr>
-          <p:cNvPr id="5" name="Shape 2"/>
+          <p:cNvPr id="7" name="Shape 4"/>
           <p:cNvSpPr/>
           <p:nvPr/>
         </p:nvSpPr>
@@ -7108,7 +7772,7 @@
       </p:sp>
       <p:sp>
         <p:nvSpPr>
-          <p:cNvPr id="6" name="Text 3"/>
+          <p:cNvPr id="8" name="Text 5"/>
           <p:cNvSpPr/>
           <p:nvPr/>
         </p:nvSpPr>
@@ -7189,7 +7853,7 @@
       </p:sp>
       <p:sp>
         <p:nvSpPr>
-          <p:cNvPr id="7" name="Text 4"/>
+          <p:cNvPr id="9" name="Text 6"/>
           <p:cNvSpPr/>
           <p:nvPr/>
         </p:nvSpPr>
@@ -7220,7 +7884,7 @@
                 <a:ea typeface="Arial" pitchFamily="34" charset="-122"/>
                 <a:cs typeface="Arial" pitchFamily="34" charset="-120"/>
               </a:rPr>
-              <a:t>Three conditions, same code, same model, same tasks, 10 seeds each · data/condition_comparison.json</a:t>
+              <a:t>All three conditions ran all four tasks with 10 seeds; T1 is shown here because it is the family the pilot used · data/condition_comparison.json</a:t>
             </a:r>
             <a:endParaRPr lang="en-US" sz="1100" dirty="0"/>
           </a:p>
@@ -7336,9 +8000,89 @@
           </a:p>
         </p:txBody>
       </p:sp>
+      <p:sp>
+        <p:nvSpPr>
+          <p:cNvPr id="4" name="Shape 2"/>
+          <p:cNvSpPr/>
+          <p:nvPr/>
+        </p:nvSpPr>
+        <p:spPr>
+          <a:xfrm>
+            <a:off x="5699455" y="256032"/>
+            <a:ext cx="5989320" cy="402336"/>
+          </a:xfrm>
+          <a:prstGeom prst="roundRect">
+            <a:avLst>
+              <a:gd name="adj" fmla="val 15909"/>
+            </a:avLst>
+          </a:prstGeom>
+          <a:solidFill>
+            <a:srgbClr val="F4F6FA"/>
+          </a:solidFill>
+          <a:ln w="12700">
+            <a:solidFill>
+              <a:srgbClr val="D8DDE6"/>
+            </a:solidFill>
+            <a:prstDash val="solid"/>
+          </a:ln>
+        </p:spPr>
+      </p:sp>
+      <p:sp>
+        <p:nvSpPr>
+          <p:cNvPr id="5" name="Text 3"/>
+          <p:cNvSpPr/>
+          <p:nvPr/>
+        </p:nvSpPr>
+        <p:spPr>
+          <a:xfrm>
+            <a:off x="5836615" y="274320"/>
+            <a:ext cx="5715000" cy="365760"/>
+          </a:xfrm>
+          <a:prstGeom prst="rect">
+            <a:avLst/>
+          </a:prstGeom>
+          <a:noFill/>
+          <a:ln/>
+        </p:spPr>
+        <p:txBody>
+          <a:bodyPr wrap="square" lIns="0" tIns="0" rIns="0" bIns="0" rtlCol="0" anchor="ctr"/>
+          <a:lstStyle/>
+          <a:p>
+            <a:pPr algn="r" indent="0" marL="0">
+              <a:buNone/>
+            </a:pPr>
+            <a:r>
+              <a:rPr lang="en-US" sz="1150" b="1" dirty="0">
+                <a:solidFill>
+                  <a:srgbClr val="1E3A5F"/>
+                </a:solidFill>
+                <a:latin typeface="Arial" pitchFamily="34" charset="0"/>
+                <a:ea typeface="Arial" pitchFamily="34" charset="-122"/>
+                <a:cs typeface="Arial" pitchFamily="34" charset="-120"/>
+              </a:rPr>
+              <a:t>PRIMARY: exactly 5 gates, B = 8, 10 seeds</a:t>
+            </a:r>
+            <a:pPr algn="r" indent="0" marL="0">
+              <a:buNone/>
+            </a:pPr>
+            <a:r>
+              <a:rPr lang="en-US" sz="1150" dirty="0">
+                <a:solidFill>
+                  <a:srgbClr val="55606E"/>
+                </a:solidFill>
+                <a:latin typeface="Arial" pitchFamily="34" charset="0"/>
+                <a:ea typeface="Arial" pitchFamily="34" charset="-122"/>
+                <a:cs typeface="Arial" pitchFamily="34" charset="-120"/>
+              </a:rPr>
+              <a:t>   all four tasks, T1-T4</a:t>
+            </a:r>
+            <a:endParaRPr lang="en-US" sz="1150" dirty="0"/>
+          </a:p>
+        </p:txBody>
+      </p:sp>
       <p:pic>
         <p:nvPicPr>
-          <p:cNvPr id="4" name="Image 0" descr="/Users/hatanakatomoya/Developer/Sim/llm-vqc/.claude/worktrees/github-author-config-faee6e/docs/presentation/mini5/figures/fig_anytime.png">    </p:cNvPr>
+          <p:cNvPr id="6" name="Image 0" descr="/Users/hatanakatomoya/Developer/Sim/llm-vqc/.claude/worktrees/github-author-config-faee6e/docs/presentation/mini5/figures/fig_anytime.png">    </p:cNvPr>
           <p:cNvPicPr>
             <a:picLocks noChangeAspect="1"/>
           </p:cNvPicPr>
@@ -7362,7 +8106,7 @@
       </p:pic>
       <p:sp>
         <p:nvSpPr>
-          <p:cNvPr id="5" name="Text 2"/>
+          <p:cNvPr id="7" name="Text 4"/>
           <p:cNvSpPr/>
           <p:nvPr/>
         </p:nvSpPr>
@@ -7432,7 +8176,7 @@
       </p:sp>
       <p:sp>
         <p:nvSpPr>
-          <p:cNvPr id="6" name="Text 3"/>
+          <p:cNvPr id="8" name="Text 5"/>
           <p:cNvSpPr/>
           <p:nvPr/>
         </p:nvSpPr>

--- a/docs/presentation/mini5/20260731_GSoC_mini5.pptx
+++ b/docs/presentation/mini5/20260731_GSoC_mini5.pptx
@@ -687,7 +687,7 @@
           <a:p>
             <a:r>
               <a:rPr lang="en-US" dirty="0"/>
-              <a:t>The pilot allowed one to five gates. That sounds harmless, but it hands the proposer a free decision that correlates with performance. This week I pinned the length so that decision cannot be made at all.</a:t>
+              <a:t>The pilot allowed one to five gates. That hands the proposer a free decision that correlates with performance. This week the length is pinned so the decision cannot be made, and two controls put it back so we can measure what it was worth.</a:t>
             </a:r>
             <a:endParaRPr lang="en-US" dirty="0"/>
           </a:p>
@@ -863,7 +863,7 @@
           <a:p>
             <a:r>
               <a:rPr lang="en-US" dirty="0"/>
-              <a:t>I dropped the phrase protected-test RMSE from last week because it was confusing. The discipline behind it is unchanged: the test split is evaluated once, after selection. What changed is only the label.</a:t>
+              <a:t>RMSE is the typical size of the error, lower is better. The split matters: validation drives the search, and the test set is touched once after the winner is chosen, so the reported number never influenced the choice.</a:t>
             </a:r>
             <a:endParaRPr lang="en-US" dirty="0"/>
           </a:p>
@@ -951,7 +951,7 @@
           <a:p>
             <a:r>
               <a:rPr lang="en-US" dirty="0"/>
-              <a:t>The budget is unique evaluated candidates because that is the quantity every method spends and the one that dominates cost. Duplicates and invalid proposals are the proposer's own problem; they do not earn extra tries.</a:t>
+              <a:t>The budget is distinct scored circuits because that is what every method spends and what dominates cost. Duplicates and invalid proposals are the proposer's own problem; they do not earn extra tries.</a:t>
             </a:r>
             <a:endParaRPr lang="en-US" dirty="0"/>
           </a:p>
@@ -1970,7 +1970,7 @@
                 <a:ea typeface="Arial" pitchFamily="34" charset="-122"/>
                 <a:cs typeface="Arial" pitchFamily="34" charset="-120"/>
               </a:rPr>
-              <a:t>July 31, 2026  ·  commit 0c7dff9  ·  experiment/bench-v2-real-llm-cost-minimal</a:t>
+              <a:t>July 31, 2026  ·  commit cb5c29e  ·  experiment/bench-v2-real-llm-cost-minimal</a:t>
             </a:r>
             <a:endParaRPr lang="en-US" sz="1200" dirty="0"/>
           </a:p>
@@ -2109,7 +2109,7 @@
                 <a:ea typeface="Arial" pitchFamily="34" charset="-122"/>
                 <a:cs typeface="Arial" pitchFamily="34" charset="-120"/>
               </a:rPr>
-              <a:t>Supported by this run</a:t>
+              <a:t>Supported</a:t>
             </a:r>
             <a:endParaRPr lang="en-US" sz="1700" dirty="0"/>
           </a:p>
@@ -2155,7 +2155,7 @@
                 <a:ea typeface="Arial" pitchFamily="34" charset="-122"/>
                 <a:cs typeface="Arial" pitchFamily="34" charset="-120"/>
               </a:rPr>
-              <a:t>With circuit length fixed, gpt-5-nano does not beat random search on 3 of 4 tasks</a:t>
+              <a:t>Length fixed: no win over random on 3 of 4 tasks</a:t>
             </a:r>
             <a:endParaRPr lang="en-US" sz="1450" dirty="0"/>
           </a:p>
@@ -2179,7 +2179,7 @@
                 <a:ea typeface="Arial" pitchFamily="34" charset="-122"/>
                 <a:cs typeface="Arial" pitchFamily="34" charset="-120"/>
               </a:rPr>
-              <a:t>It does beat every classical arm on T2, clearly and across all 10 seeds</a:t>
+              <a:t>Clear win on T2, across all 10 seeds</a:t>
             </a:r>
             <a:endParaRPr lang="en-US" sz="1450" dirty="0"/>
           </a:p>
@@ -2203,7 +2203,7 @@
                 <a:ea typeface="Arial" pitchFamily="34" charset="-122"/>
                 <a:cs typeface="Arial" pitchFamily="34" charset="-120"/>
               </a:rPr>
-              <a:t>When length is free it picks the maximum ~70% of the time; uniform sampling does not</a:t>
+              <a:t>Length free: the LLM picks the maximum ~70% of the time</a:t>
             </a:r>
             <a:endParaRPr lang="en-US" sz="1450" dirty="0"/>
           </a:p>
@@ -2227,7 +2227,7 @@
                 <a:ea typeface="Arial" pitchFamily="34" charset="-122"/>
                 <a:cs typeface="Arial" pitchFamily="34" charset="-120"/>
               </a:rPr>
-              <a:t>That single decision explains most of last week's reported advantage</a:t>
+              <a:t>That one choice explains most of last week's advantage</a:t>
             </a:r>
             <a:endParaRPr lang="en-US" sz="1450" dirty="0"/>
           </a:p>
@@ -2341,7 +2341,7 @@
                 <a:ea typeface="Arial" pitchFamily="34" charset="-122"/>
                 <a:cs typeface="Arial" pitchFamily="34" charset="-120"/>
               </a:rPr>
-              <a:t>"LLMs cannot design quantum circuits" - one small model, one budget, four tiny tasks</a:t>
+              <a:t>"LLMs cannot design circuits" - one small model, one budget</a:t>
             </a:r>
             <a:endParaRPr lang="en-US" sz="1450" dirty="0"/>
           </a:p>
@@ -2365,7 +2365,7 @@
                 <a:ea typeface="Arial" pitchFamily="34" charset="-122"/>
                 <a:cs typeface="Arial" pitchFamily="34" charset="-120"/>
               </a:rPr>
-              <a:t>"Closed-loop feedback does not work" - it failed here at 8 rounds on 5-gate circuits</a:t>
+              <a:t>"Feedback does not work" - it failed here, at this scale</a:t>
             </a:r>
             <a:endParaRPr lang="en-US" sz="1450" dirty="0"/>
           </a:p>
@@ -2389,7 +2389,7 @@
                 <a:ea typeface="Arial" pitchFamily="34" charset="-122"/>
                 <a:cs typeface="Arial" pitchFamily="34" charset="-120"/>
               </a:rPr>
-              <a:t>Any claim about hardware: this is noiseless statevector simulation throughout</a:t>
+              <a:t>Anything about hardware - this is exact simulation</a:t>
             </a:r>
             <a:endParaRPr lang="en-US" sz="1450" dirty="0"/>
           </a:p>
@@ -2413,7 +2413,7 @@
                 <a:ea typeface="Arial" pitchFamily="34" charset="-122"/>
                 <a:cs typeface="Arial" pitchFamily="34" charset="-120"/>
               </a:rPr>
-              <a:t>Any cross-task comparison of RMSE values</a:t>
+              <a:t>Comparing RMSE across different tasks</a:t>
             </a:r>
             <a:endParaRPr lang="en-US" sz="1450" dirty="0"/>
           </a:p>
@@ -2471,7 +2471,7 @@
               <a:buNone/>
             </a:pPr>
             <a:r>
-              <a:rPr lang="en-US" sz="1700" b="1" dirty="0">
+              <a:rPr lang="en-US" sz="1800" b="1" dirty="0">
                 <a:solidFill>
                   <a:srgbClr val="B3261E"/>
                 </a:solidFill>
@@ -2485,7 +2485,7 @@
               <a:buNone/>
             </a:pPr>
             <a:r>
-              <a:rPr lang="en-US" sz="1700" dirty="0">
+              <a:rPr lang="en-US" sz="1800" dirty="0">
                 <a:solidFill>
                   <a:srgbClr val="1A1A2E"/>
                 </a:solidFill>
@@ -2493,9 +2493,9 @@
                 <a:ea typeface="Arial" pitchFamily="34" charset="-122"/>
                 <a:cs typeface="Arial" pitchFamily="34" charset="-120"/>
               </a:rPr>
-              <a:t>give the LLM a decision that is actually hard. Fixed length removed the easy win; the open question is whether a larger budget, a stronger model, or a task where structure matters more can produce an advantage that survives this kind of attribution check.</a:t>
-            </a:r>
-            <a:endParaRPr lang="en-US" sz="1700" dirty="0"/>
+              <a:t>give the LLM a decision that is actually hard, and check any advantage the same way.</a:t>
+            </a:r>
+            <a:endParaRPr lang="en-US" sz="1800" dirty="0"/>
           </a:p>
         </p:txBody>
       </p:sp>
@@ -2642,418 +2642,50 @@
                 <a:ea typeface="Arial" pitchFamily="34" charset="-122"/>
                 <a:cs typeface="Arial" pitchFamily="34" charset="-120"/>
               </a:rPr>
-              <a:t>Last week's search let the LLM choose the circuit size</a:t>
+              <a:t>Last week the LLM could choose how big the circuit was</a:t>
             </a:r>
             <a:endParaRPr lang="en-US" sz="3000" dirty="0"/>
           </a:p>
         </p:txBody>
       </p:sp>
-      <p:sp>
-        <p:nvSpPr>
-          <p:cNvPr id="4" name="Shape 2"/>
-          <p:cNvSpPr/>
-          <p:nvPr/>
-        </p:nvSpPr>
-        <p:spPr>
-          <a:xfrm>
-            <a:off x="548640" y="1463040"/>
-            <a:ext cx="5486400" cy="2788920"/>
+      <p:pic>
+        <p:nvPicPr>
+          <p:cNvPr id="4" name="Image 0" descr="/Users/hatanakatomoya/Developer/Sim/llm-vqc/.claude/worktrees/github-author-config-faee6e/docs/presentation/mini5/figures/fig_conditions.png">    </p:cNvPr>
+          <p:cNvPicPr>
+            <a:picLocks noChangeAspect="1"/>
+          </p:cNvPicPr>
+          <p:nvPr/>
+        </p:nvPicPr>
+        <p:blipFill>
+          <a:blip r:embed="rId1"/>
+          <a:stretch>
+            <a:fillRect/>
+          </a:stretch>
+        </p:blipFill>
+        <p:spPr>
+          <a:xfrm>
+            <a:off x="411480" y="1508760"/>
+            <a:ext cx="11384280" cy="3246120"/>
+          </a:xfrm>
+          <a:prstGeom prst="rect">
+            <a:avLst/>
+          </a:prstGeom>
+        </p:spPr>
+      </p:pic>
+      <p:sp>
+        <p:nvSpPr>
+          <p:cNvPr id="5" name="Shape 2"/>
+          <p:cNvSpPr/>
+          <p:nvPr/>
+        </p:nvSpPr>
+        <p:spPr>
+          <a:xfrm>
+            <a:off x="548640" y="4983480"/>
+            <a:ext cx="11109960" cy="1051560"/>
           </a:xfrm>
           <a:prstGeom prst="roundRect">
             <a:avLst>
-              <a:gd name="adj" fmla="val 3279"/>
-            </a:avLst>
-          </a:prstGeom>
-          <a:solidFill>
-            <a:srgbClr val="F4F6FA"/>
-          </a:solidFill>
-          <a:ln w="17780">
-            <a:solidFill>
-              <a:srgbClr val="55606E"/>
-            </a:solidFill>
-            <a:prstDash val="solid"/>
-          </a:ln>
-        </p:spPr>
-      </p:sp>
-      <p:sp>
-        <p:nvSpPr>
-          <p:cNvPr id="5" name="Text 3"/>
-          <p:cNvSpPr/>
-          <p:nvPr/>
-        </p:nvSpPr>
-        <p:spPr>
-          <a:xfrm>
-            <a:off x="777240" y="1572768"/>
-            <a:ext cx="5029200" cy="365760"/>
-          </a:xfrm>
-          <a:prstGeom prst="rect">
-            <a:avLst/>
-          </a:prstGeom>
-          <a:noFill/>
-          <a:ln/>
-        </p:spPr>
-        <p:txBody>
-          <a:bodyPr wrap="square" lIns="0" tIns="0" rIns="0" bIns="0" rtlCol="0" anchor="ctr"/>
-          <a:lstStyle/>
-          <a:p>
-            <a:pPr indent="0" marL="0">
-              <a:buNone/>
-            </a:pPr>
-            <a:r>
-              <a:rPr lang="en-US" sz="1700" b="1" dirty="0">
-                <a:solidFill>
-                  <a:srgbClr val="55606E"/>
-                </a:solidFill>
-                <a:latin typeface="Arial" pitchFamily="34" charset="0"/>
-                <a:ea typeface="Arial" pitchFamily="34" charset="-122"/>
-                <a:cs typeface="Arial" pitchFamily="34" charset="-120"/>
-              </a:rPr>
-              <a:t>Last week (2026-07-24 pilot)</a:t>
-            </a:r>
-            <a:endParaRPr lang="en-US" sz="1700" dirty="0"/>
-          </a:p>
-        </p:txBody>
-      </p:sp>
-      <p:sp>
-        <p:nvSpPr>
-          <p:cNvPr id="6" name="Text 4"/>
-          <p:cNvSpPr/>
-          <p:nvPr/>
-        </p:nvSpPr>
-        <p:spPr>
-          <a:xfrm>
-            <a:off x="841248" y="2057400"/>
-            <a:ext cx="4937760" cy="2148840"/>
-          </a:xfrm>
-          <a:prstGeom prst="rect">
-            <a:avLst/>
-          </a:prstGeom>
-          <a:noFill/>
-          <a:ln/>
-        </p:spPr>
-        <p:txBody>
-          <a:bodyPr wrap="square" lIns="0" tIns="0" rIns="0" bIns="0" rtlCol="0" anchor="t"/>
-          <a:lstStyle/>
-          <a:p>
-            <a:pPr marL="342900" indent="-342900">
-              <a:lnSpc>
-                <a:spcPct val="112000"/>
-              </a:lnSpc>
-              <a:spcAft>
-                <a:spcPts val="500"/>
-              </a:spcAft>
-              <a:buSzPct val="100000"/>
-              <a:buChar char="•"/>
-            </a:pPr>
-            <a:r>
-              <a:rPr lang="en-US" sz="1300" dirty="0">
-                <a:solidFill>
-                  <a:srgbClr val="1A1A2E"/>
-                </a:solidFill>
-                <a:latin typeface="Arial" pitchFamily="34" charset="0"/>
-                <a:ea typeface="Arial" pitchFamily="34" charset="-122"/>
-                <a:cs typeface="Arial" pitchFamily="34" charset="-120"/>
-              </a:rPr>
-              <a:t>Circuit body: 1 to 5 gates - length was itself a choice</a:t>
-            </a:r>
-            <a:endParaRPr lang="en-US" sz="1300" dirty="0"/>
-          </a:p>
-          <a:p>
-            <a:pPr marL="342900" indent="-342900">
-              <a:lnSpc>
-                <a:spcPct val="112000"/>
-              </a:lnSpc>
-              <a:spcAft>
-                <a:spcPts val="500"/>
-              </a:spcAft>
-              <a:buSzPct val="100000"/>
-              <a:buChar char="•"/>
-            </a:pPr>
-            <a:r>
-              <a:rPr lang="en-US" sz="1300" dirty="0">
-                <a:solidFill>
-                  <a:srgbClr val="1A1A2E"/>
-                </a:solidFill>
-                <a:latin typeface="Arial" pitchFamily="34" charset="0"/>
-                <a:ea typeface="Arial" pitchFamily="34" charset="-122"/>
-                <a:cs typeface="Arial" pitchFamily="34" charset="-120"/>
-              </a:rPr>
-              <a:t>Budget B = 4 candidates, 2 seeds</a:t>
-            </a:r>
-            <a:endParaRPr lang="en-US" sz="1300" dirty="0"/>
-          </a:p>
-          <a:p>
-            <a:pPr marL="342900" indent="-342900">
-              <a:lnSpc>
-                <a:spcPct val="112000"/>
-              </a:lnSpc>
-              <a:spcAft>
-                <a:spcPts val="500"/>
-              </a:spcAft>
-              <a:buSzPct val="100000"/>
-              <a:buChar char="•"/>
-            </a:pPr>
-            <a:r>
-              <a:rPr lang="en-US" sz="1300" dirty="0">
-                <a:solidFill>
-                  <a:srgbClr val="1A1A2E"/>
-                </a:solidFill>
-                <a:latin typeface="Arial" pitchFamily="34" charset="0"/>
-                <a:ea typeface="Arial" pitchFamily="34" charset="-122"/>
-                <a:cs typeface="Arial" pitchFamily="34" charset="-120"/>
-              </a:rPr>
-              <a:t>Reported: LLM open-loop 0.155 vs Random 0.189 (test RMSE; with 2 seeds mean = median)</a:t>
-            </a:r>
-            <a:endParaRPr lang="en-US" sz="1300" dirty="0"/>
-          </a:p>
-          <a:p>
-            <a:pPr marL="342900" indent="-342900">
-              <a:lnSpc>
-                <a:spcPct val="112000"/>
-              </a:lnSpc>
-              <a:spcAft>
-                <a:spcPts val="500"/>
-              </a:spcAft>
-              <a:buSzPct val="100000"/>
-              <a:buChar char="•"/>
-            </a:pPr>
-            <a:r>
-              <a:rPr lang="en-US" sz="1300" dirty="0">
-                <a:solidFill>
-                  <a:srgbClr val="1A1A2E"/>
-                </a:solidFill>
-                <a:latin typeface="Arial" pitchFamily="34" charset="0"/>
-                <a:ea typeface="Arial" pitchFamily="34" charset="-122"/>
-                <a:cs typeface="Arial" pitchFamily="34" charset="-120"/>
-              </a:rPr>
-              <a:t>Task generator amplitude_n3_smoke_v1 - not the one used this week</a:t>
-            </a:r>
-            <a:endParaRPr lang="en-US" sz="1300" dirty="0"/>
-          </a:p>
-          <a:p>
-            <a:pPr marL="342900" indent="-342900">
-              <a:lnSpc>
-                <a:spcPct val="112000"/>
-              </a:lnSpc>
-              <a:spcAft>
-                <a:spcPts val="500"/>
-              </a:spcAft>
-              <a:buSzPct val="100000"/>
-              <a:buChar char="•"/>
-            </a:pPr>
-            <a:r>
-              <a:rPr lang="en-US" sz="1300" dirty="0">
-                <a:solidFill>
-                  <a:srgbClr val="1A1A2E"/>
-                </a:solidFill>
-                <a:latin typeface="Arial" pitchFamily="34" charset="0"/>
-                <a:ea typeface="Arial" pitchFamily="34" charset="-122"/>
-                <a:cs typeface="Arial" pitchFamily="34" charset="-120"/>
-              </a:rPr>
-              <a:t>Its config: "integration/smoke demonstration only; not a statistically powered result"</a:t>
-            </a:r>
-            <a:endParaRPr lang="en-US" sz="1300" dirty="0"/>
-          </a:p>
-        </p:txBody>
-      </p:sp>
-      <p:sp>
-        <p:nvSpPr>
-          <p:cNvPr id="7" name="Shape 5"/>
-          <p:cNvSpPr/>
-          <p:nvPr/>
-        </p:nvSpPr>
-        <p:spPr>
-          <a:xfrm>
-            <a:off x="6172200" y="1463040"/>
-            <a:ext cx="5486400" cy="2788920"/>
-          </a:xfrm>
-          <a:prstGeom prst="roundRect">
-            <a:avLst>
-              <a:gd name="adj" fmla="val 3279"/>
-            </a:avLst>
-          </a:prstGeom>
-          <a:solidFill>
-            <a:srgbClr val="EAF0FB"/>
-          </a:solidFill>
-          <a:ln w="17780">
-            <a:solidFill>
-              <a:srgbClr val="1E3A5F"/>
-            </a:solidFill>
-            <a:prstDash val="solid"/>
-          </a:ln>
-        </p:spPr>
-      </p:sp>
-      <p:sp>
-        <p:nvSpPr>
-          <p:cNvPr id="8" name="Text 6"/>
-          <p:cNvSpPr/>
-          <p:nvPr/>
-        </p:nvSpPr>
-        <p:spPr>
-          <a:xfrm>
-            <a:off x="6400800" y="1572768"/>
-            <a:ext cx="5029200" cy="365760"/>
-          </a:xfrm>
-          <a:prstGeom prst="rect">
-            <a:avLst/>
-          </a:prstGeom>
-          <a:noFill/>
-          <a:ln/>
-        </p:spPr>
-        <p:txBody>
-          <a:bodyPr wrap="square" lIns="0" tIns="0" rIns="0" bIns="0" rtlCol="0" anchor="ctr"/>
-          <a:lstStyle/>
-          <a:p>
-            <a:pPr indent="0" marL="0">
-              <a:buNone/>
-            </a:pPr>
-            <a:r>
-              <a:rPr lang="en-US" sz="1700" b="1" dirty="0">
-                <a:solidFill>
-                  <a:srgbClr val="1E3A5F"/>
-                </a:solidFill>
-                <a:latin typeface="Arial" pitchFamily="34" charset="0"/>
-                <a:ea typeface="Arial" pitchFamily="34" charset="-122"/>
-                <a:cs typeface="Arial" pitchFamily="34" charset="-120"/>
-              </a:rPr>
-              <a:t>This week - three conditions, 10 seeds each</a:t>
-            </a:r>
-            <a:endParaRPr lang="en-US" sz="1700" dirty="0"/>
-          </a:p>
-        </p:txBody>
-      </p:sp>
-      <p:sp>
-        <p:nvSpPr>
-          <p:cNvPr id="9" name="Text 7"/>
-          <p:cNvSpPr/>
-          <p:nvPr/>
-        </p:nvSpPr>
-        <p:spPr>
-          <a:xfrm>
-            <a:off x="6464808" y="2057400"/>
-            <a:ext cx="4937760" cy="2148840"/>
-          </a:xfrm>
-          <a:prstGeom prst="rect">
-            <a:avLst/>
-          </a:prstGeom>
-          <a:noFill/>
-          <a:ln/>
-        </p:spPr>
-        <p:txBody>
-          <a:bodyPr wrap="square" lIns="0" tIns="0" rIns="0" bIns="0" rtlCol="0" anchor="t"/>
-          <a:lstStyle/>
-          <a:p>
-            <a:pPr marL="342900" indent="-342900">
-              <a:lnSpc>
-                <a:spcPct val="112000"/>
-              </a:lnSpc>
-              <a:spcAft>
-                <a:spcPts val="500"/>
-              </a:spcAft>
-              <a:buSzPct val="100000"/>
-              <a:buChar char="•"/>
-            </a:pPr>
-            <a:r>
-              <a:rPr lang="en-US" sz="1300" dirty="0">
-                <a:solidFill>
-                  <a:srgbClr val="1A1A2E"/>
-                </a:solidFill>
-                <a:latin typeface="Arial" pitchFamily="34" charset="0"/>
-                <a:ea typeface="Arial" pitchFamily="34" charset="-122"/>
-                <a:cs typeface="Arial" pitchFamily="34" charset="-120"/>
-              </a:rPr>
-              <a:t>PRIMARY: exactly 5 gates, B = 8. Length is fixed for every method, so it cannot be a source of advantage. Slides 6, 7 and 9 report this.</a:t>
-            </a:r>
-            <a:endParaRPr lang="en-US" sz="1300" dirty="0"/>
-          </a:p>
-          <a:p>
-            <a:pPr marL="342900" indent="-342900">
-              <a:lnSpc>
-                <a:spcPct val="112000"/>
-              </a:lnSpc>
-              <a:spcAft>
-                <a:spcPts val="500"/>
-              </a:spcAft>
-              <a:buSzPct val="100000"/>
-              <a:buChar char="•"/>
-            </a:pPr>
-            <a:r>
-              <a:rPr lang="en-US" sz="1300" dirty="0">
-                <a:solidFill>
-                  <a:srgbClr val="1A1A2E"/>
-                </a:solidFill>
-                <a:latin typeface="Arial" pitchFamily="34" charset="0"/>
-                <a:ea typeface="Arial" pitchFamily="34" charset="-122"/>
-                <a:cs typeface="Arial" pitchFamily="34" charset="-120"/>
-              </a:rPr>
-              <a:t>CONTROL A: 1 to 5 gates, B = 8 - length freed again, budget unchanged</a:t>
-            </a:r>
-            <a:endParaRPr lang="en-US" sz="1300" dirty="0"/>
-          </a:p>
-          <a:p>
-            <a:pPr marL="342900" indent="-342900">
-              <a:lnSpc>
-                <a:spcPct val="112000"/>
-              </a:lnSpc>
-              <a:spcAft>
-                <a:spcPts val="500"/>
-              </a:spcAft>
-              <a:buSzPct val="100000"/>
-              <a:buChar char="•"/>
-            </a:pPr>
-            <a:r>
-              <a:rPr lang="en-US" sz="1300" dirty="0">
-                <a:solidFill>
-                  <a:srgbClr val="1A1A2E"/>
-                </a:solidFill>
-                <a:latin typeface="Arial" pitchFamily="34" charset="0"/>
-                <a:ea typeface="Arial" pitchFamily="34" charset="-122"/>
-                <a:cs typeface="Arial" pitchFamily="34" charset="-120"/>
-              </a:rPr>
-              <a:t>CONTROL B: 1 to 5 gates, B = 4 - the pilot's own setting, rebuilt</a:t>
-            </a:r>
-            <a:endParaRPr lang="en-US" sz="1300" dirty="0"/>
-          </a:p>
-          <a:p>
-            <a:pPr marL="342900" indent="-342900">
-              <a:lnSpc>
-                <a:spcPct val="112000"/>
-              </a:lnSpc>
-              <a:spcAft>
-                <a:spcPts val="500"/>
-              </a:spcAft>
-              <a:buSzPct val="100000"/>
-              <a:buChar char="•"/>
-            </a:pPr>
-            <a:r>
-              <a:rPr lang="en-US" sz="1300" dirty="0">
-                <a:solidFill>
-                  <a:srgbClr val="1A1A2E"/>
-                </a:solidFill>
-                <a:latin typeface="Arial" pitchFamily="34" charset="0"/>
-                <a:ea typeface="Arial" pitchFamily="34" charset="-122"/>
-                <a:cs typeface="Arial" pitchFamily="34" charset="-120"/>
-              </a:rPr>
-              <a:t>Five arms in all three, up from three arms</a:t>
-            </a:r>
-            <a:endParaRPr lang="en-US" sz="1300" dirty="0"/>
-          </a:p>
-        </p:txBody>
-      </p:sp>
-      <p:sp>
-        <p:nvSpPr>
-          <p:cNvPr id="10" name="Shape 8"/>
-          <p:cNvSpPr/>
-          <p:nvPr/>
-        </p:nvSpPr>
-        <p:spPr>
-          <a:xfrm>
-            <a:off x="548640" y="4480560"/>
-            <a:ext cx="11109960" cy="1481328"/>
-          </a:xfrm>
-          <a:prstGeom prst="roundRect">
-            <a:avLst>
-              <a:gd name="adj" fmla="val 6173"/>
+              <a:gd name="adj" fmla="val 8696"/>
             </a:avLst>
           </a:prstGeom>
           <a:solidFill>
@@ -3069,14 +2701,14 @@
       </p:sp>
       <p:sp>
         <p:nvSpPr>
-          <p:cNvPr id="11" name="Text 9"/>
-          <p:cNvSpPr/>
-          <p:nvPr/>
-        </p:nvSpPr>
-        <p:spPr>
-          <a:xfrm>
-            <a:off x="822960" y="4599432"/>
-            <a:ext cx="10607040" cy="1234440"/>
+          <p:cNvPr id="6" name="Text 3"/>
+          <p:cNvSpPr/>
+          <p:nvPr/>
+        </p:nvSpPr>
+        <p:spPr>
+          <a:xfrm>
+            <a:off x="822960" y="5102352"/>
+            <a:ext cx="10607040" cy="822960"/>
           </a:xfrm>
           <a:prstGeom prst="rect">
             <a:avLst/>
@@ -3092,7 +2724,7 @@
               <a:buNone/>
             </a:pPr>
             <a:r>
-              <a:rPr lang="en-US" sz="1700" b="1" dirty="0">
+              <a:rPr lang="en-US" sz="1800" b="1" dirty="0">
                 <a:solidFill>
                   <a:srgbClr val="1A1A2E"/>
                 </a:solidFill>
@@ -3100,13 +2732,13 @@
                 <a:ea typeface="Arial" pitchFamily="34" charset="-122"/>
                 <a:cs typeface="Arial" pitchFamily="34" charset="-120"/>
               </a:rPr>
-              <a:t>Why this matters:  </a:t>
+              <a:t>Longer circuits usually score better. </a:t>
             </a:r>
             <a:pPr indent="0" marL="0">
               <a:buNone/>
             </a:pPr>
             <a:r>
-              <a:rPr lang="en-US" sz="1700" dirty="0">
+              <a:rPr lang="en-US" sz="1800" dirty="0">
                 <a:solidFill>
                   <a:srgbClr val="1A1A2E"/>
                 </a:solidFill>
@@ -3114,44 +2746,15 @@
                 <a:ea typeface="Arial" pitchFamily="34" charset="-122"/>
                 <a:cs typeface="Arial" pitchFamily="34" charset="-120"/>
               </a:rPr>
-              <a:t>if circuit length is a free variable and longer circuits are usually better, then any proposer that simply always asks for the maximum length wins - without designing anything.
-</a:t>
-            </a:r>
-            <a:pPr indent="0" marL="0">
-              <a:buNone/>
-            </a:pPr>
-            <a:r>
-              <a:rPr lang="en-US" sz="1550" b="1" dirty="0">
-                <a:solidFill>
-                  <a:srgbClr val="B3261E"/>
-                </a:solidFill>
-                <a:latin typeface="Arial" pitchFamily="34" charset="0"/>
-                <a:ea typeface="Arial" pitchFamily="34" charset="-122"/>
-                <a:cs typeface="Arial" pitchFamily="34" charset="-120"/>
-              </a:rPr>
-              <a:t>The two data generators differ, so the pilot's numbers and this week's are NOT directly comparable. </a:t>
-            </a:r>
-            <a:pPr indent="0" marL="0">
-              <a:buNone/>
-            </a:pPr>
-            <a:r>
-              <a:rPr lang="en-US" sz="1550" dirty="0">
-                <a:solidFill>
-                  <a:srgbClr val="1A1A2E"/>
-                </a:solidFill>
-                <a:latin typeface="Arial" pitchFamily="34" charset="0"/>
-                <a:ea typeface="Arial" pitchFamily="34" charset="-122"/>
-                <a:cs typeface="Arial" pitchFamily="34" charset="-120"/>
-              </a:rPr>
-              <a:t>Slide 8 compares the three conditions above against each other - one codebase, one task, one model - so it does not depend on the pilot's numbers at all.</a:t>
-            </a:r>
-            <a:endParaRPr lang="en-US" sz="1700" dirty="0"/>
-          </a:p>
-        </p:txBody>
-      </p:sp>
-      <p:sp>
-        <p:nvSpPr>
-          <p:cNvPr id="12" name="Text 10"/>
+              <a:t>So a proposer that always asks for the maximum length wins without designing anything. Fixing the length takes that move away.</a:t>
+            </a:r>
+            <a:endParaRPr lang="en-US" sz="1800" dirty="0"/>
+          </a:p>
+        </p:txBody>
+      </p:sp>
+      <p:sp>
+        <p:nvSpPr>
+          <p:cNvPr id="7" name="Text 4"/>
           <p:cNvSpPr/>
           <p:nvPr/>
         </p:nvSpPr>
@@ -3182,7 +2785,7 @@
                 <a:ea typeface="Arial" pitchFamily="34" charset="-122"/>
                 <a:cs typeface="Arial" pitchFamily="34" charset="-120"/>
               </a:rPr>
-              <a:t>Verified against outputs/free_amplitude_fixed_readout_v1/EXPERIMENT_CONFIG.json: max_gates 5 (candidates ranged 1-5), budget_per_arm 4, seeds 2, 3 arms</a:t>
+              <a:t>seed = one paired data + search random seed; a condition is re-run once per seed. Pilot values verified in its EXPERIMENT_CONFIG.json</a:t>
             </a:r>
             <a:endParaRPr lang="en-US" sz="1100" dirty="0"/>
           </a:p>
@@ -3393,7 +2996,7 @@
           </p:nvPr>
         </p:nvGraphicFramePr>
         <p:xfrm>
-          <a:off x="548640" y="1371600"/>
+          <a:off x="548640" y="1417320"/>
           <a:ext cx="11109960" cy="914400"/>
         </p:xfrm>
         <a:graphic>
@@ -3401,10 +3004,10 @@
             <a:tbl>
               <a:tblPr/>
               <a:tblGrid>
-                <a:gridCol w="2194560"/>
-                <a:gridCol w="8915400"/>
+                <a:gridCol w="2377440"/>
+                <a:gridCol w="8732520"/>
               </a:tblGrid>
-              <a:tr h="365760">
+              <a:tr h="457200">
                 <a:tc>
                   <a:txBody>
                     <a:bodyPr/>
@@ -3414,7 +3017,7 @@
                         <a:buNone/>
                       </a:pPr>
                       <a:r>
-                        <a:rPr lang="en-US" sz="1250" b="1" dirty="0">
+                        <a:rPr lang="en-US" sz="1500" b="1" dirty="0">
                           <a:solidFill>
                             <a:srgbClr val="FFFFFF"/>
                           </a:solidFill>
@@ -3424,14 +3027,14 @@
                         </a:rPr>
                         <a:t>Constraint</a:t>
                       </a:r>
-                      <a:endParaRPr lang="en-US" sz="1250" dirty="0">
+                      <a:endParaRPr lang="en-US" sz="1500" dirty="0">
                         <a:latin typeface="Arial" charset="0"/>
                         <a:ea typeface="Arial" charset="0"/>
                         <a:cs typeface="Arial" charset="0"/>
                       </a:endParaRPr>
                     </a:p>
                   </a:txBody>
-                  <a:tcPr marL="54864" marR="54864" marT="54864" marB="54864" anchor="ctr">
+                  <a:tcPr marL="73152" marR="73152" marT="73152" marB="73152" anchor="ctr">
                     <a:lnL w="9525" cap="flat" cmpd="sng" algn="ctr">
                       <a:solidFill>
                         <a:srgbClr val="D8DDE6"/>
@@ -3482,7 +3085,7 @@
                         <a:buNone/>
                       </a:pPr>
                       <a:r>
-                        <a:rPr lang="en-US" sz="1250" b="1" dirty="0">
+                        <a:rPr lang="en-US" sz="1500" b="1" dirty="0">
                           <a:solidFill>
                             <a:srgbClr val="FFFFFF"/>
                           </a:solidFill>
@@ -3492,14 +3095,14 @@
                         </a:rPr>
                         <a:t>Value</a:t>
                       </a:r>
-                      <a:endParaRPr lang="en-US" sz="1250" dirty="0">
+                      <a:endParaRPr lang="en-US" sz="1500" dirty="0">
                         <a:latin typeface="Arial" charset="0"/>
                         <a:ea typeface="Arial" charset="0"/>
                         <a:cs typeface="Arial" charset="0"/>
                       </a:endParaRPr>
                     </a:p>
                   </a:txBody>
-                  <a:tcPr marL="54864" marR="54864" marT="54864" marB="54864" anchor="ctr">
+                  <a:tcPr marL="73152" marR="73152" marT="73152" marB="73152" anchor="ctr">
                     <a:lnL w="9525" cap="flat" cmpd="sng" algn="ctr">
                       <a:solidFill>
                         <a:srgbClr val="D8DDE6"/>
@@ -3542,7 +3145,7 @@
                   </a:tcPr>
                 </a:tc>
               </a:tr>
-              <a:tr h="365760">
+              <a:tr h="457200">
                 <a:tc>
                   <a:txBody>
                     <a:bodyPr/>
@@ -3552,7 +3155,7 @@
                         <a:buNone/>
                       </a:pPr>
                       <a:r>
-                        <a:rPr lang="en-US" sz="1250" dirty="0">
+                        <a:rPr lang="en-US" sz="1500" dirty="0">
                           <a:solidFill>
                             <a:srgbClr val="000000"/>
                           </a:solidFill>
@@ -3562,14 +3165,14 @@
                         </a:rPr>
                         <a:t>Tasks</a:t>
                       </a:r>
-                      <a:endParaRPr lang="en-US" sz="1250" dirty="0">
+                      <a:endParaRPr lang="en-US" sz="1500" dirty="0">
                         <a:latin typeface="Arial" charset="0"/>
                         <a:ea typeface="Arial" charset="0"/>
                         <a:cs typeface="Arial" charset="0"/>
                       </a:endParaRPr>
                     </a:p>
                   </a:txBody>
-                  <a:tcPr marL="54864" marR="54864" marT="54864" marB="54864" anchor="ctr">
+                  <a:tcPr marL="73152" marR="73152" marT="73152" marB="73152" anchor="ctr">
                     <a:lnL w="9525" cap="flat" cmpd="sng" algn="ctr">
                       <a:solidFill>
                         <a:srgbClr val="D8DDE6"/>
@@ -3617,7 +3220,7 @@
                         <a:buNone/>
                       </a:pPr>
                       <a:r>
-                        <a:rPr lang="en-US" sz="1250" dirty="0">
+                        <a:rPr lang="en-US" sz="1500" dirty="0">
                           <a:solidFill>
                             <a:srgbClr val="000000"/>
                           </a:solidFill>
@@ -3625,16 +3228,16 @@
                           <a:ea typeface="Arial" pitchFamily="34" charset="-122"/>
                           <a:cs typeface="Arial" pitchFamily="34" charset="-120"/>
                         </a:rPr>
-                        <a:t>T1 Gaussian peak position · T2 sinusoid frequency · T3 change-point location · T4 one peak vs two (binary)</a:t>
+                        <a:t>T1 peak position · T2 sinusoid frequency · T3 change-point location · T4 one peak vs two (binary)</a:t>
                       </a:r>
-                      <a:endParaRPr lang="en-US" sz="1250" dirty="0">
+                      <a:endParaRPr lang="en-US" sz="1500" dirty="0">
                         <a:latin typeface="Arial" charset="0"/>
                         <a:ea typeface="Arial" charset="0"/>
                         <a:cs typeface="Arial" charset="0"/>
                       </a:endParaRPr>
                     </a:p>
                   </a:txBody>
-                  <a:tcPr marL="54864" marR="54864" marT="54864" marB="54864" anchor="ctr">
+                  <a:tcPr marL="73152" marR="73152" marT="73152" marB="73152" anchor="ctr">
                     <a:lnL w="9525" cap="flat" cmpd="sng" algn="ctr">
                       <a:solidFill>
                         <a:srgbClr val="D8DDE6"/>
@@ -3674,7 +3277,7 @@
                   </a:tcPr>
                 </a:tc>
               </a:tr>
-              <a:tr h="365760">
+              <a:tr h="457200">
                 <a:tc>
                   <a:txBody>
                     <a:bodyPr/>
@@ -3684,7 +3287,7 @@
                         <a:buNone/>
                       </a:pPr>
                       <a:r>
-                        <a:rPr lang="en-US" sz="1250" dirty="0">
+                        <a:rPr lang="en-US" sz="1500" dirty="0">
                           <a:solidFill>
                             <a:srgbClr val="000000"/>
                           </a:solidFill>
@@ -3694,14 +3297,14 @@
                         </a:rPr>
                         <a:t>Qubits</a:t>
                       </a:r>
-                      <a:endParaRPr lang="en-US" sz="1250" dirty="0">
+                      <a:endParaRPr lang="en-US" sz="1500" dirty="0">
                         <a:latin typeface="Arial" charset="0"/>
                         <a:ea typeface="Arial" charset="0"/>
                         <a:cs typeface="Arial" charset="0"/>
                       </a:endParaRPr>
                     </a:p>
                   </a:txBody>
-                  <a:tcPr marL="54864" marR="54864" marT="54864" marB="54864" anchor="ctr">
+                  <a:tcPr marL="73152" marR="73152" marT="73152" marB="73152" anchor="ctr">
                     <a:lnL w="9525" cap="flat" cmpd="sng" algn="ctr">
                       <a:solidFill>
                         <a:srgbClr val="D8DDE6"/>
@@ -3749,7 +3352,7 @@
                         <a:buNone/>
                       </a:pPr>
                       <a:r>
-                        <a:rPr lang="en-US" sz="1250" dirty="0">
+                        <a:rPr lang="en-US" sz="1500" dirty="0">
                           <a:solidFill>
                             <a:srgbClr val="000000"/>
                           </a:solidFill>
@@ -3757,16 +3360,16 @@
                           <a:ea typeface="Arial" pitchFamily="34" charset="-122"/>
                           <a:cs typeface="Arial" pitchFamily="34" charset="-120"/>
                         </a:rPr>
-                        <a:t>3 for T1, T2 (2^3 = 8 amplitudes); 5 for T3, T4 (2^5 = 32) - T3 and T4 are only frozen at n=5</a:t>
+                        <a:t>3 for T1, T2   ·   5 for T3, T4   (a circuit on n qubits holds 2^n numbers)</a:t>
                       </a:r>
-                      <a:endParaRPr lang="en-US" sz="1250" dirty="0">
+                      <a:endParaRPr lang="en-US" sz="1500" dirty="0">
                         <a:latin typeface="Arial" charset="0"/>
                         <a:ea typeface="Arial" charset="0"/>
                         <a:cs typeface="Arial" charset="0"/>
                       </a:endParaRPr>
                     </a:p>
                   </a:txBody>
-                  <a:tcPr marL="54864" marR="54864" marT="54864" marB="54864" anchor="ctr">
+                  <a:tcPr marL="73152" marR="73152" marT="73152" marB="73152" anchor="ctr">
                     <a:lnL w="9525" cap="flat" cmpd="sng" algn="ctr">
                       <a:solidFill>
                         <a:srgbClr val="D8DDE6"/>
@@ -3806,7 +3409,7 @@
                   </a:tcPr>
                 </a:tc>
               </a:tr>
-              <a:tr h="365760">
+              <a:tr h="457200">
                 <a:tc>
                   <a:txBody>
                     <a:bodyPr/>
@@ -3816,7 +3419,7 @@
                         <a:buNone/>
                       </a:pPr>
                       <a:r>
-                        <a:rPr lang="en-US" sz="1250" dirty="0">
+                        <a:rPr lang="en-US" sz="1500" dirty="0">
                           <a:solidFill>
                             <a:srgbClr val="000000"/>
                           </a:solidFill>
@@ -3826,14 +3429,14 @@
                         </a:rPr>
                         <a:t>Gate count</a:t>
                       </a:r>
-                      <a:endParaRPr lang="en-US" sz="1250" dirty="0">
+                      <a:endParaRPr lang="en-US" sz="1500" dirty="0">
                         <a:latin typeface="Arial" charset="0"/>
                         <a:ea typeface="Arial" charset="0"/>
                         <a:cs typeface="Arial" charset="0"/>
                       </a:endParaRPr>
                     </a:p>
                   </a:txBody>
-                  <a:tcPr marL="54864" marR="54864" marT="54864" marB="54864" anchor="ctr">
+                  <a:tcPr marL="73152" marR="73152" marT="73152" marB="73152" anchor="ctr">
                     <a:lnL w="9525" cap="flat" cmpd="sng" algn="ctr">
                       <a:solidFill>
                         <a:srgbClr val="D8DDE6"/>
@@ -3881,7 +3484,7 @@
                         <a:buNone/>
                       </a:pPr>
                       <a:r>
-                        <a:rPr lang="en-US" sz="1250" dirty="0">
+                        <a:rPr lang="en-US" sz="1500" dirty="0">
                           <a:solidFill>
                             <a:srgbClr val="000000"/>
                           </a:solidFill>
@@ -3889,16 +3492,16 @@
                           <a:ea typeface="Arial" pitchFamily="34" charset="-122"/>
                           <a:cs typeface="Arial" pitchFamily="34" charset="-120"/>
                         </a:rPr>
-                        <a:t>PRIMARY exactly 5 (not a max, not a range); Controls A and B relax it to 1-5. Every arm faces the same setting.</a:t>
+                        <a:t>5 exactly (PRIMARY)   ·   1 to 5 (both controls)</a:t>
                       </a:r>
-                      <a:endParaRPr lang="en-US" sz="1250" dirty="0">
+                      <a:endParaRPr lang="en-US" sz="1500" dirty="0">
                         <a:latin typeface="Arial" charset="0"/>
                         <a:ea typeface="Arial" charset="0"/>
                         <a:cs typeface="Arial" charset="0"/>
                       </a:endParaRPr>
                     </a:p>
                   </a:txBody>
-                  <a:tcPr marL="54864" marR="54864" marT="54864" marB="54864" anchor="ctr">
+                  <a:tcPr marL="73152" marR="73152" marT="73152" marB="73152" anchor="ctr">
                     <a:lnL w="9525" cap="flat" cmpd="sng" algn="ctr">
                       <a:solidFill>
                         <a:srgbClr val="D8DDE6"/>
@@ -3938,7 +3541,7 @@
                   </a:tcPr>
                 </a:tc>
               </a:tr>
-              <a:tr h="365760">
+              <a:tr h="457200">
                 <a:tc>
                   <a:txBody>
                     <a:bodyPr/>
@@ -3948,7 +3551,7 @@
                         <a:buNone/>
                       </a:pPr>
                       <a:r>
-                        <a:rPr lang="en-US" sz="1250" dirty="0">
+                        <a:rPr lang="en-US" sz="1500" dirty="0">
                           <a:solidFill>
                             <a:srgbClr val="000000"/>
                           </a:solidFill>
@@ -3956,16 +3559,16 @@
                           <a:ea typeface="Arial" pitchFamily="34" charset="-122"/>
                           <a:cs typeface="Arial" pitchFamily="34" charset="-120"/>
                         </a:rPr>
-                        <a:t>Gate set (7 types)</a:t>
+                        <a:t>Gate set</a:t>
                       </a:r>
-                      <a:endParaRPr lang="en-US" sz="1250" dirty="0">
+                      <a:endParaRPr lang="en-US" sz="1500" dirty="0">
                         <a:latin typeface="Arial" charset="0"/>
                         <a:ea typeface="Arial" charset="0"/>
                         <a:cs typeface="Arial" charset="0"/>
                       </a:endParaRPr>
                     </a:p>
                   </a:txBody>
-                  <a:tcPr marL="54864" marR="54864" marT="54864" marB="54864" anchor="ctr">
+                  <a:tcPr marL="73152" marR="73152" marT="73152" marB="73152" anchor="ctr">
                     <a:lnL w="9525" cap="flat" cmpd="sng" algn="ctr">
                       <a:solidFill>
                         <a:srgbClr val="D8DDE6"/>
@@ -4013,7 +3616,7 @@
                         <a:buNone/>
                       </a:pPr>
                       <a:r>
-                        <a:rPr lang="en-US" sz="1250" dirty="0">
+                        <a:rPr lang="en-US" sz="1500" dirty="0">
                           <a:solidFill>
                             <a:srgbClr val="000000"/>
                           </a:solidFill>
@@ -4021,16 +3624,16 @@
                           <a:ea typeface="Arial" pitchFamily="34" charset="-122"/>
                           <a:cs typeface="Arial" pitchFamily="34" charset="-120"/>
                         </a:rPr>
-                        <a:t>one wire: H, RX, RY, RZ      two wires: CRX, CRY, CRZ</a:t>
+                        <a:t>H, RX, RY, RZ (one qubit)   ·   CRX, CRY, CRZ (two qubits)</a:t>
                       </a:r>
-                      <a:endParaRPr lang="en-US" sz="1250" dirty="0">
+                      <a:endParaRPr lang="en-US" sz="1500" dirty="0">
                         <a:latin typeface="Arial" charset="0"/>
                         <a:ea typeface="Arial" charset="0"/>
                         <a:cs typeface="Arial" charset="0"/>
                       </a:endParaRPr>
                     </a:p>
                   </a:txBody>
-                  <a:tcPr marL="54864" marR="54864" marT="54864" marB="54864" anchor="ctr">
+                  <a:tcPr marL="73152" marR="73152" marT="73152" marB="73152" anchor="ctr">
                     <a:lnL w="9525" cap="flat" cmpd="sng" algn="ctr">
                       <a:solidFill>
                         <a:srgbClr val="D8DDE6"/>
@@ -4070,7 +3673,7 @@
                   </a:tcPr>
                 </a:tc>
               </a:tr>
-              <a:tr h="365760">
+              <a:tr h="457200">
                 <a:tc>
                   <a:txBody>
                     <a:bodyPr/>
@@ -4080,7 +3683,7 @@
                         <a:buNone/>
                       </a:pPr>
                       <a:r>
-                        <a:rPr lang="en-US" sz="1250" dirty="0">
+                        <a:rPr lang="en-US" sz="1500" dirty="0">
                           <a:solidFill>
                             <a:srgbClr val="000000"/>
                           </a:solidFill>
@@ -4090,14 +3693,14 @@
                         </a:rPr>
                         <a:t>Angles</a:t>
                       </a:r>
-                      <a:endParaRPr lang="en-US" sz="1250" dirty="0">
+                      <a:endParaRPr lang="en-US" sz="1500" dirty="0">
                         <a:latin typeface="Arial" charset="0"/>
                         <a:ea typeface="Arial" charset="0"/>
                         <a:cs typeface="Arial" charset="0"/>
                       </a:endParaRPr>
                     </a:p>
                   </a:txBody>
-                  <a:tcPr marL="54864" marR="54864" marT="54864" marB="54864" anchor="ctr">
+                  <a:tcPr marL="73152" marR="73152" marT="73152" marB="73152" anchor="ctr">
                     <a:lnL w="9525" cap="flat" cmpd="sng" algn="ctr">
                       <a:solidFill>
                         <a:srgbClr val="D8DDE6"/>
@@ -4145,7 +3748,7 @@
                         <a:buNone/>
                       </a:pPr>
                       <a:r>
-                        <a:rPr lang="en-US" sz="1250" dirty="0">
+                        <a:rPr lang="en-US" sz="1500" dirty="0">
                           <a:solidFill>
                             <a:srgbClr val="000000"/>
                           </a:solidFill>
@@ -4153,16 +3756,16 @@
                           <a:ea typeface="Arial" pitchFamily="34" charset="-122"/>
                           <a:cs typeface="Arial" pitchFamily="34" charset="-120"/>
                         </a:rPr>
-                        <a:t>one continuous theta per gate in [-pi, pi]; H carries none</a:t>
+                        <a:t>one number per gate, anywhere in [-pi, pi]   (H has none)</a:t>
                       </a:r>
-                      <a:endParaRPr lang="en-US" sz="1250" dirty="0">
+                      <a:endParaRPr lang="en-US" sz="1500" dirty="0">
                         <a:latin typeface="Arial" charset="0"/>
                         <a:ea typeface="Arial" charset="0"/>
                         <a:cs typeface="Arial" charset="0"/>
                       </a:endParaRPr>
                     </a:p>
                   </a:txBody>
-                  <a:tcPr marL="54864" marR="54864" marT="54864" marB="54864" anchor="ctr">
+                  <a:tcPr marL="73152" marR="73152" marT="73152" marB="73152" anchor="ctr">
                     <a:lnL w="9525" cap="flat" cmpd="sng" algn="ctr">
                       <a:solidFill>
                         <a:srgbClr val="D8DDE6"/>
@@ -4202,7 +3805,7 @@
                   </a:tcPr>
                 </a:tc>
               </a:tr>
-              <a:tr h="365760">
+              <a:tr h="457200">
                 <a:tc>
                   <a:txBody>
                     <a:bodyPr/>
@@ -4212,7 +3815,7 @@
                         <a:buNone/>
                       </a:pPr>
                       <a:r>
-                        <a:rPr lang="en-US" sz="1250" dirty="0">
+                        <a:rPr lang="en-US" sz="1500" dirty="0">
                           <a:solidFill>
                             <a:srgbClr val="000000"/>
                           </a:solidFill>
@@ -4220,16 +3823,16 @@
                           <a:ea typeface="Arial" pitchFamily="34" charset="-122"/>
                           <a:cs typeface="Arial" pitchFamily="34" charset="-120"/>
                         </a:rPr>
-                        <a:t>Budget</a:t>
+                        <a:t>Budget B</a:t>
                       </a:r>
-                      <a:endParaRPr lang="en-US" sz="1250" dirty="0">
+                      <a:endParaRPr lang="en-US" sz="1500" dirty="0">
                         <a:latin typeface="Arial" charset="0"/>
                         <a:ea typeface="Arial" charset="0"/>
                         <a:cs typeface="Arial" charset="0"/>
                       </a:endParaRPr>
                     </a:p>
                   </a:txBody>
-                  <a:tcPr marL="54864" marR="54864" marT="54864" marB="54864" anchor="ctr">
+                  <a:tcPr marL="73152" marR="73152" marT="73152" marB="73152" anchor="ctr">
                     <a:lnL w="9525" cap="flat" cmpd="sng" algn="ctr">
                       <a:solidFill>
                         <a:srgbClr val="D8DDE6"/>
@@ -4277,7 +3880,7 @@
                         <a:buNone/>
                       </a:pPr>
                       <a:r>
-                        <a:rPr lang="en-US" sz="1250" dirty="0">
+                        <a:rPr lang="en-US" sz="1500" dirty="0">
                           <a:solidFill>
                             <a:srgbClr val="000000"/>
                           </a:solidFill>
@@ -4285,16 +3888,16 @@
                           <a:ea typeface="Arial" pitchFamily="34" charset="-122"/>
                           <a:cs typeface="Arial" pitchFamily="34" charset="-120"/>
                         </a:rPr>
-                        <a:t>PRIMARY and Control A: B = 8 unique candidates. Control B: B = 4, the pilot's setting. 10 seeds throughout.</a:t>
+                        <a:t>8 distinct circuits scored per method (4 in Control B)   ·   10 seeds</a:t>
                       </a:r>
-                      <a:endParaRPr lang="en-US" sz="1250" dirty="0">
+                      <a:endParaRPr lang="en-US" sz="1500" dirty="0">
                         <a:latin typeface="Arial" charset="0"/>
                         <a:ea typeface="Arial" charset="0"/>
                         <a:cs typeface="Arial" charset="0"/>
                       </a:endParaRPr>
                     </a:p>
                   </a:txBody>
-                  <a:tcPr marL="54864" marR="54864" marT="54864" marB="54864" anchor="ctr">
+                  <a:tcPr marL="73152" marR="73152" marT="73152" marB="73152" anchor="ctr">
                     <a:lnL w="9525" cap="flat" cmpd="sng" algn="ctr">
                       <a:solidFill>
                         <a:srgbClr val="D8DDE6"/>
@@ -4334,7 +3937,7 @@
                   </a:tcPr>
                 </a:tc>
               </a:tr>
-              <a:tr h="365760">
+              <a:tr h="457200">
                 <a:tc>
                   <a:txBody>
                     <a:bodyPr/>
@@ -4344,7 +3947,7 @@
                         <a:buNone/>
                       </a:pPr>
                       <a:r>
-                        <a:rPr lang="en-US" sz="1250" dirty="0">
+                        <a:rPr lang="en-US" sz="1500" dirty="0">
                           <a:solidFill>
                             <a:srgbClr val="000000"/>
                           </a:solidFill>
@@ -4354,14 +3957,14 @@
                         </a:rPr>
                         <a:t>Training</a:t>
                       </a:r>
-                      <a:endParaRPr lang="en-US" sz="1250" dirty="0">
+                      <a:endParaRPr lang="en-US" sz="1500" dirty="0">
                         <a:latin typeface="Arial" charset="0"/>
                         <a:ea typeface="Arial" charset="0"/>
                         <a:cs typeface="Arial" charset="0"/>
                       </a:endParaRPr>
                     </a:p>
                   </a:txBody>
-                  <a:tcPr marL="54864" marR="54864" marT="54864" marB="54864" anchor="ctr">
+                  <a:tcPr marL="73152" marR="73152" marT="73152" marB="73152" anchor="ctr">
                     <a:lnL w="9525" cap="flat" cmpd="sng" algn="ctr">
                       <a:solidFill>
                         <a:srgbClr val="D8DDE6"/>
@@ -4409,7 +4012,7 @@
                         <a:buNone/>
                       </a:pPr>
                       <a:r>
-                        <a:rPr lang="en-US" sz="1250" dirty="0">
+                        <a:rPr lang="en-US" sz="1500" dirty="0">
                           <a:solidFill>
                             <a:srgbClr val="000000"/>
                           </a:solidFill>
@@ -4417,16 +4020,16 @@
                           <a:ea typeface="Arial" pitchFamily="34" charset="-122"/>
                           <a:cs typeface="Arial" pitchFamily="34" charset="-120"/>
                         </a:rPr>
-                        <a:t>NONE. The proposed angles are evaluated verbatim - no optimizer exists on this path.</a:t>
+                        <a:t>none - proposed angles are used exactly as written</a:t>
                       </a:r>
-                      <a:endParaRPr lang="en-US" sz="1250" dirty="0">
+                      <a:endParaRPr lang="en-US" sz="1500" dirty="0">
                         <a:latin typeface="Arial" charset="0"/>
                         <a:ea typeface="Arial" charset="0"/>
                         <a:cs typeface="Arial" charset="0"/>
                       </a:endParaRPr>
                     </a:p>
                   </a:txBody>
-                  <a:tcPr marL="54864" marR="54864" marT="54864" marB="54864" anchor="ctr">
+                  <a:tcPr marL="73152" marR="73152" marT="73152" marB="73152" anchor="ctr">
                     <a:lnL w="9525" cap="flat" cmpd="sng" algn="ctr">
                       <a:solidFill>
                         <a:srgbClr val="D8DDE6"/>
@@ -4466,7 +4069,7 @@
                   </a:tcPr>
                 </a:tc>
               </a:tr>
-              <a:tr h="365760">
+              <a:tr h="457200">
                 <a:tc>
                   <a:txBody>
                     <a:bodyPr/>
@@ -4476,7 +4079,7 @@
                         <a:buNone/>
                       </a:pPr>
                       <a:r>
-                        <a:rPr lang="en-US" sz="1250" dirty="0">
+                        <a:rPr lang="en-US" sz="1500" dirty="0">
                           <a:solidFill>
                             <a:srgbClr val="000000"/>
                           </a:solidFill>
@@ -4486,14 +4089,14 @@
                         </a:rPr>
                         <a:t>Encoding / readout</a:t>
                       </a:r>
-                      <a:endParaRPr lang="en-US" sz="1250" dirty="0">
+                      <a:endParaRPr lang="en-US" sz="1500" dirty="0">
                         <a:latin typeface="Arial" charset="0"/>
                         <a:ea typeface="Arial" charset="0"/>
                         <a:cs typeface="Arial" charset="0"/>
                       </a:endParaRPr>
                     </a:p>
                   </a:txBody>
-                  <a:tcPr marL="54864" marR="54864" marT="54864" marB="54864" anchor="ctr">
+                  <a:tcPr marL="73152" marR="73152" marT="73152" marB="73152" anchor="ctr">
                     <a:lnL w="9525" cap="flat" cmpd="sng" algn="ctr">
                       <a:solidFill>
                         <a:srgbClr val="D8DDE6"/>
@@ -4541,7 +4144,7 @@
                         <a:buNone/>
                       </a:pPr>
                       <a:r>
-                        <a:rPr lang="en-US" sz="1250" dirty="0">
+                        <a:rPr lang="en-US" sz="1500" dirty="0">
                           <a:solidFill>
                             <a:srgbClr val="000000"/>
                           </a:solidFill>
@@ -4549,16 +4152,16 @@
                           <a:ea typeface="Arial" pitchFamily="34" charset="-122"/>
                           <a:cs typeface="Arial" pitchFamily="34" charset="-120"/>
                         </a:rPr>
-                        <a:t>amplitude encoding; Pauli-Z on qubit 0; prediction = (1 - &lt;Z0&gt;)/2</a:t>
+                        <a:t>amplitude encoding; measure Z on qubit 0</a:t>
                       </a:r>
-                      <a:endParaRPr lang="en-US" sz="1250" dirty="0">
+                      <a:endParaRPr lang="en-US" sz="1500" dirty="0">
                         <a:latin typeface="Arial" charset="0"/>
                         <a:ea typeface="Arial" charset="0"/>
                         <a:cs typeface="Arial" charset="0"/>
                       </a:endParaRPr>
                     </a:p>
                   </a:txBody>
-                  <a:tcPr marL="54864" marR="54864" marT="54864" marB="54864" anchor="ctr">
+                  <a:tcPr marL="73152" marR="73152" marT="73152" marB="73152" anchor="ctr">
                     <a:lnL w="9525" cap="flat" cmpd="sng" algn="ctr">
                       <a:solidFill>
                         <a:srgbClr val="D8DDE6"/>
@@ -4598,7 +4201,7 @@
                   </a:tcPr>
                 </a:tc>
               </a:tr>
-              <a:tr h="365760">
+              <a:tr h="457200">
                 <a:tc>
                   <a:txBody>
                     <a:bodyPr/>
@@ -4608,7 +4211,7 @@
                         <a:buNone/>
                       </a:pPr>
                       <a:r>
-                        <a:rPr lang="en-US" sz="1250" dirty="0">
+                        <a:rPr lang="en-US" sz="1500" dirty="0">
                           <a:solidFill>
                             <a:srgbClr val="000000"/>
                           </a:solidFill>
@@ -4618,14 +4221,14 @@
                         </a:rPr>
                         <a:t>Classical params</a:t>
                       </a:r>
-                      <a:endParaRPr lang="en-US" sz="1250" dirty="0">
+                      <a:endParaRPr lang="en-US" sz="1500" dirty="0">
                         <a:latin typeface="Arial" charset="0"/>
                         <a:ea typeface="Arial" charset="0"/>
                         <a:cs typeface="Arial" charset="0"/>
                       </a:endParaRPr>
                     </a:p>
                   </a:txBody>
-                  <a:tcPr marL="54864" marR="54864" marT="54864" marB="54864" anchor="ctr">
+                  <a:tcPr marL="73152" marR="73152" marT="73152" marB="73152" anchor="ctr">
                     <a:lnL w="9525" cap="flat" cmpd="sng" algn="ctr">
                       <a:solidFill>
                         <a:srgbClr val="D8DDE6"/>
@@ -4673,7 +4276,7 @@
                         <a:buNone/>
                       </a:pPr>
                       <a:r>
-                        <a:rPr lang="en-US" sz="1250" dirty="0">
+                        <a:rPr lang="en-US" sz="1500" dirty="0">
                           <a:solidFill>
                             <a:srgbClr val="000000"/>
                           </a:solidFill>
@@ -4681,16 +4284,16 @@
                           <a:ea typeface="Arial" pitchFamily="34" charset="-122"/>
                           <a:cs typeface="Arial" pitchFamily="34" charset="-120"/>
                         </a:rPr>
-                        <a:t>zero - no dense layer can rescue a weak circuit</a:t>
+                        <a:t>zero - nothing outside the circuit can fix a bad circuit</a:t>
                       </a:r>
-                      <a:endParaRPr lang="en-US" sz="1250" dirty="0">
+                      <a:endParaRPr lang="en-US" sz="1500" dirty="0">
                         <a:latin typeface="Arial" charset="0"/>
                         <a:ea typeface="Arial" charset="0"/>
                         <a:cs typeface="Arial" charset="0"/>
                       </a:endParaRPr>
                     </a:p>
                   </a:txBody>
-                  <a:tcPr marL="54864" marR="54864" marT="54864" marB="54864" anchor="ctr">
+                  <a:tcPr marL="73152" marR="73152" marT="73152" marB="73152" anchor="ctr">
                     <a:lnL w="9525" cap="flat" cmpd="sng" algn="ctr">
                       <a:solidFill>
                         <a:srgbClr val="D8DDE6"/>
@@ -4736,41 +4339,14 @@
       </p:graphicFrame>
       <p:sp>
         <p:nvSpPr>
-          <p:cNvPr id="7" name="Shape 4"/>
-          <p:cNvSpPr/>
-          <p:nvPr/>
-        </p:nvSpPr>
-        <p:spPr>
-          <a:xfrm>
-            <a:off x="548640" y="5440680"/>
-            <a:ext cx="11109960" cy="822960"/>
-          </a:xfrm>
-          <a:prstGeom prst="roundRect">
-            <a:avLst>
-              <a:gd name="adj" fmla="val 8889"/>
-            </a:avLst>
-          </a:prstGeom>
-          <a:solidFill>
-            <a:srgbClr val="F4F6FA"/>
-          </a:solidFill>
-          <a:ln w="12700">
-            <a:solidFill>
-              <a:srgbClr val="D8DDE6"/>
-            </a:solidFill>
-            <a:prstDash val="solid"/>
-          </a:ln>
-        </p:spPr>
-      </p:sp>
-      <p:sp>
-        <p:nvSpPr>
-          <p:cNvPr id="8" name="Text 5"/>
-          <p:cNvSpPr/>
-          <p:nvPr/>
-        </p:nvSpPr>
-        <p:spPr>
-          <a:xfrm>
-            <a:off x="777240" y="5513832"/>
-            <a:ext cx="10607040" cy="685800"/>
+          <p:cNvPr id="7" name="Text 4"/>
+          <p:cNvSpPr/>
+          <p:nvPr/>
+        </p:nvSpPr>
+        <p:spPr>
+          <a:xfrm>
+            <a:off x="502920" y="6473952"/>
+            <a:ext cx="11185855" cy="274320"/>
           </a:xfrm>
           <a:prstGeom prst="rect">
             <a:avLst/>
@@ -4786,59 +4362,6 @@
               <a:buNone/>
             </a:pPr>
             <a:r>
-              <a:rPr lang="en-US" sz="1600" b="1" dirty="0">
-                <a:solidFill>
-                  <a:srgbClr val="1A1A2E"/>
-                </a:solidFill>
-                <a:latin typeface="Arial" pitchFamily="34" charset="0"/>
-                <a:ea typeface="Arial" pitchFamily="34" charset="-122"/>
-                <a:cs typeface="Arial" pitchFamily="34" charset="-120"/>
-              </a:rPr>
-              <a:t>One operation = one physical gate here.  </a:t>
-            </a:r>
-            <a:pPr indent="0" marL="0">
-              <a:buNone/>
-            </a:pPr>
-            <a:r>
-              <a:rPr lang="en-US" sz="1600" dirty="0">
-                <a:solidFill>
-                  <a:srgbClr val="1A1A2E"/>
-                </a:solidFill>
-                <a:latin typeface="Arial" pitchFamily="34" charset="0"/>
-                <a:ea typeface="Arial" pitchFamily="34" charset="-122"/>
-                <a:cs typeface="Arial" pitchFamily="34" charset="-120"/>
-              </a:rPr>
-              <a:t>There are no layer macros: a 5-gate circuit compiles to 5 gates, so "5" means the same thing to every arm and to the reader.</a:t>
-            </a:r>
-            <a:endParaRPr lang="en-US" sz="1600" dirty="0"/>
-          </a:p>
-        </p:txBody>
-      </p:sp>
-      <p:sp>
-        <p:nvSpPr>
-          <p:cNvPr id="9" name="Text 6"/>
-          <p:cNvSpPr/>
-          <p:nvPr/>
-        </p:nvSpPr>
-        <p:spPr>
-          <a:xfrm>
-            <a:off x="502920" y="6473952"/>
-            <a:ext cx="11185855" cy="274320"/>
-          </a:xfrm>
-          <a:prstGeom prst="rect">
-            <a:avLst/>
-          </a:prstGeom>
-          <a:noFill/>
-          <a:ln/>
-        </p:spPr>
-        <p:txBody>
-          <a:bodyPr wrap="square" lIns="0" tIns="0" rIns="0" bIns="0" rtlCol="0" anchor="ctr"/>
-          <a:lstStyle/>
-          <a:p>
-            <a:pPr indent="0" marL="0">
-              <a:buNone/>
-            </a:pPr>
-            <a:r>
               <a:rPr lang="en-US" sz="1100" dirty="0">
                 <a:solidFill>
                   <a:srgbClr val="55606E"/>
@@ -4847,7 +4370,7 @@
                 <a:ea typeface="Arial" pitchFamily="34" charset="-122"/>
                 <a:cs typeface="Arial" pitchFamily="34" charset="-120"/>
               </a:rPr>
-              <a:t>llm_vqc/mini5/space.py - the same grammar check is applied to classical samplers and LLM replies alike</a:t>
+              <a:t>One operation = one physical gate; a 5-gate circuit compiles to 5 gates. The same grammar check is applied to classical samplers and LLM replies alike</a:t>
             </a:r>
             <a:endParaRPr lang="en-US" sz="1100" dirty="0"/>
           </a:p>
@@ -4957,7 +4480,7 @@
                 <a:ea typeface="Arial" pitchFamily="34" charset="-122"/>
                 <a:cs typeface="Arial" pitchFamily="34" charset="-120"/>
               </a:rPr>
-              <a:t>One number, defined once: RMSE</a:t>
+              <a:t>One number: RMSE, the typical size of the error</a:t>
             </a:r>
             <a:endParaRPr lang="en-US" sz="3000" dirty="0"/>
           </a:p>
@@ -4965,144 +4488,26 @@
       </p:sp>
       <p:sp>
         <p:nvSpPr>
-          <p:cNvPr id="4" name="Text 2"/>
-          <p:cNvSpPr/>
-          <p:nvPr/>
-        </p:nvSpPr>
-        <p:spPr>
-          <a:xfrm>
-            <a:off x="640080" y="1508760"/>
-            <a:ext cx="10972800" cy="2743200"/>
-          </a:xfrm>
-          <a:prstGeom prst="rect">
-            <a:avLst/>
-          </a:prstGeom>
-          <a:noFill/>
-          <a:ln/>
-        </p:spPr>
-        <p:txBody>
-          <a:bodyPr wrap="square" lIns="0" tIns="0" rIns="0" bIns="0" rtlCol="0" anchor="t"/>
-          <a:lstStyle/>
-          <a:p>
-            <a:pPr marL="342900" indent="-342900">
-              <a:lnSpc>
-                <a:spcPct val="112000"/>
-              </a:lnSpc>
-              <a:spcAft>
-                <a:spcPts val="1200"/>
-              </a:spcAft>
-              <a:buSzPct val="100000"/>
-              <a:buChar char="•"/>
-            </a:pPr>
-            <a:r>
-              <a:rPr lang="en-US" sz="1700" dirty="0">
-                <a:solidFill>
-                  <a:srgbClr val="1A1A2E"/>
-                </a:solidFill>
-                <a:latin typeface="Arial" pitchFamily="34" charset="0"/>
-                <a:ea typeface="Arial" pitchFamily="34" charset="-122"/>
-                <a:cs typeface="Arial" pitchFamily="34" charset="-120"/>
-              </a:rPr>
-              <a:t>Validation RMSE drives the search. Each arm evaluates its candidates and keeps the best one by validation RMSE.</a:t>
-            </a:r>
-            <a:endParaRPr lang="en-US" sz="1700" dirty="0"/>
-          </a:p>
-          <a:p>
-            <a:pPr marL="342900" indent="-342900">
-              <a:lnSpc>
-                <a:spcPct val="112000"/>
-              </a:lnSpc>
-              <a:spcAft>
-                <a:spcPts val="1200"/>
-              </a:spcAft>
-              <a:buSzPct val="100000"/>
-              <a:buChar char="•"/>
-            </a:pPr>
-            <a:r>
-              <a:rPr lang="en-US" sz="1700" dirty="0">
-                <a:solidFill>
-                  <a:srgbClr val="1A1A2E"/>
-                </a:solidFill>
-                <a:latin typeface="Arial" pitchFamily="34" charset="0"/>
-                <a:ea typeface="Arial" pitchFamily="34" charset="-122"/>
-                <a:cs typeface="Arial" pitchFamily="34" charset="-120"/>
-              </a:rPr>
-              <a:t>Test RMSE is reported. The held-out split is touched once per cell, after the choice is frozen, so the reported number was never used to make that choice.</a:t>
-            </a:r>
-            <a:endParaRPr lang="en-US" sz="1700" dirty="0"/>
-          </a:p>
-          <a:p>
-            <a:pPr marL="342900" indent="-342900">
-              <a:lnSpc>
-                <a:spcPct val="112000"/>
-              </a:lnSpc>
-              <a:spcAft>
-                <a:spcPts val="1200"/>
-              </a:spcAft>
-              <a:buSzPct val="100000"/>
-              <a:buChar char="•"/>
-            </a:pPr>
-            <a:r>
-              <a:rPr lang="en-US" sz="1700" dirty="0">
-                <a:solidFill>
-                  <a:srgbClr val="1A1A2E"/>
-                </a:solidFill>
-                <a:latin typeface="Arial" pitchFamily="34" charset="0"/>
-                <a:ea typeface="Arial" pitchFamily="34" charset="-122"/>
-                <a:cs typeface="Arial" pitchFamily="34" charset="-120"/>
-              </a:rPr>
-              <a:t>T1-T3 regress a continuous quantity, so RMSE is the natural metric.</a:t>
-            </a:r>
-            <a:endParaRPr lang="en-US" sz="1700" dirty="0"/>
-          </a:p>
-          <a:p>
-            <a:pPr marL="342900" indent="-342900">
-              <a:lnSpc>
-                <a:spcPct val="112000"/>
-              </a:lnSpc>
-              <a:spcAft>
-                <a:spcPts val="1200"/>
-              </a:spcAft>
-              <a:buSzPct val="100000"/>
-              <a:buChar char="•"/>
-            </a:pPr>
-            <a:r>
-              <a:rPr lang="en-US" sz="1700" dirty="0">
-                <a:solidFill>
-                  <a:srgbClr val="1A1A2E"/>
-                </a:solidFill>
-                <a:latin typeface="Arial" pitchFamily="34" charset="0"/>
-                <a:ea typeface="Arial" pitchFamily="34" charset="-122"/>
-                <a:cs typeface="Arial" pitchFamily="34" charset="-120"/>
-              </a:rPr>
-              <a:t>T4 is binary classification. RMSE against a 0/1 label equals the square root of the Brier score - a proper scoring rule - so all four panels share one axis. AUROC is reported alongside it, and slide 7 shows why that matters.</a:t>
-            </a:r>
-            <a:endParaRPr lang="en-US" sz="1700" dirty="0"/>
-          </a:p>
-        </p:txBody>
-      </p:sp>
-      <p:sp>
-        <p:nvSpPr>
-          <p:cNvPr id="5" name="Shape 3"/>
-          <p:cNvSpPr/>
-          <p:nvPr/>
-        </p:nvSpPr>
-        <p:spPr>
-          <a:xfrm>
-            <a:off x="640080" y="4434840"/>
-            <a:ext cx="10881360" cy="1371600"/>
+          <p:cNvPr id="4" name="Shape 2"/>
+          <p:cNvSpPr/>
+          <p:nvPr/>
+        </p:nvSpPr>
+        <p:spPr>
+          <a:xfrm>
+            <a:off x="5699455" y="256032"/>
+            <a:ext cx="5989320" cy="402336"/>
           </a:xfrm>
           <a:prstGeom prst="roundRect">
             <a:avLst>
-              <a:gd name="adj" fmla="val 6667"/>
+              <a:gd name="adj" fmla="val 15909"/>
             </a:avLst>
           </a:prstGeom>
           <a:solidFill>
-            <a:srgbClr val="FDF6E8"/>
+            <a:srgbClr val="F4F6FA"/>
           </a:solidFill>
-          <a:ln w="15240">
+          <a:ln w="12700">
             <a:solidFill>
-              <a:srgbClr val="B8860B"/>
+              <a:srgbClr val="D8DDE6"/>
             </a:solidFill>
             <a:prstDash val="solid"/>
           </a:ln>
@@ -5110,14 +4515,14 @@
       </p:sp>
       <p:sp>
         <p:nvSpPr>
-          <p:cNvPr id="6" name="Text 4"/>
-          <p:cNvSpPr/>
-          <p:nvPr/>
-        </p:nvSpPr>
-        <p:spPr>
-          <a:xfrm>
-            <a:off x="868680" y="4572000"/>
-            <a:ext cx="10424160" cy="1097280"/>
+          <p:cNvPr id="5" name="Text 3"/>
+          <p:cNvSpPr/>
+          <p:nvPr/>
+        </p:nvSpPr>
+        <p:spPr>
+          <a:xfrm>
+            <a:off x="5836615" y="274320"/>
+            <a:ext cx="5715000" cy="365760"/>
           </a:xfrm>
           <a:prstGeom prst="rect">
             <a:avLst/>
@@ -5129,11 +4534,154 @@
           <a:bodyPr wrap="square" lIns="0" tIns="0" rIns="0" bIns="0" rtlCol="0" anchor="ctr"/>
           <a:lstStyle/>
           <a:p>
+            <a:pPr algn="r" indent="0" marL="0">
+              <a:buNone/>
+            </a:pPr>
+            <a:r>
+              <a:rPr lang="en-US" sz="1150" b="1" dirty="0">
+                <a:solidFill>
+                  <a:srgbClr val="1E3A5F"/>
+                </a:solidFill>
+                <a:latin typeface="Arial" pitchFamily="34" charset="0"/>
+                <a:ea typeface="Arial" pitchFamily="34" charset="-122"/>
+                <a:cs typeface="Arial" pitchFamily="34" charset="-120"/>
+              </a:rPr>
+              <a:t>Applies to all three conditions</a:t>
+            </a:r>
+            <a:pPr algn="r" indent="0" marL="0">
+              <a:buNone/>
+            </a:pPr>
+            <a:r>
+              <a:rPr lang="en-US" sz="1150" dirty="0">
+                <a:solidFill>
+                  <a:srgbClr val="55606E"/>
+                </a:solidFill>
+                <a:latin typeface="Arial" pitchFamily="34" charset="0"/>
+                <a:ea typeface="Arial" pitchFamily="34" charset="-122"/>
+                <a:cs typeface="Arial" pitchFamily="34" charset="-120"/>
+              </a:rPr>
+              <a:t>   same pipeline throughout</a:t>
+            </a:r>
+            <a:endParaRPr lang="en-US" sz="1150" dirty="0"/>
+          </a:p>
+        </p:txBody>
+      </p:sp>
+      <p:pic>
+        <p:nvPicPr>
+          <p:cNvPr id="6" name="Image 0" descr="/Users/hatanakatomoya/Developer/Sim/llm-vqc/.claude/worktrees/github-author-config-faee6e/docs/presentation/mini5/figures/fig_contract.png">    </p:cNvPr>
+          <p:cNvPicPr>
+            <a:picLocks noChangeAspect="1"/>
+          </p:cNvPicPr>
+          <p:nvPr/>
+        </p:nvPicPr>
+        <p:blipFill>
+          <a:blip r:embed="rId1"/>
+          <a:stretch>
+            <a:fillRect/>
+          </a:stretch>
+        </p:blipFill>
+        <p:spPr>
+          <a:xfrm>
+            <a:off x="411480" y="1371600"/>
+            <a:ext cx="11384280" cy="2624328"/>
+          </a:xfrm>
+          <a:prstGeom prst="rect">
+            <a:avLst/>
+          </a:prstGeom>
+        </p:spPr>
+      </p:pic>
+      <p:sp>
+        <p:nvSpPr>
+          <p:cNvPr id="7" name="Shape 4"/>
+          <p:cNvSpPr/>
+          <p:nvPr/>
+        </p:nvSpPr>
+        <p:spPr>
+          <a:xfrm>
+            <a:off x="548640" y="4206240"/>
+            <a:ext cx="3520440" cy="1600200"/>
+          </a:xfrm>
+          <a:prstGeom prst="roundRect">
+            <a:avLst>
+              <a:gd name="adj" fmla="val 5714"/>
+            </a:avLst>
+          </a:prstGeom>
+          <a:solidFill>
+            <a:srgbClr val="F4F6FA"/>
+          </a:solidFill>
+          <a:ln w="19050">
+            <a:solidFill>
+              <a:srgbClr val="1E3A5F"/>
+            </a:solidFill>
+            <a:prstDash val="solid"/>
+          </a:ln>
+        </p:spPr>
+      </p:sp>
+      <p:sp>
+        <p:nvSpPr>
+          <p:cNvPr id="8" name="Text 5"/>
+          <p:cNvSpPr/>
+          <p:nvPr/>
+        </p:nvSpPr>
+        <p:spPr>
+          <a:xfrm>
+            <a:off x="777240" y="4315968"/>
+            <a:ext cx="3108960" cy="320040"/>
+          </a:xfrm>
+          <a:prstGeom prst="rect">
+            <a:avLst/>
+          </a:prstGeom>
+          <a:noFill/>
+          <a:ln/>
+        </p:spPr>
+        <p:txBody>
+          <a:bodyPr wrap="square" lIns="0" tIns="0" rIns="0" bIns="0" rtlCol="0" anchor="ctr"/>
+          <a:lstStyle/>
+          <a:p>
             <a:pPr indent="0" marL="0">
               <a:buNone/>
             </a:pPr>
             <a:r>
-              <a:rPr lang="en-US" sz="1700" b="1" dirty="0">
+              <a:rPr lang="en-US" sz="1500" b="1" dirty="0">
+                <a:solidFill>
+                  <a:srgbClr val="1E3A5F"/>
+                </a:solidFill>
+                <a:latin typeface="Arial" pitchFamily="34" charset="0"/>
+                <a:ea typeface="Arial" pitchFamily="34" charset="-122"/>
+                <a:cs typeface="Arial" pitchFamily="34" charset="-120"/>
+              </a:rPr>
+              <a:t>Validation RMSE</a:t>
+            </a:r>
+            <a:endParaRPr lang="en-US" sz="1500" dirty="0"/>
+          </a:p>
+        </p:txBody>
+      </p:sp>
+      <p:sp>
+        <p:nvSpPr>
+          <p:cNvPr id="9" name="Text 6"/>
+          <p:cNvSpPr/>
+          <p:nvPr/>
+        </p:nvSpPr>
+        <p:spPr>
+          <a:xfrm>
+            <a:off x="777240" y="4681728"/>
+            <a:ext cx="3108960" cy="1005840"/>
+          </a:xfrm>
+          <a:prstGeom prst="rect">
+            <a:avLst/>
+          </a:prstGeom>
+          <a:noFill/>
+          <a:ln/>
+        </p:spPr>
+        <p:txBody>
+          <a:bodyPr wrap="square" lIns="0" tIns="0" rIns="0" bIns="0" rtlCol="0" anchor="t"/>
+          <a:lstStyle/>
+          <a:p>
+            <a:pPr indent="0" marL="0">
+              <a:buNone/>
+            </a:pPr>
+            <a:r>
+              <a:rPr lang="en-US" sz="1350" dirty="0">
                 <a:solidFill>
                   <a:srgbClr val="1A1A2E"/>
                 </a:solidFill>
@@ -5141,13 +4689,104 @@
                 <a:ea typeface="Arial" pitchFamily="34" charset="-122"/>
                 <a:cs typeface="Arial" pitchFamily="34" charset="-120"/>
               </a:rPr>
-              <a:t>RMSE is comparable between arms within one task, never between tasks.  </a:t>
-            </a:r>
+              <a:t>drives the search - each method keeps its own best</a:t>
+            </a:r>
+            <a:endParaRPr lang="en-US" sz="1350" dirty="0"/>
+          </a:p>
+        </p:txBody>
+      </p:sp>
+      <p:sp>
+        <p:nvSpPr>
+          <p:cNvPr id="10" name="Shape 7"/>
+          <p:cNvSpPr/>
+          <p:nvPr/>
+        </p:nvSpPr>
+        <p:spPr>
+          <a:xfrm>
+            <a:off x="4315968" y="4206240"/>
+            <a:ext cx="3520440" cy="1600200"/>
+          </a:xfrm>
+          <a:prstGeom prst="roundRect">
+            <a:avLst>
+              <a:gd name="adj" fmla="val 5714"/>
+            </a:avLst>
+          </a:prstGeom>
+          <a:solidFill>
+            <a:srgbClr val="F4F6FA"/>
+          </a:solidFill>
+          <a:ln w="19050">
+            <a:solidFill>
+              <a:srgbClr val="0B7A4B"/>
+            </a:solidFill>
+            <a:prstDash val="solid"/>
+          </a:ln>
+        </p:spPr>
+      </p:sp>
+      <p:sp>
+        <p:nvSpPr>
+          <p:cNvPr id="11" name="Text 8"/>
+          <p:cNvSpPr/>
+          <p:nvPr/>
+        </p:nvSpPr>
+        <p:spPr>
+          <a:xfrm>
+            <a:off x="4544568" y="4315968"/>
+            <a:ext cx="3108960" cy="320040"/>
+          </a:xfrm>
+          <a:prstGeom prst="rect">
+            <a:avLst/>
+          </a:prstGeom>
+          <a:noFill/>
+          <a:ln/>
+        </p:spPr>
+        <p:txBody>
+          <a:bodyPr wrap="square" lIns="0" tIns="0" rIns="0" bIns="0" rtlCol="0" anchor="ctr"/>
+          <a:lstStyle/>
+          <a:p>
             <a:pPr indent="0" marL="0">
               <a:buNone/>
             </a:pPr>
             <a:r>
-              <a:rPr lang="en-US" sz="1700" dirty="0">
+              <a:rPr lang="en-US" sz="1500" b="1" dirty="0">
+                <a:solidFill>
+                  <a:srgbClr val="0B7A4B"/>
+                </a:solidFill>
+                <a:latin typeface="Arial" pitchFamily="34" charset="0"/>
+                <a:ea typeface="Arial" pitchFamily="34" charset="-122"/>
+                <a:cs typeface="Arial" pitchFamily="34" charset="-120"/>
+              </a:rPr>
+              <a:t>Test RMSE</a:t>
+            </a:r>
+            <a:endParaRPr lang="en-US" sz="1500" dirty="0"/>
+          </a:p>
+        </p:txBody>
+      </p:sp>
+      <p:sp>
+        <p:nvSpPr>
+          <p:cNvPr id="12" name="Text 9"/>
+          <p:cNvSpPr/>
+          <p:nvPr/>
+        </p:nvSpPr>
+        <p:spPr>
+          <a:xfrm>
+            <a:off x="4544568" y="4681728"/>
+            <a:ext cx="3108960" cy="1005840"/>
+          </a:xfrm>
+          <a:prstGeom prst="rect">
+            <a:avLst/>
+          </a:prstGeom>
+          <a:noFill/>
+          <a:ln/>
+        </p:spPr>
+        <p:txBody>
+          <a:bodyPr wrap="square" lIns="0" tIns="0" rIns="0" bIns="0" rtlCol="0" anchor="t"/>
+          <a:lstStyle/>
+          <a:p>
+            <a:pPr indent="0" marL="0">
+              <a:buNone/>
+            </a:pPr>
+            <a:r>
+              <a:rPr lang="en-US" sz="1350" dirty="0">
                 <a:solidFill>
                   <a:srgbClr val="1A1A2E"/>
                 </a:solidFill>
@@ -5155,15 +4794,120 @@
                 <a:ea typeface="Arial" pitchFamily="34" charset="-122"/>
                 <a:cs typeface="Arial" pitchFamily="34" charset="-120"/>
               </a:rPr>
-              <a:t>T1, T2, T3 and T4 predict different quantities on different scales, so the panels each carry their own y-axis and a T1 value must not be read against a T3 value.</a:t>
-            </a:r>
-            <a:endParaRPr lang="en-US" sz="1700" dirty="0"/>
-          </a:p>
-        </p:txBody>
-      </p:sp>
-      <p:sp>
-        <p:nvSpPr>
-          <p:cNvPr id="7" name="Text 5"/>
+              <a:t>reported once, after the choice is frozen. Never used to choose.</a:t>
+            </a:r>
+            <a:endParaRPr lang="en-US" sz="1350" dirty="0"/>
+          </a:p>
+        </p:txBody>
+      </p:sp>
+      <p:sp>
+        <p:nvSpPr>
+          <p:cNvPr id="13" name="Shape 10"/>
+          <p:cNvSpPr/>
+          <p:nvPr/>
+        </p:nvSpPr>
+        <p:spPr>
+          <a:xfrm>
+            <a:off x="8092440" y="4206240"/>
+            <a:ext cx="3520440" cy="1600200"/>
+          </a:xfrm>
+          <a:prstGeom prst="roundRect">
+            <a:avLst>
+              <a:gd name="adj" fmla="val 5714"/>
+            </a:avLst>
+          </a:prstGeom>
+          <a:solidFill>
+            <a:srgbClr val="F4F6FA"/>
+          </a:solidFill>
+          <a:ln w="19050">
+            <a:solidFill>
+              <a:srgbClr val="B3261E"/>
+            </a:solidFill>
+            <a:prstDash val="solid"/>
+          </a:ln>
+        </p:spPr>
+      </p:sp>
+      <p:sp>
+        <p:nvSpPr>
+          <p:cNvPr id="14" name="Text 11"/>
+          <p:cNvSpPr/>
+          <p:nvPr/>
+        </p:nvSpPr>
+        <p:spPr>
+          <a:xfrm>
+            <a:off x="8321040" y="4315968"/>
+            <a:ext cx="3108960" cy="320040"/>
+          </a:xfrm>
+          <a:prstGeom prst="rect">
+            <a:avLst/>
+          </a:prstGeom>
+          <a:noFill/>
+          <a:ln/>
+        </p:spPr>
+        <p:txBody>
+          <a:bodyPr wrap="square" lIns="0" tIns="0" rIns="0" bIns="0" rtlCol="0" anchor="ctr"/>
+          <a:lstStyle/>
+          <a:p>
+            <a:pPr indent="0" marL="0">
+              <a:buNone/>
+            </a:pPr>
+            <a:r>
+              <a:rPr lang="en-US" sz="1500" b="1" dirty="0">
+                <a:solidFill>
+                  <a:srgbClr val="B3261E"/>
+                </a:solidFill>
+                <a:latin typeface="Arial" pitchFamily="34" charset="0"/>
+                <a:ea typeface="Arial" pitchFamily="34" charset="-122"/>
+                <a:cs typeface="Arial" pitchFamily="34" charset="-120"/>
+              </a:rPr>
+              <a:t>T4 is yes/no</a:t>
+            </a:r>
+            <a:endParaRPr lang="en-US" sz="1500" dirty="0"/>
+          </a:p>
+        </p:txBody>
+      </p:sp>
+      <p:sp>
+        <p:nvSpPr>
+          <p:cNvPr id="15" name="Text 12"/>
+          <p:cNvSpPr/>
+          <p:nvPr/>
+        </p:nvSpPr>
+        <p:spPr>
+          <a:xfrm>
+            <a:off x="8321040" y="4681728"/>
+            <a:ext cx="3108960" cy="1005840"/>
+          </a:xfrm>
+          <a:prstGeom prst="rect">
+            <a:avLst/>
+          </a:prstGeom>
+          <a:noFill/>
+          <a:ln/>
+        </p:spPr>
+        <p:txBody>
+          <a:bodyPr wrap="square" lIns="0" tIns="0" rIns="0" bIns="0" rtlCol="0" anchor="t"/>
+          <a:lstStyle/>
+          <a:p>
+            <a:pPr indent="0" marL="0">
+              <a:buNone/>
+            </a:pPr>
+            <a:r>
+              <a:rPr lang="en-US" sz="1350" dirty="0">
+                <a:solidFill>
+                  <a:srgbClr val="1A1A2E"/>
+                </a:solidFill>
+                <a:latin typeface="Arial" pitchFamily="34" charset="0"/>
+                <a:ea typeface="Arial" pitchFamily="34" charset="-122"/>
+                <a:cs typeface="Arial" pitchFamily="34" charset="-120"/>
+              </a:rPr>
+              <a:t>so RMSE there is the error on a 0/1 label. AUROC is shown too - slide 7.</a:t>
+            </a:r>
+            <a:endParaRPr lang="en-US" sz="1350" dirty="0"/>
+          </a:p>
+        </p:txBody>
+      </p:sp>
+      <p:sp>
+        <p:nvSpPr>
+          <p:cNvPr id="16" name="Text 13"/>
           <p:cNvSpPr/>
           <p:nvPr/>
         </p:nvSpPr>
@@ -5194,7 +4938,7 @@
                 <a:ea typeface="Arial" pitchFamily="34" charset="-122"/>
                 <a:cs typeface="Arial" pitchFamily="34" charset="-120"/>
               </a:rPr>
-              <a:t>256 train / 256 validation / 2048 test per replicate, regenerated per seed</a:t>
+              <a:t>RMSE compares arms WITHIN one task only: the four tasks predict different quantities on different scales</a:t>
             </a:r>
             <a:endParaRPr lang="en-US" sz="1100" dirty="0"/>
           </a:p>
@@ -5304,7 +5048,7 @@
                 <a:ea typeface="Arial" pitchFamily="34" charset="-122"/>
                 <a:cs typeface="Arial" pitchFamily="34" charset="-120"/>
               </a:rPr>
-              <a:t>Five arms, one shared budget of unique candidates</a:t>
+              <a:t>Five methods, one shared budget</a:t>
             </a:r>
             <a:endParaRPr lang="en-US" sz="3000" dirty="0"/>
           </a:p>
@@ -5390,1228 +5134,30 @@
           </a:p>
         </p:txBody>
       </p:sp>
-      <p:graphicFrame>
-        <p:nvGraphicFramePr>
-          <p:cNvPr id="6" name="Table 0"/>
-          <p:cNvGraphicFramePr>
-            <a:graphicFrameLocks noGrp="1"/>
-          </p:cNvGraphicFramePr>
-          <p:nvPr>
-            <p:extLst>
-              <p:ext uri="{D42A27DB-BD31-4B8C-83A1-F6EECF244321}">
-                <p14:modId xmlns:p14="http://schemas.microsoft.com/office/powerpoint/2010/main" val="1579011935"/>
-              </p:ext>
-            </p:extLst>
-          </p:nvPr>
-        </p:nvGraphicFramePr>
-        <p:xfrm>
-          <a:off x="548640" y="1463040"/>
-          <a:ext cx="11109960" cy="914400"/>
-        </p:xfrm>
-        <a:graphic>
-          <a:graphicData uri="http://schemas.openxmlformats.org/drawingml/2006/table">
-            <a:tbl>
-              <a:tblPr/>
-              <a:tblGrid>
-                <a:gridCol w="2286000"/>
-                <a:gridCol w="6949440"/>
-                <a:gridCol w="1874520"/>
-              </a:tblGrid>
-              <a:tr h="420624">
-                <a:tc>
-                  <a:txBody>
-                    <a:bodyPr/>
-                    <a:lstStyle/>
-                    <a:p>
-                      <a:pPr indent="0" marL="0">
-                        <a:buNone/>
-                      </a:pPr>
-                      <a:r>
-                        <a:rPr lang="en-US" sz="1450" b="1" dirty="0">
-                          <a:solidFill>
-                            <a:srgbClr val="FFFFFF"/>
-                          </a:solidFill>
-                          <a:latin typeface="Arial" pitchFamily="34" charset="0"/>
-                          <a:ea typeface="Arial" pitchFamily="34" charset="-122"/>
-                          <a:cs typeface="Arial" pitchFamily="34" charset="-120"/>
-                        </a:rPr>
-                        <a:t>Arm</a:t>
-                      </a:r>
-                      <a:endParaRPr lang="en-US" sz="1450" dirty="0">
-                        <a:latin typeface="Arial" charset="0"/>
-                        <a:ea typeface="Arial" charset="0"/>
-                        <a:cs typeface="Arial" charset="0"/>
-                      </a:endParaRPr>
-                    </a:p>
-                  </a:txBody>
-                  <a:tcPr marL="64008" marR="64008" marT="64008" marB="64008" anchor="ctr">
-                    <a:lnL w="9525" cap="flat" cmpd="sng" algn="ctr">
-                      <a:solidFill>
-                        <a:srgbClr val="D8DDE6"/>
-                      </a:solidFill>
-                      <a:prstDash val="solid"/>
-                      <a:round/>
-                      <a:headEnd type="none" w="med" len="med"/>
-                      <a:tailEnd type="none" w="med" len="med"/>
-                    </a:lnL>
-                    <a:lnR w="9525" cap="flat" cmpd="sng" algn="ctr">
-                      <a:solidFill>
-                        <a:srgbClr val="D8DDE6"/>
-                      </a:solidFill>
-                      <a:prstDash val="solid"/>
-                      <a:round/>
-                      <a:headEnd type="none" w="med" len="med"/>
-                      <a:tailEnd type="none" w="med" len="med"/>
-                    </a:lnR>
-                    <a:lnT w="9525" cap="flat" cmpd="sng" algn="ctr">
-                      <a:solidFill>
-                        <a:srgbClr val="D8DDE6"/>
-                      </a:solidFill>
-                      <a:prstDash val="solid"/>
-                      <a:round/>
-                      <a:headEnd type="none" w="med" len="med"/>
-                      <a:tailEnd type="none" w="med" len="med"/>
-                    </a:lnT>
-                    <a:lnB w="9525" cap="flat" cmpd="sng" algn="ctr">
-                      <a:solidFill>
-                        <a:srgbClr val="D8DDE6"/>
-                      </a:solidFill>
-                      <a:prstDash val="solid"/>
-                      <a:round/>
-                      <a:headEnd type="none" w="med" len="med"/>
-                      <a:tailEnd type="none" w="med" len="med"/>
-                    </a:lnB>
-                    <a:solidFill>
-                      <a:srgbClr val="1E3A5F"/>
-                    </a:solidFill>
-                  </a:tcPr>
-                </a:tc>
-                <a:tc>
-                  <a:txBody>
-                    <a:bodyPr/>
-                    <a:lstStyle/>
-                    <a:p>
-                      <a:pPr indent="0" marL="0">
-                        <a:buNone/>
-                      </a:pPr>
-                      <a:r>
-                        <a:rPr lang="en-US" sz="1450" b="1" dirty="0">
-                          <a:solidFill>
-                            <a:srgbClr val="FFFFFF"/>
-                          </a:solidFill>
-                          <a:latin typeface="Arial" pitchFamily="34" charset="0"/>
-                          <a:ea typeface="Arial" pitchFamily="34" charset="-122"/>
-                          <a:cs typeface="Arial" pitchFamily="34" charset="-120"/>
-                        </a:rPr>
-                        <a:t>How it proposes</a:t>
-                      </a:r>
-                      <a:endParaRPr lang="en-US" sz="1450" dirty="0">
-                        <a:latin typeface="Arial" charset="0"/>
-                        <a:ea typeface="Arial" charset="0"/>
-                        <a:cs typeface="Arial" charset="0"/>
-                      </a:endParaRPr>
-                    </a:p>
-                  </a:txBody>
-                  <a:tcPr marL="64008" marR="64008" marT="64008" marB="64008" anchor="ctr">
-                    <a:lnL w="9525" cap="flat" cmpd="sng" algn="ctr">
-                      <a:solidFill>
-                        <a:srgbClr val="D8DDE6"/>
-                      </a:solidFill>
-                      <a:prstDash val="solid"/>
-                      <a:round/>
-                      <a:headEnd type="none" w="med" len="med"/>
-                      <a:tailEnd type="none" w="med" len="med"/>
-                    </a:lnL>
-                    <a:lnR w="9525" cap="flat" cmpd="sng" algn="ctr">
-                      <a:solidFill>
-                        <a:srgbClr val="D8DDE6"/>
-                      </a:solidFill>
-                      <a:prstDash val="solid"/>
-                      <a:round/>
-                      <a:headEnd type="none" w="med" len="med"/>
-                      <a:tailEnd type="none" w="med" len="med"/>
-                    </a:lnR>
-                    <a:lnT w="9525" cap="flat" cmpd="sng" algn="ctr">
-                      <a:solidFill>
-                        <a:srgbClr val="D8DDE6"/>
-                      </a:solidFill>
-                      <a:prstDash val="solid"/>
-                      <a:round/>
-                      <a:headEnd type="none" w="med" len="med"/>
-                      <a:tailEnd type="none" w="med" len="med"/>
-                    </a:lnT>
-                    <a:lnB w="9525" cap="flat" cmpd="sng" algn="ctr">
-                      <a:solidFill>
-                        <a:srgbClr val="D8DDE6"/>
-                      </a:solidFill>
-                      <a:prstDash val="solid"/>
-                      <a:round/>
-                      <a:headEnd type="none" w="med" len="med"/>
-                      <a:tailEnd type="none" w="med" len="med"/>
-                    </a:lnB>
-                    <a:solidFill>
-                      <a:srgbClr val="1E3A5F"/>
-                    </a:solidFill>
-                  </a:tcPr>
-                </a:tc>
-                <a:tc>
-                  <a:txBody>
-                    <a:bodyPr/>
-                    <a:lstStyle/>
-                    <a:p>
-                      <a:pPr indent="0" marL="0">
-                        <a:buNone/>
-                      </a:pPr>
-                      <a:r>
-                        <a:rPr lang="en-US" sz="1450" b="1" dirty="0">
-                          <a:solidFill>
-                            <a:srgbClr val="FFFFFF"/>
-                          </a:solidFill>
-                          <a:latin typeface="Arial" pitchFamily="34" charset="0"/>
-                          <a:ea typeface="Arial" pitchFamily="34" charset="-122"/>
-                          <a:cs typeface="Arial" pitchFamily="34" charset="-120"/>
-                        </a:rPr>
-                        <a:t>API calls</a:t>
-                      </a:r>
-                      <a:endParaRPr lang="en-US" sz="1450" dirty="0">
-                        <a:latin typeface="Arial" charset="0"/>
-                        <a:ea typeface="Arial" charset="0"/>
-                        <a:cs typeface="Arial" charset="0"/>
-                      </a:endParaRPr>
-                    </a:p>
-                  </a:txBody>
-                  <a:tcPr marL="64008" marR="64008" marT="64008" marB="64008" anchor="ctr">
-                    <a:lnL w="9525" cap="flat" cmpd="sng" algn="ctr">
-                      <a:solidFill>
-                        <a:srgbClr val="D8DDE6"/>
-                      </a:solidFill>
-                      <a:prstDash val="solid"/>
-                      <a:round/>
-                      <a:headEnd type="none" w="med" len="med"/>
-                      <a:tailEnd type="none" w="med" len="med"/>
-                    </a:lnL>
-                    <a:lnR w="9525" cap="flat" cmpd="sng" algn="ctr">
-                      <a:solidFill>
-                        <a:srgbClr val="D8DDE6"/>
-                      </a:solidFill>
-                      <a:prstDash val="solid"/>
-                      <a:round/>
-                      <a:headEnd type="none" w="med" len="med"/>
-                      <a:tailEnd type="none" w="med" len="med"/>
-                    </a:lnR>
-                    <a:lnT w="9525" cap="flat" cmpd="sng" algn="ctr">
-                      <a:solidFill>
-                        <a:srgbClr val="D8DDE6"/>
-                      </a:solidFill>
-                      <a:prstDash val="solid"/>
-                      <a:round/>
-                      <a:headEnd type="none" w="med" len="med"/>
-                      <a:tailEnd type="none" w="med" len="med"/>
-                    </a:lnT>
-                    <a:lnB w="9525" cap="flat" cmpd="sng" algn="ctr">
-                      <a:solidFill>
-                        <a:srgbClr val="D8DDE6"/>
-                      </a:solidFill>
-                      <a:prstDash val="solid"/>
-                      <a:round/>
-                      <a:headEnd type="none" w="med" len="med"/>
-                      <a:tailEnd type="none" w="med" len="med"/>
-                    </a:lnB>
-                    <a:solidFill>
-                      <a:srgbClr val="1E3A5F"/>
-                    </a:solidFill>
-                  </a:tcPr>
-                </a:tc>
-              </a:tr>
-              <a:tr h="420624">
-                <a:tc>
-                  <a:txBody>
-                    <a:bodyPr/>
-                    <a:lstStyle/>
-                    <a:p>
-                      <a:pPr indent="0" marL="0">
-                        <a:buNone/>
-                      </a:pPr>
-                      <a:r>
-                        <a:rPr lang="en-US" sz="1450" dirty="0">
-                          <a:solidFill>
-                            <a:srgbClr val="000000"/>
-                          </a:solidFill>
-                          <a:latin typeface="Arial" pitchFamily="34" charset="0"/>
-                          <a:ea typeface="Arial" pitchFamily="34" charset="-122"/>
-                          <a:cs typeface="Arial" pitchFamily="34" charset="-120"/>
-                        </a:rPr>
-                        <a:t>Random</a:t>
-                      </a:r>
-                      <a:endParaRPr lang="en-US" sz="1450" dirty="0">
-                        <a:latin typeface="Arial" charset="0"/>
-                        <a:ea typeface="Arial" charset="0"/>
-                        <a:cs typeface="Arial" charset="0"/>
-                      </a:endParaRPr>
-                    </a:p>
-                  </a:txBody>
-                  <a:tcPr marL="64008" marR="64008" marT="64008" marB="64008" anchor="ctr">
-                    <a:lnL w="9525" cap="flat" cmpd="sng" algn="ctr">
-                      <a:solidFill>
-                        <a:srgbClr val="D8DDE6"/>
-                      </a:solidFill>
-                      <a:prstDash val="solid"/>
-                      <a:round/>
-                      <a:headEnd type="none" w="med" len="med"/>
-                      <a:tailEnd type="none" w="med" len="med"/>
-                    </a:lnL>
-                    <a:lnR w="9525" cap="flat" cmpd="sng" algn="ctr">
-                      <a:solidFill>
-                        <a:srgbClr val="D8DDE6"/>
-                      </a:solidFill>
-                      <a:prstDash val="solid"/>
-                      <a:round/>
-                      <a:headEnd type="none" w="med" len="med"/>
-                      <a:tailEnd type="none" w="med" len="med"/>
-                    </a:lnR>
-                    <a:lnT w="9525" cap="flat" cmpd="sng" algn="ctr">
-                      <a:solidFill>
-                        <a:srgbClr val="D8DDE6"/>
-                      </a:solidFill>
-                      <a:prstDash val="solid"/>
-                      <a:round/>
-                      <a:headEnd type="none" w="med" len="med"/>
-                      <a:tailEnd type="none" w="med" len="med"/>
-                    </a:lnT>
-                    <a:lnB w="9525" cap="flat" cmpd="sng" algn="ctr">
-                      <a:solidFill>
-                        <a:srgbClr val="D8DDE6"/>
-                      </a:solidFill>
-                      <a:prstDash val="solid"/>
-                      <a:round/>
-                      <a:headEnd type="none" w="med" len="med"/>
-                      <a:tailEnd type="none" w="med" len="med"/>
-                    </a:lnB>
-                  </a:tcPr>
-                </a:tc>
-                <a:tc>
-                  <a:txBody>
-                    <a:bodyPr/>
-                    <a:lstStyle/>
-                    <a:p>
-                      <a:pPr indent="0" marL="0">
-                        <a:buNone/>
-                      </a:pPr>
-                      <a:r>
-                        <a:rPr lang="en-US" sz="1450" dirty="0">
-                          <a:solidFill>
-                            <a:srgbClr val="000000"/>
-                          </a:solidFill>
-                          <a:latin typeface="Arial" pitchFamily="34" charset="0"/>
-                          <a:ea typeface="Arial" pitchFamily="34" charset="-122"/>
-                          <a:cs typeface="Arial" pitchFamily="34" charset="-120"/>
-                        </a:rPr>
-                        <a:t>draws 5 gates, wires and angles uniformly</a:t>
-                      </a:r>
-                      <a:endParaRPr lang="en-US" sz="1450" dirty="0">
-                        <a:latin typeface="Arial" charset="0"/>
-                        <a:ea typeface="Arial" charset="0"/>
-                        <a:cs typeface="Arial" charset="0"/>
-                      </a:endParaRPr>
-                    </a:p>
-                  </a:txBody>
-                  <a:tcPr marL="64008" marR="64008" marT="64008" marB="64008" anchor="ctr">
-                    <a:lnL w="9525" cap="flat" cmpd="sng" algn="ctr">
-                      <a:solidFill>
-                        <a:srgbClr val="D8DDE6"/>
-                      </a:solidFill>
-                      <a:prstDash val="solid"/>
-                      <a:round/>
-                      <a:headEnd type="none" w="med" len="med"/>
-                      <a:tailEnd type="none" w="med" len="med"/>
-                    </a:lnL>
-                    <a:lnR w="9525" cap="flat" cmpd="sng" algn="ctr">
-                      <a:solidFill>
-                        <a:srgbClr val="D8DDE6"/>
-                      </a:solidFill>
-                      <a:prstDash val="solid"/>
-                      <a:round/>
-                      <a:headEnd type="none" w="med" len="med"/>
-                      <a:tailEnd type="none" w="med" len="med"/>
-                    </a:lnR>
-                    <a:lnT w="9525" cap="flat" cmpd="sng" algn="ctr">
-                      <a:solidFill>
-                        <a:srgbClr val="D8DDE6"/>
-                      </a:solidFill>
-                      <a:prstDash val="solid"/>
-                      <a:round/>
-                      <a:headEnd type="none" w="med" len="med"/>
-                      <a:tailEnd type="none" w="med" len="med"/>
-                    </a:lnT>
-                    <a:lnB w="9525" cap="flat" cmpd="sng" algn="ctr">
-                      <a:solidFill>
-                        <a:srgbClr val="D8DDE6"/>
-                      </a:solidFill>
-                      <a:prstDash val="solid"/>
-                      <a:round/>
-                      <a:headEnd type="none" w="med" len="med"/>
-                      <a:tailEnd type="none" w="med" len="med"/>
-                    </a:lnB>
-                  </a:tcPr>
-                </a:tc>
-                <a:tc>
-                  <a:txBody>
-                    <a:bodyPr/>
-                    <a:lstStyle/>
-                    <a:p>
-                      <a:pPr indent="0" marL="0">
-                        <a:buNone/>
-                      </a:pPr>
-                      <a:r>
-                        <a:rPr lang="en-US" sz="1450" dirty="0">
-                          <a:solidFill>
-                            <a:srgbClr val="000000"/>
-                          </a:solidFill>
-                          <a:latin typeface="Arial" pitchFamily="34" charset="0"/>
-                          <a:ea typeface="Arial" pitchFamily="34" charset="-122"/>
-                          <a:cs typeface="Arial" pitchFamily="34" charset="-120"/>
-                        </a:rPr>
-                        <a:t>none</a:t>
-                      </a:r>
-                      <a:endParaRPr lang="en-US" sz="1450" dirty="0">
-                        <a:latin typeface="Arial" charset="0"/>
-                        <a:ea typeface="Arial" charset="0"/>
-                        <a:cs typeface="Arial" charset="0"/>
-                      </a:endParaRPr>
-                    </a:p>
-                  </a:txBody>
-                  <a:tcPr marL="64008" marR="64008" marT="64008" marB="64008" anchor="ctr">
-                    <a:lnL w="9525" cap="flat" cmpd="sng" algn="ctr">
-                      <a:solidFill>
-                        <a:srgbClr val="D8DDE6"/>
-                      </a:solidFill>
-                      <a:prstDash val="solid"/>
-                      <a:round/>
-                      <a:headEnd type="none" w="med" len="med"/>
-                      <a:tailEnd type="none" w="med" len="med"/>
-                    </a:lnL>
-                    <a:lnR w="9525" cap="flat" cmpd="sng" algn="ctr">
-                      <a:solidFill>
-                        <a:srgbClr val="D8DDE6"/>
-                      </a:solidFill>
-                      <a:prstDash val="solid"/>
-                      <a:round/>
-                      <a:headEnd type="none" w="med" len="med"/>
-                      <a:tailEnd type="none" w="med" len="med"/>
-                    </a:lnR>
-                    <a:lnT w="9525" cap="flat" cmpd="sng" algn="ctr">
-                      <a:solidFill>
-                        <a:srgbClr val="D8DDE6"/>
-                      </a:solidFill>
-                      <a:prstDash val="solid"/>
-                      <a:round/>
-                      <a:headEnd type="none" w="med" len="med"/>
-                      <a:tailEnd type="none" w="med" len="med"/>
-                    </a:lnT>
-                    <a:lnB w="9525" cap="flat" cmpd="sng" algn="ctr">
-                      <a:solidFill>
-                        <a:srgbClr val="D8DDE6"/>
-                      </a:solidFill>
-                      <a:prstDash val="solid"/>
-                      <a:round/>
-                      <a:headEnd type="none" w="med" len="med"/>
-                      <a:tailEnd type="none" w="med" len="med"/>
-                    </a:lnB>
-                  </a:tcPr>
-                </a:tc>
-              </a:tr>
-              <a:tr h="420624">
-                <a:tc>
-                  <a:txBody>
-                    <a:bodyPr/>
-                    <a:lstStyle/>
-                    <a:p>
-                      <a:pPr indent="0" marL="0">
-                        <a:buNone/>
-                      </a:pPr>
-                      <a:r>
-                        <a:rPr lang="en-US" sz="1450" dirty="0">
-                          <a:solidFill>
-                            <a:srgbClr val="000000"/>
-                          </a:solidFill>
-                          <a:latin typeface="Arial" pitchFamily="34" charset="0"/>
-                          <a:ea typeface="Arial" pitchFamily="34" charset="-122"/>
-                          <a:cs typeface="Arial" pitchFamily="34" charset="-120"/>
-                        </a:rPr>
-                        <a:t>Evolutionary</a:t>
-                      </a:r>
-                      <a:endParaRPr lang="en-US" sz="1450" dirty="0">
-                        <a:latin typeface="Arial" charset="0"/>
-                        <a:ea typeface="Arial" charset="0"/>
-                        <a:cs typeface="Arial" charset="0"/>
-                      </a:endParaRPr>
-                    </a:p>
-                  </a:txBody>
-                  <a:tcPr marL="64008" marR="64008" marT="64008" marB="64008" anchor="ctr">
-                    <a:lnL w="9525" cap="flat" cmpd="sng" algn="ctr">
-                      <a:solidFill>
-                        <a:srgbClr val="D8DDE6"/>
-                      </a:solidFill>
-                      <a:prstDash val="solid"/>
-                      <a:round/>
-                      <a:headEnd type="none" w="med" len="med"/>
-                      <a:tailEnd type="none" w="med" len="med"/>
-                    </a:lnL>
-                    <a:lnR w="9525" cap="flat" cmpd="sng" algn="ctr">
-                      <a:solidFill>
-                        <a:srgbClr val="D8DDE6"/>
-                      </a:solidFill>
-                      <a:prstDash val="solid"/>
-                      <a:round/>
-                      <a:headEnd type="none" w="med" len="med"/>
-                      <a:tailEnd type="none" w="med" len="med"/>
-                    </a:lnR>
-                    <a:lnT w="9525" cap="flat" cmpd="sng" algn="ctr">
-                      <a:solidFill>
-                        <a:srgbClr val="D8DDE6"/>
-                      </a:solidFill>
-                      <a:prstDash val="solid"/>
-                      <a:round/>
-                      <a:headEnd type="none" w="med" len="med"/>
-                      <a:tailEnd type="none" w="med" len="med"/>
-                    </a:lnT>
-                    <a:lnB w="9525" cap="flat" cmpd="sng" algn="ctr">
-                      <a:solidFill>
-                        <a:srgbClr val="D8DDE6"/>
-                      </a:solidFill>
-                      <a:prstDash val="solid"/>
-                      <a:round/>
-                      <a:headEnd type="none" w="med" len="med"/>
-                      <a:tailEnd type="none" w="med" len="med"/>
-                    </a:lnB>
-                  </a:tcPr>
-                </a:tc>
-                <a:tc>
-                  <a:txBody>
-                    <a:bodyPr/>
-                    <a:lstStyle/>
-                    <a:p>
-                      <a:pPr indent="0" marL="0">
-                        <a:buNone/>
-                      </a:pPr>
-                      <a:r>
-                        <a:rPr lang="en-US" sz="1450" dirty="0">
-                          <a:solidFill>
-                            <a:srgbClr val="000000"/>
-                          </a:solidFill>
-                          <a:latin typeface="Arial" pitchFamily="34" charset="0"/>
-                          <a:ea typeface="Arial" pitchFamily="34" charset="-122"/>
-                          <a:cs typeface="Arial" pitchFamily="34" charset="-120"/>
-                        </a:rPr>
-                        <a:t>(mu+lambda), mu=4: seed 4 at random, then mutate a survivor</a:t>
-                      </a:r>
-                      <a:endParaRPr lang="en-US" sz="1450" dirty="0">
-                        <a:latin typeface="Arial" charset="0"/>
-                        <a:ea typeface="Arial" charset="0"/>
-                        <a:cs typeface="Arial" charset="0"/>
-                      </a:endParaRPr>
-                    </a:p>
-                  </a:txBody>
-                  <a:tcPr marL="64008" marR="64008" marT="64008" marB="64008" anchor="ctr">
-                    <a:lnL w="9525" cap="flat" cmpd="sng" algn="ctr">
-                      <a:solidFill>
-                        <a:srgbClr val="D8DDE6"/>
-                      </a:solidFill>
-                      <a:prstDash val="solid"/>
-                      <a:round/>
-                      <a:headEnd type="none" w="med" len="med"/>
-                      <a:tailEnd type="none" w="med" len="med"/>
-                    </a:lnL>
-                    <a:lnR w="9525" cap="flat" cmpd="sng" algn="ctr">
-                      <a:solidFill>
-                        <a:srgbClr val="D8DDE6"/>
-                      </a:solidFill>
-                      <a:prstDash val="solid"/>
-                      <a:round/>
-                      <a:headEnd type="none" w="med" len="med"/>
-                      <a:tailEnd type="none" w="med" len="med"/>
-                    </a:lnR>
-                    <a:lnT w="9525" cap="flat" cmpd="sng" algn="ctr">
-                      <a:solidFill>
-                        <a:srgbClr val="D8DDE6"/>
-                      </a:solidFill>
-                      <a:prstDash val="solid"/>
-                      <a:round/>
-                      <a:headEnd type="none" w="med" len="med"/>
-                      <a:tailEnd type="none" w="med" len="med"/>
-                    </a:lnT>
-                    <a:lnB w="9525" cap="flat" cmpd="sng" algn="ctr">
-                      <a:solidFill>
-                        <a:srgbClr val="D8DDE6"/>
-                      </a:solidFill>
-                      <a:prstDash val="solid"/>
-                      <a:round/>
-                      <a:headEnd type="none" w="med" len="med"/>
-                      <a:tailEnd type="none" w="med" len="med"/>
-                    </a:lnB>
-                  </a:tcPr>
-                </a:tc>
-                <a:tc>
-                  <a:txBody>
-                    <a:bodyPr/>
-                    <a:lstStyle/>
-                    <a:p>
-                      <a:pPr indent="0" marL="0">
-                        <a:buNone/>
-                      </a:pPr>
-                      <a:r>
-                        <a:rPr lang="en-US" sz="1450" dirty="0">
-                          <a:solidFill>
-                            <a:srgbClr val="000000"/>
-                          </a:solidFill>
-                          <a:latin typeface="Arial" pitchFamily="34" charset="0"/>
-                          <a:ea typeface="Arial" pitchFamily="34" charset="-122"/>
-                          <a:cs typeface="Arial" pitchFamily="34" charset="-120"/>
-                        </a:rPr>
-                        <a:t>none</a:t>
-                      </a:r>
-                      <a:endParaRPr lang="en-US" sz="1450" dirty="0">
-                        <a:latin typeface="Arial" charset="0"/>
-                        <a:ea typeface="Arial" charset="0"/>
-                        <a:cs typeface="Arial" charset="0"/>
-                      </a:endParaRPr>
-                    </a:p>
-                  </a:txBody>
-                  <a:tcPr marL="64008" marR="64008" marT="64008" marB="64008" anchor="ctr">
-                    <a:lnL w="9525" cap="flat" cmpd="sng" algn="ctr">
-                      <a:solidFill>
-                        <a:srgbClr val="D8DDE6"/>
-                      </a:solidFill>
-                      <a:prstDash val="solid"/>
-                      <a:round/>
-                      <a:headEnd type="none" w="med" len="med"/>
-                      <a:tailEnd type="none" w="med" len="med"/>
-                    </a:lnL>
-                    <a:lnR w="9525" cap="flat" cmpd="sng" algn="ctr">
-                      <a:solidFill>
-                        <a:srgbClr val="D8DDE6"/>
-                      </a:solidFill>
-                      <a:prstDash val="solid"/>
-                      <a:round/>
-                      <a:headEnd type="none" w="med" len="med"/>
-                      <a:tailEnd type="none" w="med" len="med"/>
-                    </a:lnR>
-                    <a:lnT w="9525" cap="flat" cmpd="sng" algn="ctr">
-                      <a:solidFill>
-                        <a:srgbClr val="D8DDE6"/>
-                      </a:solidFill>
-                      <a:prstDash val="solid"/>
-                      <a:round/>
-                      <a:headEnd type="none" w="med" len="med"/>
-                      <a:tailEnd type="none" w="med" len="med"/>
-                    </a:lnT>
-                    <a:lnB w="9525" cap="flat" cmpd="sng" algn="ctr">
-                      <a:solidFill>
-                        <a:srgbClr val="D8DDE6"/>
-                      </a:solidFill>
-                      <a:prstDash val="solid"/>
-                      <a:round/>
-                      <a:headEnd type="none" w="med" len="med"/>
-                      <a:tailEnd type="none" w="med" len="med"/>
-                    </a:lnB>
-                  </a:tcPr>
-                </a:tc>
-              </a:tr>
-              <a:tr h="420624">
-                <a:tc>
-                  <a:txBody>
-                    <a:bodyPr/>
-                    <a:lstStyle/>
-                    <a:p>
-                      <a:pPr indent="0" marL="0">
-                        <a:buNone/>
-                      </a:pPr>
-                      <a:r>
-                        <a:rPr lang="en-US" sz="1450" dirty="0">
-                          <a:solidFill>
-                            <a:srgbClr val="000000"/>
-                          </a:solidFill>
-                          <a:latin typeface="Arial" pitchFamily="34" charset="0"/>
-                          <a:ea typeface="Arial" pitchFamily="34" charset="-122"/>
-                          <a:cs typeface="Arial" pitchFamily="34" charset="-120"/>
-                        </a:rPr>
-                        <a:t>Greedy</a:t>
-                      </a:r>
-                      <a:endParaRPr lang="en-US" sz="1450" dirty="0">
-                        <a:latin typeface="Arial" charset="0"/>
-                        <a:ea typeface="Arial" charset="0"/>
-                        <a:cs typeface="Arial" charset="0"/>
-                      </a:endParaRPr>
-                    </a:p>
-                  </a:txBody>
-                  <a:tcPr marL="64008" marR="64008" marT="64008" marB="64008" anchor="ctr">
-                    <a:lnL w="9525" cap="flat" cmpd="sng" algn="ctr">
-                      <a:solidFill>
-                        <a:srgbClr val="D8DDE6"/>
-                      </a:solidFill>
-                      <a:prstDash val="solid"/>
-                      <a:round/>
-                      <a:headEnd type="none" w="med" len="med"/>
-                      <a:tailEnd type="none" w="med" len="med"/>
-                    </a:lnL>
-                    <a:lnR w="9525" cap="flat" cmpd="sng" algn="ctr">
-                      <a:solidFill>
-                        <a:srgbClr val="D8DDE6"/>
-                      </a:solidFill>
-                      <a:prstDash val="solid"/>
-                      <a:round/>
-                      <a:headEnd type="none" w="med" len="med"/>
-                      <a:tailEnd type="none" w="med" len="med"/>
-                    </a:lnR>
-                    <a:lnT w="9525" cap="flat" cmpd="sng" algn="ctr">
-                      <a:solidFill>
-                        <a:srgbClr val="D8DDE6"/>
-                      </a:solidFill>
-                      <a:prstDash val="solid"/>
-                      <a:round/>
-                      <a:headEnd type="none" w="med" len="med"/>
-                      <a:tailEnd type="none" w="med" len="med"/>
-                    </a:lnT>
-                    <a:lnB w="9525" cap="flat" cmpd="sng" algn="ctr">
-                      <a:solidFill>
-                        <a:srgbClr val="D8DDE6"/>
-                      </a:solidFill>
-                      <a:prstDash val="solid"/>
-                      <a:round/>
-                      <a:headEnd type="none" w="med" len="med"/>
-                      <a:tailEnd type="none" w="med" len="med"/>
-                    </a:lnB>
-                  </a:tcPr>
-                </a:tc>
-                <a:tc>
-                  <a:txBody>
-                    <a:bodyPr/>
-                    <a:lstStyle/>
-                    <a:p>
-                      <a:pPr indent="0" marL="0">
-                        <a:buNone/>
-                      </a:pPr>
-                      <a:r>
-                        <a:rPr lang="en-US" sz="1450" dirty="0">
-                          <a:solidFill>
-                            <a:srgbClr val="000000"/>
-                          </a:solidFill>
-                          <a:latin typeface="Arial" pitchFamily="34" charset="0"/>
-                          <a:ea typeface="Arial" pitchFamily="34" charset="-122"/>
-                          <a:cs typeface="Arial" pitchFamily="34" charset="-120"/>
-                        </a:rPr>
-                        <a:t>hill climbing: mutate the incumbent, keep it only if validation improves</a:t>
-                      </a:r>
-                      <a:endParaRPr lang="en-US" sz="1450" dirty="0">
-                        <a:latin typeface="Arial" charset="0"/>
-                        <a:ea typeface="Arial" charset="0"/>
-                        <a:cs typeface="Arial" charset="0"/>
-                      </a:endParaRPr>
-                    </a:p>
-                  </a:txBody>
-                  <a:tcPr marL="64008" marR="64008" marT="64008" marB="64008" anchor="ctr">
-                    <a:lnL w="9525" cap="flat" cmpd="sng" algn="ctr">
-                      <a:solidFill>
-                        <a:srgbClr val="D8DDE6"/>
-                      </a:solidFill>
-                      <a:prstDash val="solid"/>
-                      <a:round/>
-                      <a:headEnd type="none" w="med" len="med"/>
-                      <a:tailEnd type="none" w="med" len="med"/>
-                    </a:lnL>
-                    <a:lnR w="9525" cap="flat" cmpd="sng" algn="ctr">
-                      <a:solidFill>
-                        <a:srgbClr val="D8DDE6"/>
-                      </a:solidFill>
-                      <a:prstDash val="solid"/>
-                      <a:round/>
-                      <a:headEnd type="none" w="med" len="med"/>
-                      <a:tailEnd type="none" w="med" len="med"/>
-                    </a:lnR>
-                    <a:lnT w="9525" cap="flat" cmpd="sng" algn="ctr">
-                      <a:solidFill>
-                        <a:srgbClr val="D8DDE6"/>
-                      </a:solidFill>
-                      <a:prstDash val="solid"/>
-                      <a:round/>
-                      <a:headEnd type="none" w="med" len="med"/>
-                      <a:tailEnd type="none" w="med" len="med"/>
-                    </a:lnT>
-                    <a:lnB w="9525" cap="flat" cmpd="sng" algn="ctr">
-                      <a:solidFill>
-                        <a:srgbClr val="D8DDE6"/>
-                      </a:solidFill>
-                      <a:prstDash val="solid"/>
-                      <a:round/>
-                      <a:headEnd type="none" w="med" len="med"/>
-                      <a:tailEnd type="none" w="med" len="med"/>
-                    </a:lnB>
-                  </a:tcPr>
-                </a:tc>
-                <a:tc>
-                  <a:txBody>
-                    <a:bodyPr/>
-                    <a:lstStyle/>
-                    <a:p>
-                      <a:pPr indent="0" marL="0">
-                        <a:buNone/>
-                      </a:pPr>
-                      <a:r>
-                        <a:rPr lang="en-US" sz="1450" dirty="0">
-                          <a:solidFill>
-                            <a:srgbClr val="000000"/>
-                          </a:solidFill>
-                          <a:latin typeface="Arial" pitchFamily="34" charset="0"/>
-                          <a:ea typeface="Arial" pitchFamily="34" charset="-122"/>
-                          <a:cs typeface="Arial" pitchFamily="34" charset="-120"/>
-                        </a:rPr>
-                        <a:t>none</a:t>
-                      </a:r>
-                      <a:endParaRPr lang="en-US" sz="1450" dirty="0">
-                        <a:latin typeface="Arial" charset="0"/>
-                        <a:ea typeface="Arial" charset="0"/>
-                        <a:cs typeface="Arial" charset="0"/>
-                      </a:endParaRPr>
-                    </a:p>
-                  </a:txBody>
-                  <a:tcPr marL="64008" marR="64008" marT="64008" marB="64008" anchor="ctr">
-                    <a:lnL w="9525" cap="flat" cmpd="sng" algn="ctr">
-                      <a:solidFill>
-                        <a:srgbClr val="D8DDE6"/>
-                      </a:solidFill>
-                      <a:prstDash val="solid"/>
-                      <a:round/>
-                      <a:headEnd type="none" w="med" len="med"/>
-                      <a:tailEnd type="none" w="med" len="med"/>
-                    </a:lnL>
-                    <a:lnR w="9525" cap="flat" cmpd="sng" algn="ctr">
-                      <a:solidFill>
-                        <a:srgbClr val="D8DDE6"/>
-                      </a:solidFill>
-                      <a:prstDash val="solid"/>
-                      <a:round/>
-                      <a:headEnd type="none" w="med" len="med"/>
-                      <a:tailEnd type="none" w="med" len="med"/>
-                    </a:lnR>
-                    <a:lnT w="9525" cap="flat" cmpd="sng" algn="ctr">
-                      <a:solidFill>
-                        <a:srgbClr val="D8DDE6"/>
-                      </a:solidFill>
-                      <a:prstDash val="solid"/>
-                      <a:round/>
-                      <a:headEnd type="none" w="med" len="med"/>
-                      <a:tailEnd type="none" w="med" len="med"/>
-                    </a:lnT>
-                    <a:lnB w="9525" cap="flat" cmpd="sng" algn="ctr">
-                      <a:solidFill>
-                        <a:srgbClr val="D8DDE6"/>
-                      </a:solidFill>
-                      <a:prstDash val="solid"/>
-                      <a:round/>
-                      <a:headEnd type="none" w="med" len="med"/>
-                      <a:tailEnd type="none" w="med" len="med"/>
-                    </a:lnB>
-                  </a:tcPr>
-                </a:tc>
-              </a:tr>
-              <a:tr h="420624">
-                <a:tc>
-                  <a:txBody>
-                    <a:bodyPr/>
-                    <a:lstStyle/>
-                    <a:p>
-                      <a:pPr indent="0" marL="0">
-                        <a:buNone/>
-                      </a:pPr>
-                      <a:r>
-                        <a:rPr lang="en-US" sz="1450" dirty="0">
-                          <a:solidFill>
-                            <a:srgbClr val="000000"/>
-                          </a:solidFill>
-                          <a:latin typeface="Arial" pitchFamily="34" charset="0"/>
-                          <a:ea typeface="Arial" pitchFamily="34" charset="-122"/>
-                          <a:cs typeface="Arial" pitchFamily="34" charset="-120"/>
-                        </a:rPr>
-                        <a:t>LLM open-loop</a:t>
-                      </a:r>
-                      <a:endParaRPr lang="en-US" sz="1450" dirty="0">
-                        <a:latin typeface="Arial" charset="0"/>
-                        <a:ea typeface="Arial" charset="0"/>
-                        <a:cs typeface="Arial" charset="0"/>
-                      </a:endParaRPr>
-                    </a:p>
-                  </a:txBody>
-                  <a:tcPr marL="64008" marR="64008" marT="64008" marB="64008" anchor="ctr">
-                    <a:lnL w="9525" cap="flat" cmpd="sng" algn="ctr">
-                      <a:solidFill>
-                        <a:srgbClr val="D8DDE6"/>
-                      </a:solidFill>
-                      <a:prstDash val="solid"/>
-                      <a:round/>
-                      <a:headEnd type="none" w="med" len="med"/>
-                      <a:tailEnd type="none" w="med" len="med"/>
-                    </a:lnL>
-                    <a:lnR w="9525" cap="flat" cmpd="sng" algn="ctr">
-                      <a:solidFill>
-                        <a:srgbClr val="D8DDE6"/>
-                      </a:solidFill>
-                      <a:prstDash val="solid"/>
-                      <a:round/>
-                      <a:headEnd type="none" w="med" len="med"/>
-                      <a:tailEnd type="none" w="med" len="med"/>
-                    </a:lnR>
-                    <a:lnT w="9525" cap="flat" cmpd="sng" algn="ctr">
-                      <a:solidFill>
-                        <a:srgbClr val="D8DDE6"/>
-                      </a:solidFill>
-                      <a:prstDash val="solid"/>
-                      <a:round/>
-                      <a:headEnd type="none" w="med" len="med"/>
-                      <a:tailEnd type="none" w="med" len="med"/>
-                    </a:lnT>
-                    <a:lnB w="9525" cap="flat" cmpd="sng" algn="ctr">
-                      <a:solidFill>
-                        <a:srgbClr val="D8DDE6"/>
-                      </a:solidFill>
-                      <a:prstDash val="solid"/>
-                      <a:round/>
-                      <a:headEnd type="none" w="med" len="med"/>
-                      <a:tailEnd type="none" w="med" len="med"/>
-                    </a:lnB>
-                  </a:tcPr>
-                </a:tc>
-                <a:tc>
-                  <a:txBody>
-                    <a:bodyPr/>
-                    <a:lstStyle/>
-                    <a:p>
-                      <a:pPr indent="0" marL="0">
-                        <a:buNone/>
-                      </a:pPr>
-                      <a:r>
-                        <a:rPr lang="en-US" sz="1450" dirty="0">
-                          <a:solidFill>
-                            <a:srgbClr val="000000"/>
-                          </a:solidFill>
-                          <a:latin typeface="Arial" pitchFamily="34" charset="0"/>
-                          <a:ea typeface="Arial" pitchFamily="34" charset="-122"/>
-                          <a:cs typeface="Arial" pitchFamily="34" charset="-120"/>
-                        </a:rPr>
-                        <a:t>one request per candidate; sees only the model contract and n</a:t>
-                      </a:r>
-                      <a:endParaRPr lang="en-US" sz="1450" dirty="0">
-                        <a:latin typeface="Arial" charset="0"/>
-                        <a:ea typeface="Arial" charset="0"/>
-                        <a:cs typeface="Arial" charset="0"/>
-                      </a:endParaRPr>
-                    </a:p>
-                  </a:txBody>
-                  <a:tcPr marL="64008" marR="64008" marT="64008" marB="64008" anchor="ctr">
-                    <a:lnL w="9525" cap="flat" cmpd="sng" algn="ctr">
-                      <a:solidFill>
-                        <a:srgbClr val="D8DDE6"/>
-                      </a:solidFill>
-                      <a:prstDash val="solid"/>
-                      <a:round/>
-                      <a:headEnd type="none" w="med" len="med"/>
-                      <a:tailEnd type="none" w="med" len="med"/>
-                    </a:lnL>
-                    <a:lnR w="9525" cap="flat" cmpd="sng" algn="ctr">
-                      <a:solidFill>
-                        <a:srgbClr val="D8DDE6"/>
-                      </a:solidFill>
-                      <a:prstDash val="solid"/>
-                      <a:round/>
-                      <a:headEnd type="none" w="med" len="med"/>
-                      <a:tailEnd type="none" w="med" len="med"/>
-                    </a:lnR>
-                    <a:lnT w="9525" cap="flat" cmpd="sng" algn="ctr">
-                      <a:solidFill>
-                        <a:srgbClr val="D8DDE6"/>
-                      </a:solidFill>
-                      <a:prstDash val="solid"/>
-                      <a:round/>
-                      <a:headEnd type="none" w="med" len="med"/>
-                      <a:tailEnd type="none" w="med" len="med"/>
-                    </a:lnT>
-                    <a:lnB w="9525" cap="flat" cmpd="sng" algn="ctr">
-                      <a:solidFill>
-                        <a:srgbClr val="D8DDE6"/>
-                      </a:solidFill>
-                      <a:prstDash val="solid"/>
-                      <a:round/>
-                      <a:headEnd type="none" w="med" len="med"/>
-                      <a:tailEnd type="none" w="med" len="med"/>
-                    </a:lnB>
-                  </a:tcPr>
-                </a:tc>
-                <a:tc>
-                  <a:txBody>
-                    <a:bodyPr/>
-                    <a:lstStyle/>
-                    <a:p>
-                      <a:pPr indent="0" marL="0">
-                        <a:buNone/>
-                      </a:pPr>
-                      <a:r>
-                        <a:rPr lang="en-US" sz="1450" dirty="0">
-                          <a:solidFill>
-                            <a:srgbClr val="000000"/>
-                          </a:solidFill>
-                          <a:latin typeface="Arial" pitchFamily="34" charset="0"/>
-                          <a:ea typeface="Arial" pitchFamily="34" charset="-122"/>
-                          <a:cs typeface="Arial" pitchFamily="34" charset="-120"/>
-                        </a:rPr>
-                        <a:t>1 per candidate</a:t>
-                      </a:r>
-                      <a:endParaRPr lang="en-US" sz="1450" dirty="0">
-                        <a:latin typeface="Arial" charset="0"/>
-                        <a:ea typeface="Arial" charset="0"/>
-                        <a:cs typeface="Arial" charset="0"/>
-                      </a:endParaRPr>
-                    </a:p>
-                  </a:txBody>
-                  <a:tcPr marL="64008" marR="64008" marT="64008" marB="64008" anchor="ctr">
-                    <a:lnL w="9525" cap="flat" cmpd="sng" algn="ctr">
-                      <a:solidFill>
-                        <a:srgbClr val="D8DDE6"/>
-                      </a:solidFill>
-                      <a:prstDash val="solid"/>
-                      <a:round/>
-                      <a:headEnd type="none" w="med" len="med"/>
-                      <a:tailEnd type="none" w="med" len="med"/>
-                    </a:lnL>
-                    <a:lnR w="9525" cap="flat" cmpd="sng" algn="ctr">
-                      <a:solidFill>
-                        <a:srgbClr val="D8DDE6"/>
-                      </a:solidFill>
-                      <a:prstDash val="solid"/>
-                      <a:round/>
-                      <a:headEnd type="none" w="med" len="med"/>
-                      <a:tailEnd type="none" w="med" len="med"/>
-                    </a:lnR>
-                    <a:lnT w="9525" cap="flat" cmpd="sng" algn="ctr">
-                      <a:solidFill>
-                        <a:srgbClr val="D8DDE6"/>
-                      </a:solidFill>
-                      <a:prstDash val="solid"/>
-                      <a:round/>
-                      <a:headEnd type="none" w="med" len="med"/>
-                      <a:tailEnd type="none" w="med" len="med"/>
-                    </a:lnT>
-                    <a:lnB w="9525" cap="flat" cmpd="sng" algn="ctr">
-                      <a:solidFill>
-                        <a:srgbClr val="D8DDE6"/>
-                      </a:solidFill>
-                      <a:prstDash val="solid"/>
-                      <a:round/>
-                      <a:headEnd type="none" w="med" len="med"/>
-                      <a:tailEnd type="none" w="med" len="med"/>
-                    </a:lnB>
-                  </a:tcPr>
-                </a:tc>
-              </a:tr>
-              <a:tr h="420624">
-                <a:tc>
-                  <a:txBody>
-                    <a:bodyPr/>
-                    <a:lstStyle/>
-                    <a:p>
-                      <a:pPr indent="0" marL="0">
-                        <a:buNone/>
-                      </a:pPr>
-                      <a:r>
-                        <a:rPr lang="en-US" sz="1450" dirty="0">
-                          <a:solidFill>
-                            <a:srgbClr val="000000"/>
-                          </a:solidFill>
-                          <a:latin typeface="Arial" pitchFamily="34" charset="0"/>
-                          <a:ea typeface="Arial" pitchFamily="34" charset="-122"/>
-                          <a:cs typeface="Arial" pitchFamily="34" charset="-120"/>
-                        </a:rPr>
-                        <a:t>LLM closed-loop</a:t>
-                      </a:r>
-                      <a:endParaRPr lang="en-US" sz="1450" dirty="0">
-                        <a:latin typeface="Arial" charset="0"/>
-                        <a:ea typeface="Arial" charset="0"/>
-                        <a:cs typeface="Arial" charset="0"/>
-                      </a:endParaRPr>
-                    </a:p>
-                  </a:txBody>
-                  <a:tcPr marL="64008" marR="64008" marT="64008" marB="64008" anchor="ctr">
-                    <a:lnL w="9525" cap="flat" cmpd="sng" algn="ctr">
-                      <a:solidFill>
-                        <a:srgbClr val="D8DDE6"/>
-                      </a:solidFill>
-                      <a:prstDash val="solid"/>
-                      <a:round/>
-                      <a:headEnd type="none" w="med" len="med"/>
-                      <a:tailEnd type="none" w="med" len="med"/>
-                    </a:lnL>
-                    <a:lnR w="9525" cap="flat" cmpd="sng" algn="ctr">
-                      <a:solidFill>
-                        <a:srgbClr val="D8DDE6"/>
-                      </a:solidFill>
-                      <a:prstDash val="solid"/>
-                      <a:round/>
-                      <a:headEnd type="none" w="med" len="med"/>
-                      <a:tailEnd type="none" w="med" len="med"/>
-                    </a:lnR>
-                    <a:lnT w="9525" cap="flat" cmpd="sng" algn="ctr">
-                      <a:solidFill>
-                        <a:srgbClr val="D8DDE6"/>
-                      </a:solidFill>
-                      <a:prstDash val="solid"/>
-                      <a:round/>
-                      <a:headEnd type="none" w="med" len="med"/>
-                      <a:tailEnd type="none" w="med" len="med"/>
-                    </a:lnT>
-                    <a:lnB w="9525" cap="flat" cmpd="sng" algn="ctr">
-                      <a:solidFill>
-                        <a:srgbClr val="D8DDE6"/>
-                      </a:solidFill>
-                      <a:prstDash val="solid"/>
-                      <a:round/>
-                      <a:headEnd type="none" w="med" len="med"/>
-                      <a:tailEnd type="none" w="med" len="med"/>
-                    </a:lnB>
-                  </a:tcPr>
-                </a:tc>
-                <a:tc>
-                  <a:txBody>
-                    <a:bodyPr/>
-                    <a:lstStyle/>
-                    <a:p>
-                      <a:pPr indent="0" marL="0">
-                        <a:buNone/>
-                      </a:pPr>
-                      <a:r>
-                        <a:rPr lang="en-US" sz="1450" dirty="0">
-                          <a:solidFill>
-                            <a:srgbClr val="000000"/>
-                          </a:solidFill>
-                          <a:latin typeface="Arial" pitchFamily="34" charset="0"/>
-                          <a:ea typeface="Arial" pitchFamily="34" charset="-122"/>
-                          <a:cs typeface="Arial" pitchFamily="34" charset="-120"/>
-                        </a:rPr>
-                        <a:t>same, plus validation-only results for what it already tried</a:t>
-                      </a:r>
-                      <a:endParaRPr lang="en-US" sz="1450" dirty="0">
-                        <a:latin typeface="Arial" charset="0"/>
-                        <a:ea typeface="Arial" charset="0"/>
-                        <a:cs typeface="Arial" charset="0"/>
-                      </a:endParaRPr>
-                    </a:p>
-                  </a:txBody>
-                  <a:tcPr marL="64008" marR="64008" marT="64008" marB="64008" anchor="ctr">
-                    <a:lnL w="9525" cap="flat" cmpd="sng" algn="ctr">
-                      <a:solidFill>
-                        <a:srgbClr val="D8DDE6"/>
-                      </a:solidFill>
-                      <a:prstDash val="solid"/>
-                      <a:round/>
-                      <a:headEnd type="none" w="med" len="med"/>
-                      <a:tailEnd type="none" w="med" len="med"/>
-                    </a:lnL>
-                    <a:lnR w="9525" cap="flat" cmpd="sng" algn="ctr">
-                      <a:solidFill>
-                        <a:srgbClr val="D8DDE6"/>
-                      </a:solidFill>
-                      <a:prstDash val="solid"/>
-                      <a:round/>
-                      <a:headEnd type="none" w="med" len="med"/>
-                      <a:tailEnd type="none" w="med" len="med"/>
-                    </a:lnR>
-                    <a:lnT w="9525" cap="flat" cmpd="sng" algn="ctr">
-                      <a:solidFill>
-                        <a:srgbClr val="D8DDE6"/>
-                      </a:solidFill>
-                      <a:prstDash val="solid"/>
-                      <a:round/>
-                      <a:headEnd type="none" w="med" len="med"/>
-                      <a:tailEnd type="none" w="med" len="med"/>
-                    </a:lnT>
-                    <a:lnB w="9525" cap="flat" cmpd="sng" algn="ctr">
-                      <a:solidFill>
-                        <a:srgbClr val="D8DDE6"/>
-                      </a:solidFill>
-                      <a:prstDash val="solid"/>
-                      <a:round/>
-                      <a:headEnd type="none" w="med" len="med"/>
-                      <a:tailEnd type="none" w="med" len="med"/>
-                    </a:lnB>
-                  </a:tcPr>
-                </a:tc>
-                <a:tc>
-                  <a:txBody>
-                    <a:bodyPr/>
-                    <a:lstStyle/>
-                    <a:p>
-                      <a:pPr indent="0" marL="0">
-                        <a:buNone/>
-                      </a:pPr>
-                      <a:r>
-                        <a:rPr lang="en-US" sz="1450" dirty="0">
-                          <a:solidFill>
-                            <a:srgbClr val="000000"/>
-                          </a:solidFill>
-                          <a:latin typeface="Arial" pitchFamily="34" charset="0"/>
-                          <a:ea typeface="Arial" pitchFamily="34" charset="-122"/>
-                          <a:cs typeface="Arial" pitchFamily="34" charset="-120"/>
-                        </a:rPr>
-                        <a:t>1 per candidate</a:t>
-                      </a:r>
-                      <a:endParaRPr lang="en-US" sz="1450" dirty="0">
-                        <a:latin typeface="Arial" charset="0"/>
-                        <a:ea typeface="Arial" charset="0"/>
-                        <a:cs typeface="Arial" charset="0"/>
-                      </a:endParaRPr>
-                    </a:p>
-                  </a:txBody>
-                  <a:tcPr marL="64008" marR="64008" marT="64008" marB="64008" anchor="ctr">
-                    <a:lnL w="9525" cap="flat" cmpd="sng" algn="ctr">
-                      <a:solidFill>
-                        <a:srgbClr val="D8DDE6"/>
-                      </a:solidFill>
-                      <a:prstDash val="solid"/>
-                      <a:round/>
-                      <a:headEnd type="none" w="med" len="med"/>
-                      <a:tailEnd type="none" w="med" len="med"/>
-                    </a:lnL>
-                    <a:lnR w="9525" cap="flat" cmpd="sng" algn="ctr">
-                      <a:solidFill>
-                        <a:srgbClr val="D8DDE6"/>
-                      </a:solidFill>
-                      <a:prstDash val="solid"/>
-                      <a:round/>
-                      <a:headEnd type="none" w="med" len="med"/>
-                      <a:tailEnd type="none" w="med" len="med"/>
-                    </a:lnR>
-                    <a:lnT w="9525" cap="flat" cmpd="sng" algn="ctr">
-                      <a:solidFill>
-                        <a:srgbClr val="D8DDE6"/>
-                      </a:solidFill>
-                      <a:prstDash val="solid"/>
-                      <a:round/>
-                      <a:headEnd type="none" w="med" len="med"/>
-                      <a:tailEnd type="none" w="med" len="med"/>
-                    </a:lnT>
-                    <a:lnB w="9525" cap="flat" cmpd="sng" algn="ctr">
-                      <a:solidFill>
-                        <a:srgbClr val="D8DDE6"/>
-                      </a:solidFill>
-                      <a:prstDash val="solid"/>
-                      <a:round/>
-                      <a:headEnd type="none" w="med" len="med"/>
-                      <a:tailEnd type="none" w="med" len="med"/>
-                    </a:lnB>
-                  </a:tcPr>
-                </a:tc>
-              </a:tr>
-            </a:tbl>
-          </a:graphicData>
-        </a:graphic>
-      </p:graphicFrame>
+      <p:pic>
+        <p:nvPicPr>
+          <p:cNvPr id="6" name="Image 0" descr="/Users/hatanakatomoya/Developer/Sim/llm-vqc/.claude/worktrees/github-author-config-faee6e/docs/presentation/mini5/figures/fig_arms.png">    </p:cNvPr>
+          <p:cNvPicPr>
+            <a:picLocks noChangeAspect="1"/>
+          </p:cNvPicPr>
+          <p:nvPr/>
+        </p:nvPicPr>
+        <p:blipFill>
+          <a:blip r:embed="rId1"/>
+          <a:stretch>
+            <a:fillRect/>
+          </a:stretch>
+        </p:blipFill>
+        <p:spPr>
+          <a:xfrm>
+            <a:off x="411480" y="1463040"/>
+            <a:ext cx="11384280" cy="2980944"/>
+          </a:xfrm>
+          <a:prstGeom prst="rect">
+            <a:avLst/>
+          </a:prstGeom>
+        </p:spPr>
+      </p:pic>
       <p:sp>
         <p:nvSpPr>
           <p:cNvPr id="7" name="Shape 4"/>
@@ -6620,12 +5166,12 @@
         </p:nvSpPr>
         <p:spPr>
           <a:xfrm>
-            <a:off x="548640" y="4114800"/>
-            <a:ext cx="11109960" cy="1691640"/>
+            <a:off x="548640" y="4709160"/>
+            <a:ext cx="11109960" cy="1280160"/>
           </a:xfrm>
           <a:prstGeom prst="roundRect">
             <a:avLst>
-              <a:gd name="adj" fmla="val 5405"/>
+              <a:gd name="adj" fmla="val 7143"/>
             </a:avLst>
           </a:prstGeom>
           <a:solidFill>
@@ -6647,8 +5193,8 @@
         </p:nvSpPr>
         <p:spPr>
           <a:xfrm>
-            <a:off x="777240" y="4224528"/>
-            <a:ext cx="10607040" cy="1463040"/>
+            <a:off x="822960" y="4828032"/>
+            <a:ext cx="10607040" cy="1051560"/>
           </a:xfrm>
           <a:prstGeom prst="rect">
             <a:avLst/>
@@ -6672,7 +5218,7 @@
                 <a:ea typeface="Arial" pitchFamily="34" charset="-122"/>
                 <a:cs typeface="Arial" pitchFamily="34" charset="-120"/>
               </a:rPr>
-              <a:t>B = 8 unique evaluated candidates per arm, 10 seeds.  </a:t>
+              <a:t>Open-loop vs closed-loop: </a:t>
             </a:r>
             <a:pPr indent="0" marL="0">
               <a:buNone/>
@@ -6686,7 +5232,7 @@
                 <a:ea typeface="Arial" pitchFamily="34" charset="-122"/>
                 <a:cs typeface="Arial" pitchFamily="34" charset="-120"/>
               </a:rPr>
-              <a:t>A duplicate or an ungrammatical proposal is recorded but consumes no budget, so no method can buy extra evaluations by proposing badly - and no method gets fewer because it proposes well. One candidate per request, so the closed loop is genuinely sequential: propose, see the result, propose again, eight times.</a:t>
+              <a:t>open-loop never sees how its own circuits scored; closed-loop does, eight times. That is the only difference between them.</a:t>
             </a:r>
             <a:endParaRPr lang="en-US" sz="1700" dirty="0"/>
           </a:p>
@@ -7300,8 +5846,8 @@
         </p:nvSpPr>
         <p:spPr>
           <a:xfrm>
-            <a:off x="7680960" y="1554480"/>
-            <a:ext cx="4023360" cy="3017520"/>
+            <a:off x="7680960" y="1600200"/>
+            <a:ext cx="4023360" cy="2926080"/>
           </a:xfrm>
           <a:prstGeom prst="rect">
             <a:avLst/>
@@ -7313,18 +5859,26 @@
           <a:bodyPr wrap="square" lIns="0" tIns="0" rIns="0" bIns="0" rtlCol="0" anchor="t"/>
           <a:lstStyle/>
           <a:p>
-            <a:pPr marL="342900" indent="-342900">
-              <a:lnSpc>
-                <a:spcPct val="112000"/>
-              </a:lnSpc>
-              <a:spcAft>
-                <a:spcPts val="1000"/>
-              </a:spcAft>
-              <a:buSzPct val="100000"/>
-              <a:buChar char="•"/>
-            </a:pPr>
-            <a:r>
-              <a:rPr lang="en-US" sz="1450" dirty="0">
+            <a:pPr indent="0" marL="0">
+              <a:buNone/>
+            </a:pPr>
+            <a:r>
+              <a:rPr lang="en-US" sz="1700" b="1" dirty="0">
+                <a:solidFill>
+                  <a:srgbClr val="1E3A5F"/>
+                </a:solidFill>
+                <a:latin typeface="Arial" pitchFamily="34" charset="0"/>
+                <a:ea typeface="Arial" pitchFamily="34" charset="-122"/>
+                <a:cs typeface="Arial" pitchFamily="34" charset="-120"/>
+              </a:rPr>
+              <a:t>AUROC
+</a:t>
+            </a:r>
+            <a:pPr indent="0" marL="0">
+              <a:buNone/>
+            </a:pPr>
+            <a:r>
+              <a:rPr lang="en-US" sz="1500" dirty="0">
                 <a:solidFill>
                   <a:srgbClr val="1A1A2E"/>
                 </a:solidFill>
@@ -7332,23 +5886,29 @@
                 <a:ea typeface="Arial" pitchFamily="34" charset="-122"/>
                 <a:cs typeface="Arial" pitchFamily="34" charset="-120"/>
               </a:rPr>
-              <a:t>By RMSE, Random leads. By AUROC, LLM open-loop leads. Same predictions, opposite ranking.</a:t>
-            </a:r>
-            <a:endParaRPr lang="en-US" sz="1450" dirty="0"/>
-          </a:p>
-          <a:p>
-            <a:pPr marL="342900" indent="-342900">
-              <a:lnSpc>
-                <a:spcPct val="112000"/>
-              </a:lnSpc>
-              <a:spcAft>
-                <a:spcPts val="1000"/>
-              </a:spcAft>
-              <a:buSzPct val="100000"/>
-              <a:buChar char="•"/>
-            </a:pPr>
-            <a:r>
-              <a:rPr lang="en-US" sz="1450" dirty="0">
+              <a:t>= how often the model ranks a two-peak signal above a one-peak one. 1.0 perfect, 0.5 coin flip.
+</a:t>
+            </a:r>
+            <a:pPr indent="0" marL="0">
+              <a:buNone/>
+            </a:pPr>
+            <a:r>
+              <a:rPr lang="en-US" sz="1700" b="1" dirty="0">
+                <a:solidFill>
+                  <a:srgbClr val="1E3A5F"/>
+                </a:solidFill>
+                <a:latin typeface="Arial" pitchFamily="34" charset="0"/>
+                <a:ea typeface="Arial" pitchFamily="34" charset="-122"/>
+                <a:cs typeface="Arial" pitchFamily="34" charset="-120"/>
+              </a:rPr>
+              <a:t>Why they disagree
+</a:t>
+            </a:r>
+            <a:pPr indent="0" marL="0">
+              <a:buNone/>
+            </a:pPr>
+            <a:r>
+              <a:rPr lang="en-US" sz="1500" dirty="0">
                 <a:solidFill>
                   <a:srgbClr val="1A1A2E"/>
                 </a:solidFill>
@@ -7356,57 +5916,9 @@
                 <a:ea typeface="Arial" pitchFamily="34" charset="-122"/>
                 <a:cs typeface="Arial" pitchFamily="34" charset="-120"/>
               </a:rPr>
-              <a:t>RMSE punishes a circuit that ranks the two classes correctly but outputs 0.45 and 0.55 instead of 0 and 1. AUROC does not.</a:t>
-            </a:r>
-            <a:endParaRPr lang="en-US" sz="1450" dirty="0"/>
-          </a:p>
-          <a:p>
-            <a:pPr marL="342900" indent="-342900">
-              <a:lnSpc>
-                <a:spcPct val="112000"/>
-              </a:lnSpc>
-              <a:spcAft>
-                <a:spcPts val="1000"/>
-              </a:spcAft>
-              <a:buSzPct val="100000"/>
-              <a:buChar char="•"/>
-            </a:pPr>
-            <a:r>
-              <a:rPr lang="en-US" sz="1450" dirty="0">
-                <a:solidFill>
-                  <a:srgbClr val="1A1A2E"/>
-                </a:solidFill>
-                <a:latin typeface="Arial" pitchFamily="34" charset="0"/>
-                <a:ea typeface="Arial" pitchFamily="34" charset="-122"/>
-                <a:cs typeface="Arial" pitchFamily="34" charset="-120"/>
-              </a:rPr>
-              <a:t>With five gates and no optimizer the outputs sit near 0.5, so this failure mode is live here, not hypothetical.</a:t>
-            </a:r>
-            <a:endParaRPr lang="en-US" sz="1450" dirty="0"/>
-          </a:p>
-          <a:p>
-            <a:pPr marL="342900" indent="-342900">
-              <a:lnSpc>
-                <a:spcPct val="112000"/>
-              </a:lnSpc>
-              <a:spcAft>
-                <a:spcPts val="1000"/>
-              </a:spcAft>
-              <a:buSzPct val="100000"/>
-              <a:buChar char="•"/>
-            </a:pPr>
-            <a:r>
-              <a:rPr lang="en-US" sz="1450" dirty="0">
-                <a:solidFill>
-                  <a:srgbClr val="1A1A2E"/>
-                </a:solidFill>
-                <a:latin typeface="Arial" pitchFamily="34" charset="0"/>
-                <a:ea typeface="Arial" pitchFamily="34" charset="-122"/>
-                <a:cs typeface="Arial" pitchFamily="34" charset="-120"/>
-              </a:rPr>
-              <a:t>Both numbers are shown because either one alone asserts a different answer.</a:t>
-            </a:r>
-            <a:endParaRPr lang="en-US" sz="1450" dirty="0"/>
+              <a:t>RMSE also punishes outputting 0.45 / 0.55 instead of 0 / 1. AUROC only cares about the order.</a:t>
+            </a:r>
+            <a:endParaRPr lang="en-US" sz="1700" dirty="0"/>
           </a:p>
         </p:txBody>
       </p:sp>
@@ -7462,7 +5974,7 @@
               <a:buNone/>
             </a:pPr>
             <a:r>
-              <a:rPr lang="en-US" sz="1650" b="1" dirty="0">
+              <a:rPr lang="en-US" sz="1700" b="1" dirty="0">
                 <a:solidFill>
                   <a:srgbClr val="1A1A2E"/>
                 </a:solidFill>
@@ -7470,13 +5982,13 @@
                 <a:ea typeface="Arial" pitchFamily="34" charset="-122"/>
                 <a:cs typeface="Arial" pitchFamily="34" charset="-120"/>
               </a:rPr>
-              <a:t>Neither reading is strong.  </a:t>
+              <a:t>Neither reading is strong: </a:t>
             </a:r>
             <a:pPr indent="0" marL="0">
               <a:buNone/>
             </a:pPr>
             <a:r>
-              <a:rPr lang="en-US" sz="1650" dirty="0">
+              <a:rPr lang="en-US" sz="1700" dirty="0">
                 <a:solidFill>
                   <a:srgbClr val="1A1A2E"/>
                 </a:solidFill>
@@ -7484,9 +5996,9 @@
                 <a:ea typeface="Arial" pitchFamily="34" charset="-122"/>
                 <a:cs typeface="Arial" pitchFamily="34" charset="-120"/>
               </a:rPr>
-              <a:t>AUROC spans roughly 0.59 to 0.62 against 0.5 for chance. The honest summary of T4 is that five gates without training barely solve it at all, and that no arm separates convincingly.</a:t>
-            </a:r>
-            <a:endParaRPr lang="en-US" sz="1650" dirty="0"/>
+              <a:t>AUROC spans 0.59 to 0.62 against 0.5 for chance. Five gates without training barely solve T4 at all.</a:t>
+            </a:r>
+            <a:endParaRPr lang="en-US" sz="1700" dirty="0"/>
           </a:p>
         </p:txBody>
       </p:sp>
@@ -7795,7 +6307,7 @@
               <a:buNone/>
             </a:pPr>
             <a:r>
-              <a:rPr lang="en-US" sz="1550" b="1" dirty="0">
+              <a:rPr lang="en-US" sz="1700" b="1" dirty="0">
                 <a:solidFill>
                   <a:srgbClr val="1A1A2E"/>
                 </a:solidFill>
@@ -7803,13 +6315,13 @@
                 <a:ea typeface="Arial" pitchFamily="34" charset="-122"/>
                 <a:cs typeface="Arial" pitchFamily="34" charset="-120"/>
               </a:rPr>
-              <a:t>Right panel: </a:t>
+              <a:t>Free the length and only Random gets worse </a:t>
             </a:r>
             <a:pPr indent="0" marL="0">
               <a:buNone/>
             </a:pPr>
             <a:r>
-              <a:rPr lang="en-US" sz="1550" dirty="0">
+              <a:rPr lang="en-US" sz="1700" dirty="0">
                 <a:solidFill>
                   <a:srgbClr val="1A1A2E"/>
                 </a:solidFill>
@@ -7817,37 +6329,9 @@
                 <a:ea typeface="Arial" pitchFamily="34" charset="-122"/>
                 <a:cs typeface="Arial" pitchFamily="34" charset="-120"/>
               </a:rPr>
-              <a:t>when length is free the LLM picks the maximum in about 7 of 10 cells while the classical arms spread over 1 to 5.   </a:t>
-            </a:r>
-            <a:pPr indent="0" marL="0">
-              <a:buNone/>
-            </a:pPr>
-            <a:r>
-              <a:rPr lang="en-US" sz="1550" b="1" dirty="0">
-                <a:solidFill>
-                  <a:srgbClr val="1A1A2E"/>
-                </a:solidFill>
-                <a:latin typeface="Arial" pitchFamily="34" charset="0"/>
-                <a:ea typeface="Arial" pitchFamily="34" charset="-122"/>
-                <a:cs typeface="Arial" pitchFamily="34" charset="-120"/>
-              </a:rPr>
-              <a:t>Left three: </a:t>
-            </a:r>
-            <a:pPr indent="0" marL="0">
-              <a:buNone/>
-            </a:pPr>
-            <a:r>
-              <a:rPr lang="en-US" sz="1550" dirty="0">
-                <a:solidFill>
-                  <a:srgbClr val="1A1A2E"/>
-                </a:solidFill>
-                <a:latin typeface="Arial" pitchFamily="34" charset="0"/>
-                <a:ea typeface="Arial" pitchFamily="34" charset="-122"/>
-                <a:cs typeface="Arial" pitchFamily="34" charset="-120"/>
-              </a:rPr>
-              <a:t>only Random degrades as length is freed and the budget shrinks (T1 median 0.139 → 0.167), while the LLM barely moves (0.170 → 0.170). At the pilot's setting they meet.</a:t>
-            </a:r>
-            <a:endParaRPr lang="en-US" sz="1550" dirty="0"/>
+              <a:t>(0.139 → 0.167); the LLM does not move (0.170 → 0.170), because it was already asking for 5. At the pilot's setting they meet.</a:t>
+            </a:r>
+            <a:endParaRPr lang="en-US" sz="1700" dirty="0"/>
           </a:p>
         </p:txBody>
       </p:sp>
@@ -8106,14 +6590,41 @@
       </p:pic>
       <p:sp>
         <p:nvSpPr>
-          <p:cNvPr id="7" name="Text 4"/>
-          <p:cNvSpPr/>
-          <p:nvPr/>
-        </p:nvSpPr>
-        <p:spPr>
-          <a:xfrm>
-            <a:off x="640080" y="4709160"/>
-            <a:ext cx="10972800" cy="1371600"/>
+          <p:cNvPr id="7" name="Shape 4"/>
+          <p:cNvSpPr/>
+          <p:nvPr/>
+        </p:nvSpPr>
+        <p:spPr>
+          <a:xfrm>
+            <a:off x="548640" y="4709160"/>
+            <a:ext cx="11109960" cy="1280160"/>
+          </a:xfrm>
+          <a:prstGeom prst="roundRect">
+            <a:avLst>
+              <a:gd name="adj" fmla="val 7143"/>
+            </a:avLst>
+          </a:prstGeom>
+          <a:solidFill>
+            <a:srgbClr val="F4F6FA"/>
+          </a:solidFill>
+          <a:ln w="12700">
+            <a:solidFill>
+              <a:srgbClr val="D8DDE6"/>
+            </a:solidFill>
+            <a:prstDash val="solid"/>
+          </a:ln>
+        </p:spPr>
+      </p:sp>
+      <p:sp>
+        <p:nvSpPr>
+          <p:cNvPr id="8" name="Text 5"/>
+          <p:cNvSpPr/>
+          <p:nvPr/>
+        </p:nvSpPr>
+        <p:spPr>
+          <a:xfrm>
+            <a:off x="822960" y="4828032"/>
+            <a:ext cx="10607040" cy="1051560"/>
           </a:xfrm>
           <a:prstGeom prst="rect">
             <a:avLst/>
@@ -8122,21 +6633,28 @@
           <a:ln/>
         </p:spPr>
         <p:txBody>
-          <a:bodyPr wrap="square" lIns="0" tIns="0" rIns="0" bIns="0" rtlCol="0" anchor="t"/>
-          <a:lstStyle/>
-          <a:p>
-            <a:pPr marL="342900" indent="-342900">
-              <a:lnSpc>
-                <a:spcPct val="112000"/>
-              </a:lnSpc>
-              <a:spcAft>
-                <a:spcPts val="900"/>
-              </a:spcAft>
-              <a:buSzPct val="100000"/>
-              <a:buChar char="•"/>
-            </a:pPr>
-            <a:r>
-              <a:rPr lang="en-US" sz="1550" dirty="0">
+          <a:bodyPr wrap="square" lIns="0" tIns="0" rIns="0" bIns="0" rtlCol="0" anchor="ctr"/>
+          <a:lstStyle/>
+          <a:p>
+            <a:pPr indent="0" marL="0">
+              <a:buNone/>
+            </a:pPr>
+            <a:r>
+              <a:rPr lang="en-US" sz="1700" b="1" dirty="0">
+                <a:solidFill>
+                  <a:srgbClr val="B3261E"/>
+                </a:solidFill>
+                <a:latin typeface="Arial" pitchFamily="34" charset="0"/>
+                <a:ea typeface="Arial" pitchFamily="34" charset="-122"/>
+                <a:cs typeface="Arial" pitchFamily="34" charset="-120"/>
+              </a:rPr>
+              <a:t>Eight rounds of feedback, no gain on any task. </a:t>
+            </a:r>
+            <a:pPr indent="0" marL="0">
+              <a:buNone/>
+            </a:pPr>
+            <a:r>
+              <a:rPr lang="en-US" sz="1600" dirty="0">
                 <a:solidFill>
                   <a:srgbClr val="1A1A2E"/>
                 </a:solidFill>
@@ -8144,39 +6662,15 @@
                 <a:ea typeface="Arial" pitchFamily="34" charset="-122"/>
                 <a:cs typeface="Arial" pitchFamily="34" charset="-120"/>
               </a:rPr>
-              <a:t>Closed-loop received eight rounds of validation-only feedback on its own candidates and still did not beat open-loop on any task.</a:t>
-            </a:r>
-            <a:endParaRPr lang="en-US" sz="1550" dirty="0"/>
-          </a:p>
-          <a:p>
-            <a:pPr marL="342900" indent="-342900">
-              <a:lnSpc>
-                <a:spcPct val="112000"/>
-              </a:lnSpc>
-              <a:spcAft>
-                <a:spcPts val="900"/>
-              </a:spcAft>
-              <a:buSzPct val="100000"/>
-              <a:buChar char="•"/>
-            </a:pPr>
-            <a:r>
-              <a:rPr lang="en-US" sz="1550" dirty="0">
-                <a:solidFill>
-                  <a:srgbClr val="1A1A2E"/>
-                </a:solidFill>
-                <a:latin typeface="Arial" pitchFamily="34" charset="0"/>
-                <a:ea typeface="Arial" pitchFamily="34" charset="-122"/>
-                <a:cs typeface="Arial" pitchFamily="34" charset="-120"/>
-              </a:rPr>
-              <a:t>A first attempt measured a 74% duplicate rate for closed-loop, with 11 of 40 cells starved of budget. The prompt now lists every circuit already tried; duplicates fell to 16% and every cell reached its full budget. The numbers here are from the corrected run.</a:t>
-            </a:r>
-            <a:endParaRPr lang="en-US" sz="1550" dirty="0"/>
-          </a:p>
-        </p:txBody>
-      </p:sp>
-      <p:sp>
-        <p:nvSpPr>
-          <p:cNvPr id="8" name="Text 5"/>
+              <a:t>A first run had closed-loop repeating itself 74% of the time and starved of budget; the prompt now lists what it already tried, repeats fell to 16%, and these are the corrected numbers.</a:t>
+            </a:r>
+            <a:endParaRPr lang="en-US" sz="1700" dirty="0"/>
+          </a:p>
+        </p:txBody>
+      </p:sp>
+      <p:sp>
+        <p:nvSpPr>
+          <p:cNvPr id="9" name="Text 6"/>
           <p:cNvSpPr/>
           <p:nvPr/>
         </p:nvSpPr>

--- a/docs/presentation/mini5/20260731_GSoC_mini5.pptx
+++ b/docs/presentation/mini5/20260731_GSoC_mini5.pptx
@@ -1039,7 +1039,7 @@
           <a:p>
             <a:r>
               <a:rPr lang="en-US" dirty="0"/>
-              <a:t>Read the medians, not the individual dots. Random is best on T1, T3 and T4. The LLM arms win on T2 and only there. I am reporting this as measured; it is a negative result for the LLM hypothesis at this scale.</a:t>
+              <a:t>Read the medians. Against the fixed hardware-efficient ansatz every search method wins, decisively. Against random search the LLM wins nothing, and random has the better median on three of four tasks.</a:t>
             </a:r>
             <a:endParaRPr lang="en-US" dirty="0"/>
           </a:p>
@@ -1303,7 +1303,7 @@
           <a:p>
             <a:r>
               <a:rPr lang="en-US" dirty="0"/>
-              <a:t>Worth being explicit: the first version of this experiment handicapped closed-loop through a prompt defect. I fixed it and re-ran rather than reporting the handicapped numbers. Even after the fix, feedback did not help.</a:t>
+              <a:t>This is the slide I would keep if I could keep only one. The diagnosis was that the LLM refines well but starts badly, so I gave it a good start. The start improved, the final score improved, and the refinement rate collapsed below random. The 17 percent was never skill.</a:t>
             </a:r>
             <a:endParaRPr lang="en-US" dirty="0"/>
           </a:p>
@@ -1712,27 +1712,7 @@
                 <a:ea typeface="Arial" pitchFamily="34" charset="-122"/>
                 <a:cs typeface="Arial" pitchFamily="34" charset="-120"/>
               </a:rPr>
-              <a:t>Does an LLM design better quantum circuits,</a:t>
-            </a:r>
-            <a:endParaRPr lang="en-US" sz="4000" dirty="0"/>
-          </a:p>
-          <a:p>
-            <a:pPr indent="0" marL="0">
-              <a:lnSpc>
-                <a:spcPct val="105000"/>
-              </a:lnSpc>
-              <a:buNone/>
-            </a:pPr>
-            <a:r>
-              <a:rPr lang="en-US" sz="4000" b="1" dirty="0">
-                <a:solidFill>
-                  <a:srgbClr val="FFFFFF"/>
-                </a:solidFill>
-                <a:latin typeface="Arial" pitchFamily="34" charset="0"/>
-                <a:ea typeface="Arial" pitchFamily="34" charset="-122"/>
-                <a:cs typeface="Arial" pitchFamily="34" charset="-120"/>
-              </a:rPr>
-              <a:t>or just bigger ones?</a:t>
+              <a:t>Three ways an LLM looked better than it was</a:t>
             </a:r>
             <a:endParaRPr lang="en-US" sz="4000" dirty="0"/>
           </a:p>
@@ -1771,7 +1751,7 @@
                 <a:ea typeface="Arial" pitchFamily="34" charset="-122"/>
                 <a:cs typeface="Arial" pitchFamily="34" charset="-120"/>
               </a:rPr>
-              <a:t>A five-gate, fixed-length comparison of LLM-guided and classical circuit search</a:t>
+              <a:t>Removing one confound at a time from an LLM-guided quantum circuit search</a:t>
             </a:r>
             <a:endParaRPr lang="en-US" sz="2000" dirty="0"/>
           </a:p>
@@ -1853,7 +1833,7 @@
                 <a:ea typeface="Arial" pitchFamily="34" charset="-122"/>
                 <a:cs typeface="Arial" pitchFamily="34" charset="-120"/>
               </a:rPr>
-              <a:t>last week's LLM advantage was mostly a circuit-size decision. Remove that one degree of freedom and it disappears on three of four tasks.</a:t>
+              <a:t>each apparent advantage came from something other than design skill - circuit size, then a bad starting point. The LLM beats a textbook ansatz on all four tasks and never beats random search on any (30 seeds).</a:t>
             </a:r>
             <a:endParaRPr lang="en-US" sz="1800" dirty="0"/>
           </a:p>
@@ -1970,7 +1950,7 @@
                 <a:ea typeface="Arial" pitchFamily="34" charset="-122"/>
                 <a:cs typeface="Arial" pitchFamily="34" charset="-120"/>
               </a:rPr>
-              <a:t>July 31, 2026  ·  commit cb5c29e  ·  experiment/bench-v2-real-llm-cost-minimal</a:t>
+              <a:t>July 31, 2026  ·  commit a01d11a  ·  experiment/bench-v2-real-llm-cost-minimal</a:t>
             </a:r>
             <a:endParaRPr lang="en-US" sz="1200" dirty="0"/>
           </a:p>
@@ -2155,7 +2135,7 @@
                 <a:ea typeface="Arial" pitchFamily="34" charset="-122"/>
                 <a:cs typeface="Arial" pitchFamily="34" charset="-120"/>
               </a:rPr>
-              <a:t>Length fixed: no win over random on 3 of 4 tasks</a:t>
+              <a:t>The LLM beats a textbook ansatz on all 4 tasks</a:t>
             </a:r>
             <a:endParaRPr lang="en-US" sz="1450" dirty="0"/>
           </a:p>
@@ -2179,7 +2159,7 @@
                 <a:ea typeface="Arial" pitchFamily="34" charset="-122"/>
                 <a:cs typeface="Arial" pitchFamily="34" charset="-120"/>
               </a:rPr>
-              <a:t>Clear win on T2, across all 10 seeds</a:t>
+              <a:t>It never beats random search - 30 seeds, 12 pre-declared contrasts</a:t>
             </a:r>
             <a:endParaRPr lang="en-US" sz="1450" dirty="0"/>
           </a:p>
@@ -2203,7 +2183,7 @@
                 <a:ea typeface="Arial" pitchFamily="34" charset="-122"/>
                 <a:cs typeface="Arial" pitchFamily="34" charset="-120"/>
               </a:rPr>
-              <a:t>Length free: the LLM picks the maximum ~70% of the time</a:t>
+              <a:t>Given free length it picks the maximum ~70% of the time</a:t>
             </a:r>
             <a:endParaRPr lang="en-US" sz="1450" dirty="0"/>
           </a:p>
@@ -2227,7 +2207,7 @@
                 <a:ea typeface="Arial" pitchFamily="34" charset="-122"/>
                 <a:cs typeface="Arial" pitchFamily="34" charset="-120"/>
               </a:rPr>
-              <a:t>That one choice explains most of last week's advantage</a:t>
+              <a:t>Its apparent refinement skill vanishes given a good start</a:t>
             </a:r>
             <a:endParaRPr lang="en-US" sz="1450" dirty="0"/>
           </a:p>
@@ -2341,7 +2321,7 @@
                 <a:ea typeface="Arial" pitchFamily="34" charset="-122"/>
                 <a:cs typeface="Arial" pitchFamily="34" charset="-120"/>
               </a:rPr>
-              <a:t>"LLMs cannot design circuits" - one small model, one budget</a:t>
+              <a:t>"LLMs cannot design circuits" - one small model, B = 8</a:t>
             </a:r>
             <a:endParaRPr lang="en-US" sz="1450" dirty="0"/>
           </a:p>
@@ -2365,7 +2345,7 @@
                 <a:ea typeface="Arial" pitchFamily="34" charset="-122"/>
                 <a:cs typeface="Arial" pitchFamily="34" charset="-120"/>
               </a:rPr>
-              <a:t>"Feedback does not work" - it failed here, at this scale</a:t>
+              <a:t>"Task context does not help" - never A/B tested at equal seeds</a:t>
             </a:r>
             <a:endParaRPr lang="en-US" sz="1450" dirty="0"/>
           </a:p>
@@ -5381,7 +5361,7 @@
                 <a:ea typeface="Arial" pitchFamily="34" charset="-122"/>
                 <a:cs typeface="Arial" pitchFamily="34" charset="-120"/>
               </a:rPr>
-              <a:t>Random search wins on three of four tasks</a:t>
+              <a:t>The LLM beats the textbook ansatz, never beats random</a:t>
             </a:r>
             <a:endParaRPr lang="en-US" sz="3000" dirty="0"/>
           </a:p>
@@ -5447,7 +5427,7 @@
                 <a:ea typeface="Arial" pitchFamily="34" charset="-122"/>
                 <a:cs typeface="Arial" pitchFamily="34" charset="-120"/>
               </a:rPr>
-              <a:t>PRIMARY: exactly 5 gates, B = 8, 10 seeds</a:t>
+              <a:t>16 gates, 5 qubits, B = 8, 30 seeds</a:t>
             </a:r>
             <a:pPr algn="r" indent="0" marL="0">
               <a:buNone/>
@@ -5461,7 +5441,7 @@
                 <a:ea typeface="Arial" pitchFamily="34" charset="-122"/>
                 <a:cs typeface="Arial" pitchFamily="34" charset="-120"/>
               </a:rPr>
-              <a:t>   all four tasks, T1-T4</a:t>
+              <a:t>   all four tasks</a:t>
             </a:r>
             <a:endParaRPr lang="en-US" sz="1150" dirty="0"/>
           </a:p>
@@ -5469,7 +5449,7 @@
       </p:sp>
       <p:pic>
         <p:nvPicPr>
-          <p:cNvPr id="6" name="Image 0" descr="/Users/hatanakatomoya/Developer/Sim/llm-vqc/.claude/worktrees/github-author-config-faee6e/docs/presentation/mini5/figures/fig_main.png">    </p:cNvPr>
+          <p:cNvPr id="6" name="Image 0" descr="/Users/hatanakatomoya/Developer/Sim/llm-vqc/.claude/worktrees/github-author-config-faee6e/docs/presentation/mini5/figures/fig_v2_main.png">    </p:cNvPr>
           <p:cNvPicPr>
             <a:picLocks noChangeAspect="1"/>
           </p:cNvPicPr>
@@ -5483,8 +5463,8 @@
         </p:blipFill>
         <p:spPr>
           <a:xfrm>
-            <a:off x="320040" y="1371600"/>
-            <a:ext cx="11521440" cy="3611880"/>
+            <a:off x="274320" y="1371600"/>
+            <a:ext cx="11658600" cy="3337560"/>
           </a:xfrm>
           <a:prstGeom prst="rect">
             <a:avLst/>
@@ -5499,12 +5479,12 @@
         </p:nvSpPr>
         <p:spPr>
           <a:xfrm>
-            <a:off x="548640" y="5230368"/>
-            <a:ext cx="11109960" cy="914400"/>
+            <a:off x="548640" y="5029200"/>
+            <a:ext cx="11109960" cy="1051560"/>
           </a:xfrm>
           <a:prstGeom prst="roundRect">
             <a:avLst>
-              <a:gd name="adj" fmla="val 8000"/>
+              <a:gd name="adj" fmla="val 6957"/>
             </a:avLst>
           </a:prstGeom>
           <a:solidFill>
@@ -5526,8 +5506,8 @@
         </p:nvSpPr>
         <p:spPr>
           <a:xfrm>
-            <a:off x="777240" y="5340096"/>
-            <a:ext cx="10607040" cy="731520"/>
+            <a:off x="777240" y="5138928"/>
+            <a:ext cx="10607040" cy="822960"/>
           </a:xfrm>
           <a:prstGeom prst="rect">
             <a:avLst/>
@@ -5543,7 +5523,7 @@
               <a:buNone/>
             </a:pPr>
             <a:r>
-              <a:rPr lang="en-US" sz="1600" b="1" dirty="0">
+              <a:rPr lang="en-US" sz="1650" b="1" dirty="0">
                 <a:solidFill>
                   <a:srgbClr val="0B7A4B"/>
                 </a:solidFill>
@@ -5551,13 +5531,27 @@
                 <a:ea typeface="Arial" pitchFamily="34" charset="-122"/>
                 <a:cs typeface="Arial" pitchFamily="34" charset="-120"/>
               </a:rPr>
-              <a:t>The LLM wins on T2 alone, and there it wins clearly </a:t>
+              <a:t>vs the fixed ansatz: significant on all 4 tasks. </a:t>
             </a:r>
             <a:pPr indent="0" marL="0">
               <a:buNone/>
             </a:pPr>
             <a:r>
-              <a:rPr lang="en-US" sz="1600" dirty="0">
+              <a:rPr lang="en-US" sz="1650" b="1" dirty="0">
+                <a:solidFill>
+                  <a:srgbClr val="B3261E"/>
+                </a:solidFill>
+                <a:latin typeface="Arial" pitchFamily="34" charset="0"/>
+                <a:ea typeface="Arial" pitchFamily="34" charset="-122"/>
+                <a:cs typeface="Arial" pitchFamily="34" charset="-120"/>
+              </a:rPr>
+              <a:t>  vs random: no difference detected on any. </a:t>
+            </a:r>
+            <a:pPr indent="0" marL="0">
+              <a:buNone/>
+            </a:pPr>
+            <a:r>
+              <a:rPr lang="en-US" sz="1650" dirty="0">
                 <a:solidFill>
                   <a:srgbClr val="1A1A2E"/>
                 </a:solidFill>
@@ -5565,23 +5559,9 @@
                 <a:ea typeface="Arial" pitchFamily="34" charset="-122"/>
                 <a:cs typeface="Arial" pitchFamily="34" charset="-120"/>
               </a:rPr>
-              <a:t>(0.204 vs 0.295).   </a:t>
-            </a:r>
-            <a:pPr indent="0" marL="0">
-              <a:buNone/>
-            </a:pPr>
-            <a:r>
-              <a:rPr lang="en-US" sz="1600" b="1" dirty="0">
-                <a:solidFill>
-                  <a:srgbClr val="B3261E"/>
-                </a:solidFill>
-                <a:latin typeface="Arial" pitchFamily="34" charset="0"/>
-                <a:ea typeface="Arial" pitchFamily="34" charset="-122"/>
-                <a:cs typeface="Arial" pitchFamily="34" charset="-120"/>
-              </a:rPr>
-              <a:t>Closed-loop never beats open-loop on any task: eight rounds of feedback did not help this model at this budget.</a:t>
-            </a:r>
-            <a:endParaRPr lang="en-US" sz="1600" dirty="0"/>
+              <a:t>Random holds the better median on T2, T3 and T4 (T3 0.180 vs 0.212); the LLM leads only on T1 (0.110 vs 0.119), and not significantly.</a:t>
+            </a:r>
+            <a:endParaRPr lang="en-US" sz="1650" dirty="0"/>
           </a:p>
         </p:txBody>
       </p:sp>
@@ -5618,7 +5598,7 @@
                 <a:ea typeface="Arial" pitchFamily="34" charset="-122"/>
                 <a:cs typeface="Arial" pitchFamily="34" charset="-120"/>
               </a:rPr>
-              <a:t>10 seeds per arm, B = 8, exactly 5 gates · data/per_cell.csv</a:t>
+              <a:t>Wilcoxon signed-rank on 30 paired seeds; Holm over the 12 pre-declared primary contrasts · data/ctx_analysis.json</a:t>
             </a:r>
             <a:endParaRPr lang="en-US" sz="1100" dirty="0"/>
           </a:p>
@@ -6439,7 +6419,7 @@
                 <a:ea typeface="Arial" pitchFamily="34" charset="-122"/>
                 <a:cs typeface="Arial" pitchFamily="34" charset="-120"/>
               </a:rPr>
-              <a:t>SEARCH DYNAMICS</a:t>
+              <a:t>A HYPOTHESIS, TESTED AND REFUTED</a:t>
             </a:r>
             <a:endParaRPr lang="en-US" sz="1300" dirty="0"/>
           </a:p>
@@ -6454,7 +6434,7 @@
         <p:spPr>
           <a:xfrm>
             <a:off x="502920" y="548640"/>
-            <a:ext cx="11185855" cy="658368"/>
+            <a:ext cx="11185855" cy="822960"/>
           </a:xfrm>
           <a:prstGeom prst="rect">
             <a:avLst/>
@@ -6470,7 +6450,7 @@
               <a:buNone/>
             </a:pPr>
             <a:r>
-              <a:rPr lang="en-US" sz="3000" b="1" dirty="0">
+              <a:rPr lang="en-US" sz="2400" b="1" dirty="0">
                 <a:solidFill>
                   <a:srgbClr val="1E3A5F"/>
                 </a:solidFill>
@@ -6478,9 +6458,9 @@
                 <a:ea typeface="Arial" pitchFamily="34" charset="-122"/>
                 <a:cs typeface="Arial" pitchFamily="34" charset="-120"/>
               </a:rPr>
-              <a:t>More feedback did not translate into better circuits</a:t>
-            </a:r>
-            <a:endParaRPr lang="en-US" sz="3000" dirty="0"/>
+              <a:t>The LLM's "refinement skill" was the room a bad start leaves</a:t>
+            </a:r>
+            <a:endParaRPr lang="en-US" sz="2400" dirty="0"/>
           </a:p>
         </p:txBody>
       </p:sp>
@@ -6544,7 +6524,7 @@
                 <a:ea typeface="Arial" pitchFamily="34" charset="-122"/>
                 <a:cs typeface="Arial" pitchFamily="34" charset="-120"/>
               </a:rPr>
-              <a:t>PRIMARY: exactly 5 gates, B = 8, 10 seeds</a:t>
+              <a:t>16 gates, B = 8, 30 seeds</a:t>
             </a:r>
             <a:pPr algn="r" indent="0" marL="0">
               <a:buNone/>
@@ -6558,7 +6538,7 @@
                 <a:ea typeface="Arial" pitchFamily="34" charset="-122"/>
                 <a:cs typeface="Arial" pitchFamily="34" charset="-120"/>
               </a:rPr>
-              <a:t>   all four tasks, T1-T4</a:t>
+              <a:t>   median over all four tasks</a:t>
             </a:r>
             <a:endParaRPr lang="en-US" sz="1150" dirty="0"/>
           </a:p>
@@ -6566,7 +6546,7 @@
       </p:sp>
       <p:pic>
         <p:nvPicPr>
-          <p:cNvPr id="6" name="Image 0" descr="/Users/hatanakatomoya/Developer/Sim/llm-vqc/.claude/worktrees/github-author-config-faee6e/docs/presentation/mini5/figures/fig_anytime.png">    </p:cNvPr>
+          <p:cNvPr id="6" name="Image 0" descr="/Users/hatanakatomoya/Developer/Sim/llm-vqc/.claude/worktrees/github-author-config-faee6e/docs/presentation/mini5/figures/fig_v2_mechanism.png">    </p:cNvPr>
           <p:cNvPicPr>
             <a:picLocks noChangeAspect="1"/>
           </p:cNvPicPr>
@@ -6580,8 +6560,8 @@
         </p:blipFill>
         <p:spPr>
           <a:xfrm>
-            <a:off x="320040" y="1371600"/>
-            <a:ext cx="11521440" cy="3200400"/>
+            <a:off x="685800" y="1417320"/>
+            <a:ext cx="10789920" cy="3931920"/>
           </a:xfrm>
           <a:prstGeom prst="rect">
             <a:avLst/>
@@ -6596,20 +6576,20 @@
         </p:nvSpPr>
         <p:spPr>
           <a:xfrm>
-            <a:off x="548640" y="4709160"/>
-            <a:ext cx="11109960" cy="1280160"/>
+            <a:off x="548640" y="5486400"/>
+            <a:ext cx="11109960" cy="841248"/>
           </a:xfrm>
           <a:prstGeom prst="roundRect">
             <a:avLst>
-              <a:gd name="adj" fmla="val 7143"/>
+              <a:gd name="adj" fmla="val 8696"/>
             </a:avLst>
           </a:prstGeom>
           <a:solidFill>
-            <a:srgbClr val="F4F6FA"/>
+            <a:srgbClr val="FDF6E8"/>
           </a:solidFill>
-          <a:ln w="12700">
+          <a:ln w="13970">
             <a:solidFill>
-              <a:srgbClr val="D8DDE6"/>
+              <a:srgbClr val="B8860B"/>
             </a:solidFill>
             <a:prstDash val="solid"/>
           </a:ln>
@@ -6623,8 +6603,8 @@
         </p:nvSpPr>
         <p:spPr>
           <a:xfrm>
-            <a:off x="822960" y="4828032"/>
-            <a:ext cx="10607040" cy="1051560"/>
+            <a:off x="777240" y="5577840"/>
+            <a:ext cx="10607040" cy="685800"/>
           </a:xfrm>
           <a:prstGeom prst="rect">
             <a:avLst/>
@@ -6640,15 +6620,15 @@
               <a:buNone/>
             </a:pPr>
             <a:r>
-              <a:rPr lang="en-US" sz="1700" b="1" dirty="0">
-                <a:solidFill>
-                  <a:srgbClr val="B3261E"/>
-                </a:solidFill>
-                <a:latin typeface="Arial" pitchFamily="34" charset="0"/>
-                <a:ea typeface="Arial" pitchFamily="34" charset="-122"/>
-                <a:cs typeface="Arial" pitchFamily="34" charset="-120"/>
-              </a:rPr>
-              <a:t>Eight rounds of feedback, no gain on any task. </a:t>
+              <a:rPr lang="en-US" sz="1600" b="1" dirty="0">
+                <a:solidFill>
+                  <a:srgbClr val="1A1A2E"/>
+                </a:solidFill>
+                <a:latin typeface="Arial" pitchFamily="34" charset="0"/>
+                <a:ea typeface="Arial" pitchFamily="34" charset="-122"/>
+                <a:cs typeface="Arial" pitchFamily="34" charset="-120"/>
+              </a:rPr>
+              <a:t>I built the hybrid arm expecting it to win. </a:t>
             </a:r>
             <a:pPr indent="0" marL="0">
               <a:buNone/>
@@ -6662,9 +6642,9 @@
                 <a:ea typeface="Arial" pitchFamily="34" charset="-122"/>
                 <a:cs typeface="Arial" pitchFamily="34" charset="-120"/>
               </a:rPr>
-              <a:t>A first run had closed-loop repeating itself 74% of the time and starved of budget; the prompt now lists what it already tried, repeats fell to 16%, and these are the corrected numbers.</a:t>
-            </a:r>
-            <a:endParaRPr lang="en-US" sz="1700" dirty="0"/>
+              <a:t>It reached the best final score of any arm and still could not beat random - because the ability it was built to exploit was not there.</a:t>
+            </a:r>
+            <a:endParaRPr lang="en-US" sz="1600" dirty="0"/>
           </a:p>
         </p:txBody>
       </p:sp>
@@ -6701,7 +6681,7 @@
                 <a:ea typeface="Arial" pitchFamily="34" charset="-122"/>
                 <a:cs typeface="Arial" pitchFamily="34" charset="-120"/>
               </a:rPr>
-              <a:t>Curves are the median best-so-far validation RMSE over 10 seeds; the x-axis is unique candidates, not API calls</a:t>
+              <a:t>Hybrid = random draws candidates 1-2, the LLM proposes 3-8 having seen their validation scores</a:t>
             </a:r>
             <a:endParaRPr lang="en-US" sz="1100" dirty="0"/>
           </a:p>

--- a/docs/presentation/mini5/20260731_GSoC_mini5.pptx
+++ b/docs/presentation/mini5/20260731_GSoC_mini5.pptx
@@ -775,7 +775,7 @@
           <a:p>
             <a:r>
               <a:rPr lang="en-US" dirty="0"/>
-              <a:t>Everything is on this slide on purpose. Three or five qubits, seven gate types, exactly five gates, one angle per gate, no optimizer, no classical parameters. A reader can verify any proposed circuit against these seven rows.</a:t>
+              <a:t>Four synthetic tasks so I control difficulty and know the answer exactly. Each signal is 32 numbers, which is exactly what five qubits hold, so the whole signal goes in with no padding and no truncation.</a:t>
             </a:r>
             <a:endParaRPr lang="en-US" dirty="0"/>
           </a:p>
@@ -863,7 +863,7 @@
           <a:p>
             <a:r>
               <a:rPr lang="en-US" dirty="0"/>
-              <a:t>RMSE is the typical size of the error, lower is better. The split matters: validation drives the search, and the test set is touched once after the winner is chosen, so the reported number never influenced the choice.</a:t>
+              <a:t>One operation is one physical gate, so sixteen means sixteen. The angle rule matters: the method chooses a range and the harness draws inside it, because the model cannot sample a continuum. Validation picks the winner and the test split is read once afterwards.</a:t>
             </a:r>
             <a:endParaRPr lang="en-US" dirty="0"/>
           </a:p>
@@ -1950,7 +1950,7 @@
                 <a:ea typeface="Arial" pitchFamily="34" charset="-122"/>
                 <a:cs typeface="Arial" pitchFamily="34" charset="-120"/>
               </a:rPr>
-              <a:t>July 31, 2026  ·  commit a01d11a  ·  experiment/bench-v2-real-llm-cost-minimal</a:t>
+              <a:t>July 31, 2026  ·  commit 705cf52  ·  experiment/bench-v2-real-llm-cost-minimal</a:t>
             </a:r>
             <a:endParaRPr lang="en-US" sz="1200" dirty="0"/>
           </a:p>
@@ -2726,7 +2726,7 @@
                 <a:ea typeface="Arial" pitchFamily="34" charset="-122"/>
                 <a:cs typeface="Arial" pitchFamily="34" charset="-120"/>
               </a:rPr>
-              <a:t>So a proposer that always asks for the maximum length wins without designing anything. Fixing the length takes that move away.</a:t>
+              <a:t>A proposer that always asks for the maximum length wins without designing anything. Fixing the length removes that move; 16 gates then makes the circuit visible to the readout.</a:t>
             </a:r>
             <a:endParaRPr lang="en-US" sz="1800" dirty="0"/>
           </a:p>
@@ -2836,7 +2836,7 @@
                 <a:ea typeface="Arial" pitchFamily="34" charset="-122"/>
                 <a:cs typeface="Arial" pitchFamily="34" charset="-120"/>
               </a:rPr>
-              <a:t>SEARCH SPACE</a:t>
+              <a:t>THE FOUR TASKS</a:t>
             </a:r>
             <a:endParaRPr lang="en-US" sz="1300" dirty="0"/>
           </a:p>
@@ -2875,7 +2875,7 @@
                 <a:ea typeface="Arial" pitchFamily="34" charset="-122"/>
                 <a:cs typeface="Arial" pitchFamily="34" charset="-120"/>
               </a:rPr>
-              <a:t>Every rule, stated so you can check any circuit by eye</a:t>
+              <a:t>Four questions about a 32-number signal</a:t>
             </a:r>
             <a:endParaRPr lang="en-US" sz="3000" dirty="0"/>
           </a:p>
@@ -2941,7 +2941,7 @@
                 <a:ea typeface="Arial" pitchFamily="34" charset="-122"/>
                 <a:cs typeface="Arial" pitchFamily="34" charset="-120"/>
               </a:rPr>
-              <a:t>Applies to all three conditions</a:t>
+              <a:t>5 qubits on every task</a:t>
             </a:r>
             <a:pPr algn="r" indent="0" marL="0">
               <a:buNone/>
@@ -2955,15 +2955,607 @@
                 <a:ea typeface="Arial" pitchFamily="34" charset="-122"/>
                 <a:cs typeface="Arial" pitchFamily="34" charset="-120"/>
               </a:rPr>
-              <a:t>   only gate count and B differ between them</a:t>
+              <a:t>   one circuit design per task</a:t>
             </a:r>
             <a:endParaRPr lang="en-US" sz="1150" dirty="0"/>
           </a:p>
         </p:txBody>
       </p:sp>
+      <p:pic>
+        <p:nvPicPr>
+          <p:cNvPr id="6" name="Image 0" descr="/Users/hatanakatomoya/Developer/Sim/llm-vqc/.claude/worktrees/github-author-config-faee6e/docs/presentation/mini5/figures/fig_tasks_v2.png">    </p:cNvPr>
+          <p:cNvPicPr>
+            <a:picLocks noChangeAspect="1"/>
+          </p:cNvPicPr>
+          <p:nvPr/>
+        </p:nvPicPr>
+        <p:blipFill>
+          <a:blip r:embed="rId1"/>
+          <a:stretch>
+            <a:fillRect/>
+          </a:stretch>
+        </p:blipFill>
+        <p:spPr>
+          <a:xfrm>
+            <a:off x="320040" y="1417320"/>
+            <a:ext cx="11567160" cy="2542032"/>
+          </a:xfrm>
+          <a:prstGeom prst="rect">
+            <a:avLst/>
+          </a:prstGeom>
+        </p:spPr>
+      </p:pic>
+      <p:sp>
+        <p:nvSpPr>
+          <p:cNvPr id="7" name="Shape 4"/>
+          <p:cNvSpPr/>
+          <p:nvPr/>
+        </p:nvSpPr>
+        <p:spPr>
+          <a:xfrm>
+            <a:off x="548640" y="4206240"/>
+            <a:ext cx="3520440" cy="1600200"/>
+          </a:xfrm>
+          <a:prstGeom prst="roundRect">
+            <a:avLst>
+              <a:gd name="adj" fmla="val 5714"/>
+            </a:avLst>
+          </a:prstGeom>
+          <a:solidFill>
+            <a:srgbClr val="F4F6FA"/>
+          </a:solidFill>
+          <a:ln w="19050">
+            <a:solidFill>
+              <a:srgbClr val="1E3A5F"/>
+            </a:solidFill>
+            <a:prstDash val="solid"/>
+          </a:ln>
+        </p:spPr>
+      </p:sp>
+      <p:sp>
+        <p:nvSpPr>
+          <p:cNvPr id="8" name="Text 5"/>
+          <p:cNvSpPr/>
+          <p:nvPr/>
+        </p:nvSpPr>
+        <p:spPr>
+          <a:xfrm>
+            <a:off x="777240" y="4315968"/>
+            <a:ext cx="3063240" cy="320040"/>
+          </a:xfrm>
+          <a:prstGeom prst="rect">
+            <a:avLst/>
+          </a:prstGeom>
+          <a:noFill/>
+          <a:ln/>
+        </p:spPr>
+        <p:txBody>
+          <a:bodyPr wrap="square" lIns="0" tIns="0" rIns="0" bIns="0" rtlCol="0" anchor="ctr"/>
+          <a:lstStyle/>
+          <a:p>
+            <a:pPr indent="0" marL="0">
+              <a:buNone/>
+            </a:pPr>
+            <a:r>
+              <a:rPr lang="en-US" sz="1500" b="1" dirty="0">
+                <a:solidFill>
+                  <a:srgbClr val="1E3A5F"/>
+                </a:solidFill>
+                <a:latin typeface="Arial" pitchFamily="34" charset="0"/>
+                <a:ea typeface="Arial" pitchFamily="34" charset="-122"/>
+                <a:cs typeface="Arial" pitchFamily="34" charset="-120"/>
+              </a:rPr>
+              <a:t>All four are synthetic</a:t>
+            </a:r>
+            <a:endParaRPr lang="en-US" sz="1500" dirty="0"/>
+          </a:p>
+        </p:txBody>
+      </p:sp>
+      <p:sp>
+        <p:nvSpPr>
+          <p:cNvPr id="9" name="Text 6"/>
+          <p:cNvSpPr/>
+          <p:nvPr/>
+        </p:nvSpPr>
+        <p:spPr>
+          <a:xfrm>
+            <a:off x="777240" y="4681728"/>
+            <a:ext cx="3063240" cy="1005840"/>
+          </a:xfrm>
+          <a:prstGeom prst="rect">
+            <a:avLst/>
+          </a:prstGeom>
+          <a:noFill/>
+          <a:ln/>
+        </p:spPr>
+        <p:txBody>
+          <a:bodyPr wrap="square" lIns="0" tIns="0" rIns="0" bIns="0" rtlCol="0" anchor="t"/>
+          <a:lstStyle/>
+          <a:p>
+            <a:pPr indent="0" marL="0">
+              <a:buNone/>
+            </a:pPr>
+            <a:r>
+              <a:rPr lang="en-US" sz="1350" dirty="0">
+                <a:solidFill>
+                  <a:srgbClr val="1A1A2E"/>
+                </a:solidFill>
+                <a:latin typeface="Arial" pitchFamily="34" charset="0"/>
+                <a:ea typeface="Arial" pitchFamily="34" charset="-122"/>
+                <a:cs typeface="Arial" pitchFamily="34" charset="-120"/>
+              </a:rPr>
+              <a:t>so difficulty and leakage are controlled, and the answer is known exactly</a:t>
+            </a:r>
+            <a:endParaRPr lang="en-US" sz="1350" dirty="0"/>
+          </a:p>
+        </p:txBody>
+      </p:sp>
+      <p:sp>
+        <p:nvSpPr>
+          <p:cNvPr id="10" name="Shape 7"/>
+          <p:cNvSpPr/>
+          <p:nvPr/>
+        </p:nvSpPr>
+        <p:spPr>
+          <a:xfrm>
+            <a:off x="4315968" y="4206240"/>
+            <a:ext cx="3520440" cy="1600200"/>
+          </a:xfrm>
+          <a:prstGeom prst="roundRect">
+            <a:avLst>
+              <a:gd name="adj" fmla="val 5714"/>
+            </a:avLst>
+          </a:prstGeom>
+          <a:solidFill>
+            <a:srgbClr val="F4F6FA"/>
+          </a:solidFill>
+          <a:ln w="19050">
+            <a:solidFill>
+              <a:srgbClr val="0B7A4B"/>
+            </a:solidFill>
+            <a:prstDash val="solid"/>
+          </a:ln>
+        </p:spPr>
+      </p:sp>
+      <p:sp>
+        <p:nvSpPr>
+          <p:cNvPr id="11" name="Text 8"/>
+          <p:cNvSpPr/>
+          <p:nvPr/>
+        </p:nvSpPr>
+        <p:spPr>
+          <a:xfrm>
+            <a:off x="4544568" y="4315968"/>
+            <a:ext cx="3063240" cy="320040"/>
+          </a:xfrm>
+          <a:prstGeom prst="rect">
+            <a:avLst/>
+          </a:prstGeom>
+          <a:noFill/>
+          <a:ln/>
+        </p:spPr>
+        <p:txBody>
+          <a:bodyPr wrap="square" lIns="0" tIns="0" rIns="0" bIns="0" rtlCol="0" anchor="ctr"/>
+          <a:lstStyle/>
+          <a:p>
+            <a:pPr indent="0" marL="0">
+              <a:buNone/>
+            </a:pPr>
+            <a:r>
+              <a:rPr lang="en-US" sz="1500" b="1" dirty="0">
+                <a:solidFill>
+                  <a:srgbClr val="0B7A4B"/>
+                </a:solidFill>
+                <a:latin typeface="Arial" pitchFamily="34" charset="0"/>
+                <a:ea typeface="Arial" pitchFamily="34" charset="-122"/>
+                <a:cs typeface="Arial" pitchFamily="34" charset="-120"/>
+              </a:rPr>
+              <a:t>T1-T3 are regression</a:t>
+            </a:r>
+            <a:endParaRPr lang="en-US" sz="1500" dirty="0"/>
+          </a:p>
+        </p:txBody>
+      </p:sp>
+      <p:sp>
+        <p:nvSpPr>
+          <p:cNvPr id="12" name="Text 9"/>
+          <p:cNvSpPr/>
+          <p:nvPr/>
+        </p:nvSpPr>
+        <p:spPr>
+          <a:xfrm>
+            <a:off x="4544568" y="4681728"/>
+            <a:ext cx="3063240" cy="1005840"/>
+          </a:xfrm>
+          <a:prstGeom prst="rect">
+            <a:avLst/>
+          </a:prstGeom>
+          <a:noFill/>
+          <a:ln/>
+        </p:spPr>
+        <p:txBody>
+          <a:bodyPr wrap="square" lIns="0" tIns="0" rIns="0" bIns="0" rtlCol="0" anchor="t"/>
+          <a:lstStyle/>
+          <a:p>
+            <a:pPr indent="0" marL="0">
+              <a:buNone/>
+            </a:pPr>
+            <a:r>
+              <a:rPr lang="en-US" sz="1350" dirty="0">
+                <a:solidFill>
+                  <a:srgbClr val="1A1A2E"/>
+                </a:solidFill>
+                <a:latin typeface="Arial" pitchFamily="34" charset="0"/>
+                <a:ea typeface="Arial" pitchFamily="34" charset="-122"/>
+                <a:cs typeface="Arial" pitchFamily="34" charset="-120"/>
+              </a:rPr>
+              <a:t>the target is a position or a rate, so RMSE is the natural score</a:t>
+            </a:r>
+            <a:endParaRPr lang="en-US" sz="1350" dirty="0"/>
+          </a:p>
+        </p:txBody>
+      </p:sp>
+      <p:sp>
+        <p:nvSpPr>
+          <p:cNvPr id="13" name="Shape 10"/>
+          <p:cNvSpPr/>
+          <p:nvPr/>
+        </p:nvSpPr>
+        <p:spPr>
+          <a:xfrm>
+            <a:off x="8092440" y="4206240"/>
+            <a:ext cx="3547872" cy="1600200"/>
+          </a:xfrm>
+          <a:prstGeom prst="roundRect">
+            <a:avLst>
+              <a:gd name="adj" fmla="val 5714"/>
+            </a:avLst>
+          </a:prstGeom>
+          <a:solidFill>
+            <a:srgbClr val="F4F6FA"/>
+          </a:solidFill>
+          <a:ln w="19050">
+            <a:solidFill>
+              <a:srgbClr val="B3261E"/>
+            </a:solidFill>
+            <a:prstDash val="solid"/>
+          </a:ln>
+        </p:spPr>
+      </p:sp>
+      <p:sp>
+        <p:nvSpPr>
+          <p:cNvPr id="14" name="Text 11"/>
+          <p:cNvSpPr/>
+          <p:nvPr/>
+        </p:nvSpPr>
+        <p:spPr>
+          <a:xfrm>
+            <a:off x="8321040" y="4315968"/>
+            <a:ext cx="3090672" cy="320040"/>
+          </a:xfrm>
+          <a:prstGeom prst="rect">
+            <a:avLst/>
+          </a:prstGeom>
+          <a:noFill/>
+          <a:ln/>
+        </p:spPr>
+        <p:txBody>
+          <a:bodyPr wrap="square" lIns="0" tIns="0" rIns="0" bIns="0" rtlCol="0" anchor="ctr"/>
+          <a:lstStyle/>
+          <a:p>
+            <a:pPr indent="0" marL="0">
+              <a:buNone/>
+            </a:pPr>
+            <a:r>
+              <a:rPr lang="en-US" sz="1500" b="1" dirty="0">
+                <a:solidFill>
+                  <a:srgbClr val="B3261E"/>
+                </a:solidFill>
+                <a:latin typeface="Arial" pitchFamily="34" charset="0"/>
+                <a:ea typeface="Arial" pitchFamily="34" charset="-122"/>
+                <a:cs typeface="Arial" pitchFamily="34" charset="-120"/>
+              </a:rPr>
+              <a:t>T4 is a yes/no question</a:t>
+            </a:r>
+            <a:endParaRPr lang="en-US" sz="1500" dirty="0"/>
+          </a:p>
+        </p:txBody>
+      </p:sp>
+      <p:sp>
+        <p:nvSpPr>
+          <p:cNvPr id="15" name="Text 12"/>
+          <p:cNvSpPr/>
+          <p:nvPr/>
+        </p:nvSpPr>
+        <p:spPr>
+          <a:xfrm>
+            <a:off x="8321040" y="4681728"/>
+            <a:ext cx="3090672" cy="1005840"/>
+          </a:xfrm>
+          <a:prstGeom prst="rect">
+            <a:avLst/>
+          </a:prstGeom>
+          <a:noFill/>
+          <a:ln/>
+        </p:spPr>
+        <p:txBody>
+          <a:bodyPr wrap="square" lIns="0" tIns="0" rIns="0" bIns="0" rtlCol="0" anchor="t"/>
+          <a:lstStyle/>
+          <a:p>
+            <a:pPr indent="0" marL="0">
+              <a:buNone/>
+            </a:pPr>
+            <a:r>
+              <a:rPr lang="en-US" sz="1350" dirty="0">
+                <a:solidFill>
+                  <a:srgbClr val="1A1A2E"/>
+                </a:solidFill>
+                <a:latin typeface="Arial" pitchFamily="34" charset="0"/>
+                <a:ea typeface="Arial" pitchFamily="34" charset="-122"/>
+                <a:cs typeface="Arial" pitchFamily="34" charset="-120"/>
+              </a:rPr>
+              <a:t>RMSE there is the error against a 0/1 label; AUROC is recorded too</a:t>
+            </a:r>
+            <a:endParaRPr lang="en-US" sz="1350" dirty="0"/>
+          </a:p>
+        </p:txBody>
+      </p:sp>
+      <p:sp>
+        <p:nvSpPr>
+          <p:cNvPr id="16" name="Text 13"/>
+          <p:cNvSpPr/>
+          <p:nvPr/>
+        </p:nvSpPr>
+        <p:spPr>
+          <a:xfrm>
+            <a:off x="502920" y="6473952"/>
+            <a:ext cx="11185855" cy="274320"/>
+          </a:xfrm>
+          <a:prstGeom prst="rect">
+            <a:avLst/>
+          </a:prstGeom>
+          <a:noFill/>
+          <a:ln/>
+        </p:spPr>
+        <p:txBody>
+          <a:bodyPr wrap="square" lIns="0" tIns="0" rIns="0" bIns="0" rtlCol="0" anchor="ctr"/>
+          <a:lstStyle/>
+          <a:p>
+            <a:pPr indent="0" marL="0">
+              <a:buNone/>
+            </a:pPr>
+            <a:r>
+              <a:rPr lang="en-US" sz="1100" dirty="0">
+                <a:solidFill>
+                  <a:srgbClr val="55606E"/>
+                </a:solidFill>
+                <a:latin typeface="Arial" pitchFamily="34" charset="0"/>
+                <a:ea typeface="Arial" pitchFamily="34" charset="-122"/>
+                <a:cs typeface="Arial" pitchFamily="34" charset="-120"/>
+              </a:rPr>
+              <a:t>Generated by llm_vqc/tasks/signal_suite · 256 train / 256 validation / 2048 test, regenerated per seed</a:t>
+            </a:r>
+            <a:endParaRPr lang="en-US" sz="1100" dirty="0"/>
+          </a:p>
+        </p:txBody>
+      </p:sp>
+    </p:spTree>
+  </p:cSld>
+  <p:clrMapOvr>
+    <a:masterClrMapping/>
+  </p:clrMapOvr>
+</p:sld>
+</file>
+
+<file path=ppt/slides/slide4.xml><?xml version="1.0" encoding="utf-8"?>
+<p:sld xmlns:a="http://schemas.openxmlformats.org/drawingml/2006/main" xmlns:r="http://schemas.openxmlformats.org/officeDocument/2006/relationships" xmlns:p="http://schemas.openxmlformats.org/presentationml/2006/main">
+  <p:cSld name="Slide 4">
+    <p:bg>
+      <p:bgPr>
+        <a:solidFill>
+          <a:srgbClr val="FFFFFF"/>
+        </a:solidFill>
+      </p:bgPr>
+    </p:bg>
+    <p:spTree>
+      <p:nvGrpSpPr>
+        <p:cNvPr id="1" name=""/>
+        <p:cNvGrpSpPr/>
+        <p:nvPr/>
+      </p:nvGrpSpPr>
+      <p:grpSpPr>
+        <a:xfrm>
+          <a:off x="0" y="0"/>
+          <a:ext cx="0" cy="0"/>
+          <a:chOff x="0" y="0"/>
+          <a:chExt cx="0" cy="0"/>
+        </a:xfrm>
+      </p:grpSpPr>
+      <p:sp>
+        <p:nvSpPr>
+          <p:cNvPr id="2" name="Text 0"/>
+          <p:cNvSpPr/>
+          <p:nvPr/>
+        </p:nvSpPr>
+        <p:spPr>
+          <a:xfrm>
+            <a:off x="502920" y="274320"/>
+            <a:ext cx="11185855" cy="274320"/>
+          </a:xfrm>
+          <a:prstGeom prst="rect">
+            <a:avLst/>
+          </a:prstGeom>
+          <a:noFill/>
+          <a:ln/>
+        </p:spPr>
+        <p:txBody>
+          <a:bodyPr wrap="square" lIns="0" tIns="0" rIns="0" bIns="0" rtlCol="0" anchor="ctr"/>
+          <a:lstStyle/>
+          <a:p>
+            <a:pPr indent="0" marL="0">
+              <a:buNone/>
+            </a:pPr>
+            <a:r>
+              <a:rPr lang="en-US" sz="1300" b="1" spc="150" kern="0" dirty="0">
+                <a:solidFill>
+                  <a:srgbClr val="B3261E"/>
+                </a:solidFill>
+                <a:latin typeface="Arial" pitchFamily="34" charset="0"/>
+                <a:ea typeface="Arial" pitchFamily="34" charset="-122"/>
+                <a:cs typeface="Arial" pitchFamily="34" charset="-120"/>
+              </a:rPr>
+              <a:t>THE RULES</a:t>
+            </a:r>
+            <a:endParaRPr lang="en-US" sz="1300" dirty="0"/>
+          </a:p>
+        </p:txBody>
+      </p:sp>
+      <p:sp>
+        <p:nvSpPr>
+          <p:cNvPr id="3" name="Text 1"/>
+          <p:cNvSpPr/>
+          <p:nvPr/>
+        </p:nvSpPr>
+        <p:spPr>
+          <a:xfrm>
+            <a:off x="502920" y="548640"/>
+            <a:ext cx="11185855" cy="658368"/>
+          </a:xfrm>
+          <a:prstGeom prst="rect">
+            <a:avLst/>
+          </a:prstGeom>
+          <a:noFill/>
+          <a:ln/>
+        </p:spPr>
+        <p:txBody>
+          <a:bodyPr wrap="square" lIns="0" tIns="0" rIns="0" bIns="0" rtlCol="0" anchor="ctr"/>
+          <a:lstStyle/>
+          <a:p>
+            <a:pPr indent="0" marL="0">
+              <a:buNone/>
+            </a:pPr>
+            <a:r>
+              <a:rPr lang="en-US" sz="3000" b="1" dirty="0">
+                <a:solidFill>
+                  <a:srgbClr val="1E3A5F"/>
+                </a:solidFill>
+                <a:latin typeface="Arial" pitchFamily="34" charset="0"/>
+                <a:ea typeface="Arial" pitchFamily="34" charset="-122"/>
+                <a:cs typeface="Arial" pitchFamily="34" charset="-120"/>
+              </a:rPr>
+              <a:t>One pipeline, and every constraint on it</a:t>
+            </a:r>
+            <a:endParaRPr lang="en-US" sz="3000" dirty="0"/>
+          </a:p>
+        </p:txBody>
+      </p:sp>
+      <p:sp>
+        <p:nvSpPr>
+          <p:cNvPr id="4" name="Shape 2"/>
+          <p:cNvSpPr/>
+          <p:nvPr/>
+        </p:nvSpPr>
+        <p:spPr>
+          <a:xfrm>
+            <a:off x="5699455" y="256032"/>
+            <a:ext cx="5989320" cy="402336"/>
+          </a:xfrm>
+          <a:prstGeom prst="roundRect">
+            <a:avLst>
+              <a:gd name="adj" fmla="val 15909"/>
+            </a:avLst>
+          </a:prstGeom>
+          <a:solidFill>
+            <a:srgbClr val="F4F6FA"/>
+          </a:solidFill>
+          <a:ln w="12700">
+            <a:solidFill>
+              <a:srgbClr val="D8DDE6"/>
+            </a:solidFill>
+            <a:prstDash val="solid"/>
+          </a:ln>
+        </p:spPr>
+      </p:sp>
+      <p:sp>
+        <p:nvSpPr>
+          <p:cNvPr id="5" name="Text 3"/>
+          <p:cNvSpPr/>
+          <p:nvPr/>
+        </p:nvSpPr>
+        <p:spPr>
+          <a:xfrm>
+            <a:off x="5836615" y="274320"/>
+            <a:ext cx="5715000" cy="365760"/>
+          </a:xfrm>
+          <a:prstGeom prst="rect">
+            <a:avLst/>
+          </a:prstGeom>
+          <a:noFill/>
+          <a:ln/>
+        </p:spPr>
+        <p:txBody>
+          <a:bodyPr wrap="square" lIns="0" tIns="0" rIns="0" bIns="0" rtlCol="0" anchor="ctr"/>
+          <a:lstStyle/>
+          <a:p>
+            <a:pPr algn="r" indent="0" marL="0">
+              <a:buNone/>
+            </a:pPr>
+            <a:r>
+              <a:rPr lang="en-US" sz="1150" b="1" dirty="0">
+                <a:solidFill>
+                  <a:srgbClr val="1E3A5F"/>
+                </a:solidFill>
+                <a:latin typeface="Arial" pitchFamily="34" charset="0"/>
+                <a:ea typeface="Arial" pitchFamily="34" charset="-122"/>
+                <a:cs typeface="Arial" pitchFamily="34" charset="-120"/>
+              </a:rPr>
+              <a:t>The run reported on slides 6 and 9</a:t>
+            </a:r>
+            <a:pPr algn="r" indent="0" marL="0">
+              <a:buNone/>
+            </a:pPr>
+            <a:r>
+              <a:rPr lang="en-US" sz="1150" dirty="0">
+                <a:solidFill>
+                  <a:srgbClr val="55606E"/>
+                </a:solidFill>
+                <a:latin typeface="Arial" pitchFamily="34" charset="0"/>
+                <a:ea typeface="Arial" pitchFamily="34" charset="-122"/>
+                <a:cs typeface="Arial" pitchFamily="34" charset="-120"/>
+              </a:rPr>
+              <a:t>   16 gates, 5 qubits, B = 8, 30 seeds</a:t>
+            </a:r>
+            <a:endParaRPr lang="en-US" sz="1150" dirty="0"/>
+          </a:p>
+        </p:txBody>
+      </p:sp>
+      <p:pic>
+        <p:nvPicPr>
+          <p:cNvPr id="6" name="Image 0" descr="/Users/hatanakatomoya/Developer/Sim/llm-vqc/.claude/worktrees/github-author-config-faee6e/docs/presentation/mini5/figures/fig_contract.png">    </p:cNvPr>
+          <p:cNvPicPr>
+            <a:picLocks noChangeAspect="1"/>
+          </p:cNvPicPr>
+          <p:nvPr/>
+        </p:nvPicPr>
+        <p:blipFill>
+          <a:blip r:embed="rId1"/>
+          <a:stretch>
+            <a:fillRect/>
+          </a:stretch>
+        </p:blipFill>
+        <p:spPr>
+          <a:xfrm>
+            <a:off x="457200" y="1371600"/>
+            <a:ext cx="11292840" cy="2606040"/>
+          </a:xfrm>
+          <a:prstGeom prst="rect">
+            <a:avLst/>
+          </a:prstGeom>
+        </p:spPr>
+      </p:pic>
       <p:graphicFrame>
         <p:nvGraphicFramePr>
-          <p:cNvPr id="4" name="Table 0"/>
+          <p:cNvPr id="5" name="Table 0"/>
           <p:cNvGraphicFramePr>
             <a:graphicFrameLocks noGrp="1"/>
           </p:cNvGraphicFramePr>
@@ -2976,7 +3568,7 @@
           </p:nvPr>
         </p:nvGraphicFramePr>
         <p:xfrm>
-          <a:off x="548640" y="1417320"/>
+          <a:off x="548640" y="4114800"/>
           <a:ext cx="11109960" cy="914400"/>
         </p:xfrm>
         <a:graphic>
@@ -2984,10 +3576,10 @@
             <a:tbl>
               <a:tblPr/>
               <a:tblGrid>
-                <a:gridCol w="2377440"/>
-                <a:gridCol w="8732520"/>
+                <a:gridCol w="2194560"/>
+                <a:gridCol w="8915400"/>
               </a:tblGrid>
-              <a:tr h="457200">
+              <a:tr h="365760">
                 <a:tc>
                   <a:txBody>
                     <a:bodyPr/>
@@ -2997,7 +3589,7 @@
                         <a:buNone/>
                       </a:pPr>
                       <a:r>
-                        <a:rPr lang="en-US" sz="1500" b="1" dirty="0">
+                        <a:rPr lang="en-US" sz="1350" b="1" dirty="0">
                           <a:solidFill>
                             <a:srgbClr val="FFFFFF"/>
                           </a:solidFill>
@@ -3007,14 +3599,14 @@
                         </a:rPr>
                         <a:t>Constraint</a:t>
                       </a:r>
-                      <a:endParaRPr lang="en-US" sz="1500" dirty="0">
+                      <a:endParaRPr lang="en-US" sz="1350" dirty="0">
                         <a:latin typeface="Arial" charset="0"/>
                         <a:ea typeface="Arial" charset="0"/>
                         <a:cs typeface="Arial" charset="0"/>
                       </a:endParaRPr>
                     </a:p>
                   </a:txBody>
-                  <a:tcPr marL="73152" marR="73152" marT="73152" marB="73152" anchor="ctr">
+                  <a:tcPr marL="64008" marR="64008" marT="64008" marB="64008" anchor="ctr">
                     <a:lnL w="9525" cap="flat" cmpd="sng" algn="ctr">
                       <a:solidFill>
                         <a:srgbClr val="D8DDE6"/>
@@ -3065,7 +3657,7 @@
                         <a:buNone/>
                       </a:pPr>
                       <a:r>
-                        <a:rPr lang="en-US" sz="1500" b="1" dirty="0">
+                        <a:rPr lang="en-US" sz="1350" b="1" dirty="0">
                           <a:solidFill>
                             <a:srgbClr val="FFFFFF"/>
                           </a:solidFill>
@@ -3075,14 +3667,14 @@
                         </a:rPr>
                         <a:t>Value</a:t>
                       </a:r>
-                      <a:endParaRPr lang="en-US" sz="1500" dirty="0">
+                      <a:endParaRPr lang="en-US" sz="1350" dirty="0">
                         <a:latin typeface="Arial" charset="0"/>
                         <a:ea typeface="Arial" charset="0"/>
                         <a:cs typeface="Arial" charset="0"/>
                       </a:endParaRPr>
                     </a:p>
                   </a:txBody>
-                  <a:tcPr marL="73152" marR="73152" marT="73152" marB="73152" anchor="ctr">
+                  <a:tcPr marL="64008" marR="64008" marT="64008" marB="64008" anchor="ctr">
                     <a:lnL w="9525" cap="flat" cmpd="sng" algn="ctr">
                       <a:solidFill>
                         <a:srgbClr val="D8DDE6"/>
@@ -3125,7 +3717,7 @@
                   </a:tcPr>
                 </a:tc>
               </a:tr>
-              <a:tr h="457200">
+              <a:tr h="365760">
                 <a:tc>
                   <a:txBody>
                     <a:bodyPr/>
@@ -3135,7 +3727,7 @@
                         <a:buNone/>
                       </a:pPr>
                       <a:r>
-                        <a:rPr lang="en-US" sz="1500" dirty="0">
+                        <a:rPr lang="en-US" sz="1350" dirty="0">
                           <a:solidFill>
                             <a:srgbClr val="000000"/>
                           </a:solidFill>
@@ -3143,16 +3735,16 @@
                           <a:ea typeface="Arial" pitchFamily="34" charset="-122"/>
                           <a:cs typeface="Arial" pitchFamily="34" charset="-120"/>
                         </a:rPr>
-                        <a:t>Tasks</a:t>
+                        <a:t>Gate count</a:t>
                       </a:r>
-                      <a:endParaRPr lang="en-US" sz="1500" dirty="0">
+                      <a:endParaRPr lang="en-US" sz="1350" dirty="0">
                         <a:latin typeface="Arial" charset="0"/>
                         <a:ea typeface="Arial" charset="0"/>
                         <a:cs typeface="Arial" charset="0"/>
                       </a:endParaRPr>
                     </a:p>
                   </a:txBody>
-                  <a:tcPr marL="73152" marR="73152" marT="73152" marB="73152" anchor="ctr">
+                  <a:tcPr marL="64008" marR="64008" marT="64008" marB="64008" anchor="ctr">
                     <a:lnL w="9525" cap="flat" cmpd="sng" algn="ctr">
                       <a:solidFill>
                         <a:srgbClr val="D8DDE6"/>
@@ -3200,7 +3792,7 @@
                         <a:buNone/>
                       </a:pPr>
                       <a:r>
-                        <a:rPr lang="en-US" sz="1500" dirty="0">
+                        <a:rPr lang="en-US" sz="1350" dirty="0">
                           <a:solidFill>
                             <a:srgbClr val="000000"/>
                           </a:solidFill>
@@ -3208,16 +3800,16 @@
                           <a:ea typeface="Arial" pitchFamily="34" charset="-122"/>
                           <a:cs typeface="Arial" pitchFamily="34" charset="-120"/>
                         </a:rPr>
-                        <a:t>T1 peak position · T2 sinusoid frequency · T3 change-point location · T4 one peak vs two (binary)</a:t>
+                        <a:t>16 exactly - enough that the measured qubit can see the circuit (slide 7)</a:t>
                       </a:r>
-                      <a:endParaRPr lang="en-US" sz="1500" dirty="0">
+                      <a:endParaRPr lang="en-US" sz="1350" dirty="0">
                         <a:latin typeface="Arial" charset="0"/>
                         <a:ea typeface="Arial" charset="0"/>
                         <a:cs typeface="Arial" charset="0"/>
                       </a:endParaRPr>
                     </a:p>
                   </a:txBody>
-                  <a:tcPr marL="73152" marR="73152" marT="73152" marB="73152" anchor="ctr">
+                  <a:tcPr marL="64008" marR="64008" marT="64008" marB="64008" anchor="ctr">
                     <a:lnL w="9525" cap="flat" cmpd="sng" algn="ctr">
                       <a:solidFill>
                         <a:srgbClr val="D8DDE6"/>
@@ -3257,7 +3849,7 @@
                   </a:tcPr>
                 </a:tc>
               </a:tr>
-              <a:tr h="457200">
+              <a:tr h="365760">
                 <a:tc>
                   <a:txBody>
                     <a:bodyPr/>
@@ -3267,7 +3859,7 @@
                         <a:buNone/>
                       </a:pPr>
                       <a:r>
-                        <a:rPr lang="en-US" sz="1500" dirty="0">
+                        <a:rPr lang="en-US" sz="1350" dirty="0">
                           <a:solidFill>
                             <a:srgbClr val="000000"/>
                           </a:solidFill>
@@ -3275,16 +3867,16 @@
                           <a:ea typeface="Arial" pitchFamily="34" charset="-122"/>
                           <a:cs typeface="Arial" pitchFamily="34" charset="-120"/>
                         </a:rPr>
-                        <a:t>Qubits</a:t>
+                        <a:t>Gate set</a:t>
                       </a:r>
-                      <a:endParaRPr lang="en-US" sz="1500" dirty="0">
+                      <a:endParaRPr lang="en-US" sz="1350" dirty="0">
                         <a:latin typeface="Arial" charset="0"/>
                         <a:ea typeface="Arial" charset="0"/>
                         <a:cs typeface="Arial" charset="0"/>
                       </a:endParaRPr>
                     </a:p>
                   </a:txBody>
-                  <a:tcPr marL="73152" marR="73152" marT="73152" marB="73152" anchor="ctr">
+                  <a:tcPr marL="64008" marR="64008" marT="64008" marB="64008" anchor="ctr">
                     <a:lnL w="9525" cap="flat" cmpd="sng" algn="ctr">
                       <a:solidFill>
                         <a:srgbClr val="D8DDE6"/>
@@ -3332,7 +3924,7 @@
                         <a:buNone/>
                       </a:pPr>
                       <a:r>
-                        <a:rPr lang="en-US" sz="1500" dirty="0">
+                        <a:rPr lang="en-US" sz="1350" dirty="0">
                           <a:solidFill>
                             <a:srgbClr val="000000"/>
                           </a:solidFill>
@@ -3340,16 +3932,16 @@
                           <a:ea typeface="Arial" pitchFamily="34" charset="-122"/>
                           <a:cs typeface="Arial" pitchFamily="34" charset="-120"/>
                         </a:rPr>
-                        <a:t>3 for T1, T2   ·   5 for T3, T4   (a circuit on n qubits holds 2^n numbers)</a:t>
+                        <a:t>H, RX, RY, RZ (one qubit)   ·   CRX, CRY, CRZ (two qubits)</a:t>
                       </a:r>
-                      <a:endParaRPr lang="en-US" sz="1500" dirty="0">
+                      <a:endParaRPr lang="en-US" sz="1350" dirty="0">
                         <a:latin typeface="Arial" charset="0"/>
                         <a:ea typeface="Arial" charset="0"/>
                         <a:cs typeface="Arial" charset="0"/>
                       </a:endParaRPr>
                     </a:p>
                   </a:txBody>
-                  <a:tcPr marL="73152" marR="73152" marT="73152" marB="73152" anchor="ctr">
+                  <a:tcPr marL="64008" marR="64008" marT="64008" marB="64008" anchor="ctr">
                     <a:lnL w="9525" cap="flat" cmpd="sng" algn="ctr">
                       <a:solidFill>
                         <a:srgbClr val="D8DDE6"/>
@@ -3389,7 +3981,7 @@
                   </a:tcPr>
                 </a:tc>
               </a:tr>
-              <a:tr h="457200">
+              <a:tr h="365760">
                 <a:tc>
                   <a:txBody>
                     <a:bodyPr/>
@@ -3399,7 +3991,7 @@
                         <a:buNone/>
                       </a:pPr>
                       <a:r>
-                        <a:rPr lang="en-US" sz="1500" dirty="0">
+                        <a:rPr lang="en-US" sz="1350" dirty="0">
                           <a:solidFill>
                             <a:srgbClr val="000000"/>
                           </a:solidFill>
@@ -3407,16 +3999,16 @@
                           <a:ea typeface="Arial" pitchFamily="34" charset="-122"/>
                           <a:cs typeface="Arial" pitchFamily="34" charset="-120"/>
                         </a:rPr>
-                        <a:t>Gate count</a:t>
+                        <a:t>Angles</a:t>
                       </a:r>
-                      <a:endParaRPr lang="en-US" sz="1500" dirty="0">
+                      <a:endParaRPr lang="en-US" sz="1350" dirty="0">
                         <a:latin typeface="Arial" charset="0"/>
                         <a:ea typeface="Arial" charset="0"/>
                         <a:cs typeface="Arial" charset="0"/>
                       </a:endParaRPr>
                     </a:p>
                   </a:txBody>
-                  <a:tcPr marL="73152" marR="73152" marT="73152" marB="73152" anchor="ctr">
+                  <a:tcPr marL="64008" marR="64008" marT="64008" marB="64008" anchor="ctr">
                     <a:lnL w="9525" cap="flat" cmpd="sng" algn="ctr">
                       <a:solidFill>
                         <a:srgbClr val="D8DDE6"/>
@@ -3464,7 +4056,7 @@
                         <a:buNone/>
                       </a:pPr>
                       <a:r>
-                        <a:rPr lang="en-US" sz="1500" dirty="0">
+                        <a:rPr lang="en-US" sz="1350" dirty="0">
                           <a:solidFill>
                             <a:srgbClr val="000000"/>
                           </a:solidFill>
@@ -3472,16 +4064,16 @@
                           <a:ea typeface="Arial" pitchFamily="34" charset="-122"/>
                           <a:cs typeface="Arial" pitchFamily="34" charset="-120"/>
                         </a:rPr>
-                        <a:t>5 exactly (PRIMARY)   ·   1 to 5 (both controls)</a:t>
+                        <a:t>the method picks one of 8 RANGES over [-pi, pi]; the harness draws inside it</a:t>
                       </a:r>
-                      <a:endParaRPr lang="en-US" sz="1500" dirty="0">
+                      <a:endParaRPr lang="en-US" sz="1350" dirty="0">
                         <a:latin typeface="Arial" charset="0"/>
                         <a:ea typeface="Arial" charset="0"/>
                         <a:cs typeface="Arial" charset="0"/>
                       </a:endParaRPr>
                     </a:p>
                   </a:txBody>
-                  <a:tcPr marL="73152" marR="73152" marT="73152" marB="73152" anchor="ctr">
+                  <a:tcPr marL="64008" marR="64008" marT="64008" marB="64008" anchor="ctr">
                     <a:lnL w="9525" cap="flat" cmpd="sng" algn="ctr">
                       <a:solidFill>
                         <a:srgbClr val="D8DDE6"/>
@@ -3521,7 +4113,7 @@
                   </a:tcPr>
                 </a:tc>
               </a:tr>
-              <a:tr h="457200">
+              <a:tr h="365760">
                 <a:tc>
                   <a:txBody>
                     <a:bodyPr/>
@@ -3531,7 +4123,7 @@
                         <a:buNone/>
                       </a:pPr>
                       <a:r>
-                        <a:rPr lang="en-US" sz="1500" dirty="0">
+                        <a:rPr lang="en-US" sz="1350" dirty="0">
                           <a:solidFill>
                             <a:srgbClr val="000000"/>
                           </a:solidFill>
@@ -3539,16 +4131,16 @@
                           <a:ea typeface="Arial" pitchFamily="34" charset="-122"/>
                           <a:cs typeface="Arial" pitchFamily="34" charset="-120"/>
                         </a:rPr>
-                        <a:t>Gate set</a:t>
+                        <a:t>Budget B</a:t>
                       </a:r>
-                      <a:endParaRPr lang="en-US" sz="1500" dirty="0">
+                      <a:endParaRPr lang="en-US" sz="1350" dirty="0">
                         <a:latin typeface="Arial" charset="0"/>
                         <a:ea typeface="Arial" charset="0"/>
                         <a:cs typeface="Arial" charset="0"/>
                       </a:endParaRPr>
                     </a:p>
                   </a:txBody>
-                  <a:tcPr marL="73152" marR="73152" marT="73152" marB="73152" anchor="ctr">
+                  <a:tcPr marL="64008" marR="64008" marT="64008" marB="64008" anchor="ctr">
                     <a:lnL w="9525" cap="flat" cmpd="sng" algn="ctr">
                       <a:solidFill>
                         <a:srgbClr val="D8DDE6"/>
@@ -3596,7 +4188,7 @@
                         <a:buNone/>
                       </a:pPr>
                       <a:r>
-                        <a:rPr lang="en-US" sz="1500" dirty="0">
+                        <a:rPr lang="en-US" sz="1350" dirty="0">
                           <a:solidFill>
                             <a:srgbClr val="000000"/>
                           </a:solidFill>
@@ -3604,16 +4196,16 @@
                           <a:ea typeface="Arial" pitchFamily="34" charset="-122"/>
                           <a:cs typeface="Arial" pitchFamily="34" charset="-120"/>
                         </a:rPr>
-                        <a:t>H, RX, RY, RZ (one qubit)   ·   CRX, CRY, CRZ (two qubits)</a:t>
+                        <a:t>8 distinct circuits scored per method   ·   30 seeds</a:t>
                       </a:r>
-                      <a:endParaRPr lang="en-US" sz="1500" dirty="0">
+                      <a:endParaRPr lang="en-US" sz="1350" dirty="0">
                         <a:latin typeface="Arial" charset="0"/>
                         <a:ea typeface="Arial" charset="0"/>
                         <a:cs typeface="Arial" charset="0"/>
                       </a:endParaRPr>
                     </a:p>
                   </a:txBody>
-                  <a:tcPr marL="73152" marR="73152" marT="73152" marB="73152" anchor="ctr">
+                  <a:tcPr marL="64008" marR="64008" marT="64008" marB="64008" anchor="ctr">
                     <a:lnL w="9525" cap="flat" cmpd="sng" algn="ctr">
                       <a:solidFill>
                         <a:srgbClr val="D8DDE6"/>
@@ -3653,7 +4245,7 @@
                   </a:tcPr>
                 </a:tc>
               </a:tr>
-              <a:tr h="457200">
+              <a:tr h="365760">
                 <a:tc>
                   <a:txBody>
                     <a:bodyPr/>
@@ -3663,7 +4255,7 @@
                         <a:buNone/>
                       </a:pPr>
                       <a:r>
-                        <a:rPr lang="en-US" sz="1500" dirty="0">
+                        <a:rPr lang="en-US" sz="1350" dirty="0">
                           <a:solidFill>
                             <a:srgbClr val="000000"/>
                           </a:solidFill>
@@ -3671,16 +4263,16 @@
                           <a:ea typeface="Arial" pitchFamily="34" charset="-122"/>
                           <a:cs typeface="Arial" pitchFamily="34" charset="-120"/>
                         </a:rPr>
-                        <a:t>Angles</a:t>
+                        <a:t>Scoring</a:t>
                       </a:r>
-                      <a:endParaRPr lang="en-US" sz="1500" dirty="0">
+                      <a:endParaRPr lang="en-US" sz="1350" dirty="0">
                         <a:latin typeface="Arial" charset="0"/>
                         <a:ea typeface="Arial" charset="0"/>
                         <a:cs typeface="Arial" charset="0"/>
                       </a:endParaRPr>
                     </a:p>
                   </a:txBody>
-                  <a:tcPr marL="73152" marR="73152" marT="73152" marB="73152" anchor="ctr">
+                  <a:tcPr marL="64008" marR="64008" marT="64008" marB="64008" anchor="ctr">
                     <a:lnL w="9525" cap="flat" cmpd="sng" algn="ctr">
                       <a:solidFill>
                         <a:srgbClr val="D8DDE6"/>
@@ -3728,7 +4320,7 @@
                         <a:buNone/>
                       </a:pPr>
                       <a:r>
-                        <a:rPr lang="en-US" sz="1500" dirty="0">
+                        <a:rPr lang="en-US" sz="1350" dirty="0">
                           <a:solidFill>
                             <a:srgbClr val="000000"/>
                           </a:solidFill>
@@ -3736,544 +4328,16 @@
                           <a:ea typeface="Arial" pitchFamily="34" charset="-122"/>
                           <a:cs typeface="Arial" pitchFamily="34" charset="-120"/>
                         </a:rPr>
-                        <a:t>one number per gate, anywhere in [-pi, pi]   (H has none)</a:t>
+                        <a:t>validation RMSE picks the winner; test RMSE is read once, after that choice</a:t>
                       </a:r>
-                      <a:endParaRPr lang="en-US" sz="1500" dirty="0">
+                      <a:endParaRPr lang="en-US" sz="1350" dirty="0">
                         <a:latin typeface="Arial" charset="0"/>
                         <a:ea typeface="Arial" charset="0"/>
                         <a:cs typeface="Arial" charset="0"/>
                       </a:endParaRPr>
                     </a:p>
                   </a:txBody>
-                  <a:tcPr marL="73152" marR="73152" marT="73152" marB="73152" anchor="ctr">
-                    <a:lnL w="9525" cap="flat" cmpd="sng" algn="ctr">
-                      <a:solidFill>
-                        <a:srgbClr val="D8DDE6"/>
-                      </a:solidFill>
-                      <a:prstDash val="solid"/>
-                      <a:round/>
-                      <a:headEnd type="none" w="med" len="med"/>
-                      <a:tailEnd type="none" w="med" len="med"/>
-                    </a:lnL>
-                    <a:lnR w="9525" cap="flat" cmpd="sng" algn="ctr">
-                      <a:solidFill>
-                        <a:srgbClr val="D8DDE6"/>
-                      </a:solidFill>
-                      <a:prstDash val="solid"/>
-                      <a:round/>
-                      <a:headEnd type="none" w="med" len="med"/>
-                      <a:tailEnd type="none" w="med" len="med"/>
-                    </a:lnR>
-                    <a:lnT w="9525" cap="flat" cmpd="sng" algn="ctr">
-                      <a:solidFill>
-                        <a:srgbClr val="D8DDE6"/>
-                      </a:solidFill>
-                      <a:prstDash val="solid"/>
-                      <a:round/>
-                      <a:headEnd type="none" w="med" len="med"/>
-                      <a:tailEnd type="none" w="med" len="med"/>
-                    </a:lnT>
-                    <a:lnB w="9525" cap="flat" cmpd="sng" algn="ctr">
-                      <a:solidFill>
-                        <a:srgbClr val="D8DDE6"/>
-                      </a:solidFill>
-                      <a:prstDash val="solid"/>
-                      <a:round/>
-                      <a:headEnd type="none" w="med" len="med"/>
-                      <a:tailEnd type="none" w="med" len="med"/>
-                    </a:lnB>
-                  </a:tcPr>
-                </a:tc>
-              </a:tr>
-              <a:tr h="457200">
-                <a:tc>
-                  <a:txBody>
-                    <a:bodyPr/>
-                    <a:lstStyle/>
-                    <a:p>
-                      <a:pPr indent="0" marL="0">
-                        <a:buNone/>
-                      </a:pPr>
-                      <a:r>
-                        <a:rPr lang="en-US" sz="1500" dirty="0">
-                          <a:solidFill>
-                            <a:srgbClr val="000000"/>
-                          </a:solidFill>
-                          <a:latin typeface="Arial" pitchFamily="34" charset="0"/>
-                          <a:ea typeface="Arial" pitchFamily="34" charset="-122"/>
-                          <a:cs typeface="Arial" pitchFamily="34" charset="-120"/>
-                        </a:rPr>
-                        <a:t>Budget B</a:t>
-                      </a:r>
-                      <a:endParaRPr lang="en-US" sz="1500" dirty="0">
-                        <a:latin typeface="Arial" charset="0"/>
-                        <a:ea typeface="Arial" charset="0"/>
-                        <a:cs typeface="Arial" charset="0"/>
-                      </a:endParaRPr>
-                    </a:p>
-                  </a:txBody>
-                  <a:tcPr marL="73152" marR="73152" marT="73152" marB="73152" anchor="ctr">
-                    <a:lnL w="9525" cap="flat" cmpd="sng" algn="ctr">
-                      <a:solidFill>
-                        <a:srgbClr val="D8DDE6"/>
-                      </a:solidFill>
-                      <a:prstDash val="solid"/>
-                      <a:round/>
-                      <a:headEnd type="none" w="med" len="med"/>
-                      <a:tailEnd type="none" w="med" len="med"/>
-                    </a:lnL>
-                    <a:lnR w="9525" cap="flat" cmpd="sng" algn="ctr">
-                      <a:solidFill>
-                        <a:srgbClr val="D8DDE6"/>
-                      </a:solidFill>
-                      <a:prstDash val="solid"/>
-                      <a:round/>
-                      <a:headEnd type="none" w="med" len="med"/>
-                      <a:tailEnd type="none" w="med" len="med"/>
-                    </a:lnR>
-                    <a:lnT w="9525" cap="flat" cmpd="sng" algn="ctr">
-                      <a:solidFill>
-                        <a:srgbClr val="D8DDE6"/>
-                      </a:solidFill>
-                      <a:prstDash val="solid"/>
-                      <a:round/>
-                      <a:headEnd type="none" w="med" len="med"/>
-                      <a:tailEnd type="none" w="med" len="med"/>
-                    </a:lnT>
-                    <a:lnB w="9525" cap="flat" cmpd="sng" algn="ctr">
-                      <a:solidFill>
-                        <a:srgbClr val="D8DDE6"/>
-                      </a:solidFill>
-                      <a:prstDash val="solid"/>
-                      <a:round/>
-                      <a:headEnd type="none" w="med" len="med"/>
-                      <a:tailEnd type="none" w="med" len="med"/>
-                    </a:lnB>
-                  </a:tcPr>
-                </a:tc>
-                <a:tc>
-                  <a:txBody>
-                    <a:bodyPr/>
-                    <a:lstStyle/>
-                    <a:p>
-                      <a:pPr indent="0" marL="0">
-                        <a:buNone/>
-                      </a:pPr>
-                      <a:r>
-                        <a:rPr lang="en-US" sz="1500" dirty="0">
-                          <a:solidFill>
-                            <a:srgbClr val="000000"/>
-                          </a:solidFill>
-                          <a:latin typeface="Arial" pitchFamily="34" charset="0"/>
-                          <a:ea typeface="Arial" pitchFamily="34" charset="-122"/>
-                          <a:cs typeface="Arial" pitchFamily="34" charset="-120"/>
-                        </a:rPr>
-                        <a:t>8 distinct circuits scored per method (4 in Control B)   ·   10 seeds</a:t>
-                      </a:r>
-                      <a:endParaRPr lang="en-US" sz="1500" dirty="0">
-                        <a:latin typeface="Arial" charset="0"/>
-                        <a:ea typeface="Arial" charset="0"/>
-                        <a:cs typeface="Arial" charset="0"/>
-                      </a:endParaRPr>
-                    </a:p>
-                  </a:txBody>
-                  <a:tcPr marL="73152" marR="73152" marT="73152" marB="73152" anchor="ctr">
-                    <a:lnL w="9525" cap="flat" cmpd="sng" algn="ctr">
-                      <a:solidFill>
-                        <a:srgbClr val="D8DDE6"/>
-                      </a:solidFill>
-                      <a:prstDash val="solid"/>
-                      <a:round/>
-                      <a:headEnd type="none" w="med" len="med"/>
-                      <a:tailEnd type="none" w="med" len="med"/>
-                    </a:lnL>
-                    <a:lnR w="9525" cap="flat" cmpd="sng" algn="ctr">
-                      <a:solidFill>
-                        <a:srgbClr val="D8DDE6"/>
-                      </a:solidFill>
-                      <a:prstDash val="solid"/>
-                      <a:round/>
-                      <a:headEnd type="none" w="med" len="med"/>
-                      <a:tailEnd type="none" w="med" len="med"/>
-                    </a:lnR>
-                    <a:lnT w="9525" cap="flat" cmpd="sng" algn="ctr">
-                      <a:solidFill>
-                        <a:srgbClr val="D8DDE6"/>
-                      </a:solidFill>
-                      <a:prstDash val="solid"/>
-                      <a:round/>
-                      <a:headEnd type="none" w="med" len="med"/>
-                      <a:tailEnd type="none" w="med" len="med"/>
-                    </a:lnT>
-                    <a:lnB w="9525" cap="flat" cmpd="sng" algn="ctr">
-                      <a:solidFill>
-                        <a:srgbClr val="D8DDE6"/>
-                      </a:solidFill>
-                      <a:prstDash val="solid"/>
-                      <a:round/>
-                      <a:headEnd type="none" w="med" len="med"/>
-                      <a:tailEnd type="none" w="med" len="med"/>
-                    </a:lnB>
-                  </a:tcPr>
-                </a:tc>
-              </a:tr>
-              <a:tr h="457200">
-                <a:tc>
-                  <a:txBody>
-                    <a:bodyPr/>
-                    <a:lstStyle/>
-                    <a:p>
-                      <a:pPr indent="0" marL="0">
-                        <a:buNone/>
-                      </a:pPr>
-                      <a:r>
-                        <a:rPr lang="en-US" sz="1500" dirty="0">
-                          <a:solidFill>
-                            <a:srgbClr val="000000"/>
-                          </a:solidFill>
-                          <a:latin typeface="Arial" pitchFamily="34" charset="0"/>
-                          <a:ea typeface="Arial" pitchFamily="34" charset="-122"/>
-                          <a:cs typeface="Arial" pitchFamily="34" charset="-120"/>
-                        </a:rPr>
-                        <a:t>Training</a:t>
-                      </a:r>
-                      <a:endParaRPr lang="en-US" sz="1500" dirty="0">
-                        <a:latin typeface="Arial" charset="0"/>
-                        <a:ea typeface="Arial" charset="0"/>
-                        <a:cs typeface="Arial" charset="0"/>
-                      </a:endParaRPr>
-                    </a:p>
-                  </a:txBody>
-                  <a:tcPr marL="73152" marR="73152" marT="73152" marB="73152" anchor="ctr">
-                    <a:lnL w="9525" cap="flat" cmpd="sng" algn="ctr">
-                      <a:solidFill>
-                        <a:srgbClr val="D8DDE6"/>
-                      </a:solidFill>
-                      <a:prstDash val="solid"/>
-                      <a:round/>
-                      <a:headEnd type="none" w="med" len="med"/>
-                      <a:tailEnd type="none" w="med" len="med"/>
-                    </a:lnL>
-                    <a:lnR w="9525" cap="flat" cmpd="sng" algn="ctr">
-                      <a:solidFill>
-                        <a:srgbClr val="D8DDE6"/>
-                      </a:solidFill>
-                      <a:prstDash val="solid"/>
-                      <a:round/>
-                      <a:headEnd type="none" w="med" len="med"/>
-                      <a:tailEnd type="none" w="med" len="med"/>
-                    </a:lnR>
-                    <a:lnT w="9525" cap="flat" cmpd="sng" algn="ctr">
-                      <a:solidFill>
-                        <a:srgbClr val="D8DDE6"/>
-                      </a:solidFill>
-                      <a:prstDash val="solid"/>
-                      <a:round/>
-                      <a:headEnd type="none" w="med" len="med"/>
-                      <a:tailEnd type="none" w="med" len="med"/>
-                    </a:lnT>
-                    <a:lnB w="9525" cap="flat" cmpd="sng" algn="ctr">
-                      <a:solidFill>
-                        <a:srgbClr val="D8DDE6"/>
-                      </a:solidFill>
-                      <a:prstDash val="solid"/>
-                      <a:round/>
-                      <a:headEnd type="none" w="med" len="med"/>
-                      <a:tailEnd type="none" w="med" len="med"/>
-                    </a:lnB>
-                  </a:tcPr>
-                </a:tc>
-                <a:tc>
-                  <a:txBody>
-                    <a:bodyPr/>
-                    <a:lstStyle/>
-                    <a:p>
-                      <a:pPr indent="0" marL="0">
-                        <a:buNone/>
-                      </a:pPr>
-                      <a:r>
-                        <a:rPr lang="en-US" sz="1500" dirty="0">
-                          <a:solidFill>
-                            <a:srgbClr val="000000"/>
-                          </a:solidFill>
-                          <a:latin typeface="Arial" pitchFamily="34" charset="0"/>
-                          <a:ea typeface="Arial" pitchFamily="34" charset="-122"/>
-                          <a:cs typeface="Arial" pitchFamily="34" charset="-120"/>
-                        </a:rPr>
-                        <a:t>none - proposed angles are used exactly as written</a:t>
-                      </a:r>
-                      <a:endParaRPr lang="en-US" sz="1500" dirty="0">
-                        <a:latin typeface="Arial" charset="0"/>
-                        <a:ea typeface="Arial" charset="0"/>
-                        <a:cs typeface="Arial" charset="0"/>
-                      </a:endParaRPr>
-                    </a:p>
-                  </a:txBody>
-                  <a:tcPr marL="73152" marR="73152" marT="73152" marB="73152" anchor="ctr">
-                    <a:lnL w="9525" cap="flat" cmpd="sng" algn="ctr">
-                      <a:solidFill>
-                        <a:srgbClr val="D8DDE6"/>
-                      </a:solidFill>
-                      <a:prstDash val="solid"/>
-                      <a:round/>
-                      <a:headEnd type="none" w="med" len="med"/>
-                      <a:tailEnd type="none" w="med" len="med"/>
-                    </a:lnL>
-                    <a:lnR w="9525" cap="flat" cmpd="sng" algn="ctr">
-                      <a:solidFill>
-                        <a:srgbClr val="D8DDE6"/>
-                      </a:solidFill>
-                      <a:prstDash val="solid"/>
-                      <a:round/>
-                      <a:headEnd type="none" w="med" len="med"/>
-                      <a:tailEnd type="none" w="med" len="med"/>
-                    </a:lnR>
-                    <a:lnT w="9525" cap="flat" cmpd="sng" algn="ctr">
-                      <a:solidFill>
-                        <a:srgbClr val="D8DDE6"/>
-                      </a:solidFill>
-                      <a:prstDash val="solid"/>
-                      <a:round/>
-                      <a:headEnd type="none" w="med" len="med"/>
-                      <a:tailEnd type="none" w="med" len="med"/>
-                    </a:lnT>
-                    <a:lnB w="9525" cap="flat" cmpd="sng" algn="ctr">
-                      <a:solidFill>
-                        <a:srgbClr val="D8DDE6"/>
-                      </a:solidFill>
-                      <a:prstDash val="solid"/>
-                      <a:round/>
-                      <a:headEnd type="none" w="med" len="med"/>
-                      <a:tailEnd type="none" w="med" len="med"/>
-                    </a:lnB>
-                  </a:tcPr>
-                </a:tc>
-              </a:tr>
-              <a:tr h="457200">
-                <a:tc>
-                  <a:txBody>
-                    <a:bodyPr/>
-                    <a:lstStyle/>
-                    <a:p>
-                      <a:pPr indent="0" marL="0">
-                        <a:buNone/>
-                      </a:pPr>
-                      <a:r>
-                        <a:rPr lang="en-US" sz="1500" dirty="0">
-                          <a:solidFill>
-                            <a:srgbClr val="000000"/>
-                          </a:solidFill>
-                          <a:latin typeface="Arial" pitchFamily="34" charset="0"/>
-                          <a:ea typeface="Arial" pitchFamily="34" charset="-122"/>
-                          <a:cs typeface="Arial" pitchFamily="34" charset="-120"/>
-                        </a:rPr>
-                        <a:t>Encoding / readout</a:t>
-                      </a:r>
-                      <a:endParaRPr lang="en-US" sz="1500" dirty="0">
-                        <a:latin typeface="Arial" charset="0"/>
-                        <a:ea typeface="Arial" charset="0"/>
-                        <a:cs typeface="Arial" charset="0"/>
-                      </a:endParaRPr>
-                    </a:p>
-                  </a:txBody>
-                  <a:tcPr marL="73152" marR="73152" marT="73152" marB="73152" anchor="ctr">
-                    <a:lnL w="9525" cap="flat" cmpd="sng" algn="ctr">
-                      <a:solidFill>
-                        <a:srgbClr val="D8DDE6"/>
-                      </a:solidFill>
-                      <a:prstDash val="solid"/>
-                      <a:round/>
-                      <a:headEnd type="none" w="med" len="med"/>
-                      <a:tailEnd type="none" w="med" len="med"/>
-                    </a:lnL>
-                    <a:lnR w="9525" cap="flat" cmpd="sng" algn="ctr">
-                      <a:solidFill>
-                        <a:srgbClr val="D8DDE6"/>
-                      </a:solidFill>
-                      <a:prstDash val="solid"/>
-                      <a:round/>
-                      <a:headEnd type="none" w="med" len="med"/>
-                      <a:tailEnd type="none" w="med" len="med"/>
-                    </a:lnR>
-                    <a:lnT w="9525" cap="flat" cmpd="sng" algn="ctr">
-                      <a:solidFill>
-                        <a:srgbClr val="D8DDE6"/>
-                      </a:solidFill>
-                      <a:prstDash val="solid"/>
-                      <a:round/>
-                      <a:headEnd type="none" w="med" len="med"/>
-                      <a:tailEnd type="none" w="med" len="med"/>
-                    </a:lnT>
-                    <a:lnB w="9525" cap="flat" cmpd="sng" algn="ctr">
-                      <a:solidFill>
-                        <a:srgbClr val="D8DDE6"/>
-                      </a:solidFill>
-                      <a:prstDash val="solid"/>
-                      <a:round/>
-                      <a:headEnd type="none" w="med" len="med"/>
-                      <a:tailEnd type="none" w="med" len="med"/>
-                    </a:lnB>
-                  </a:tcPr>
-                </a:tc>
-                <a:tc>
-                  <a:txBody>
-                    <a:bodyPr/>
-                    <a:lstStyle/>
-                    <a:p>
-                      <a:pPr indent="0" marL="0">
-                        <a:buNone/>
-                      </a:pPr>
-                      <a:r>
-                        <a:rPr lang="en-US" sz="1500" dirty="0">
-                          <a:solidFill>
-                            <a:srgbClr val="000000"/>
-                          </a:solidFill>
-                          <a:latin typeface="Arial" pitchFamily="34" charset="0"/>
-                          <a:ea typeface="Arial" pitchFamily="34" charset="-122"/>
-                          <a:cs typeface="Arial" pitchFamily="34" charset="-120"/>
-                        </a:rPr>
-                        <a:t>amplitude encoding; measure Z on qubit 0</a:t>
-                      </a:r>
-                      <a:endParaRPr lang="en-US" sz="1500" dirty="0">
-                        <a:latin typeface="Arial" charset="0"/>
-                        <a:ea typeface="Arial" charset="0"/>
-                        <a:cs typeface="Arial" charset="0"/>
-                      </a:endParaRPr>
-                    </a:p>
-                  </a:txBody>
-                  <a:tcPr marL="73152" marR="73152" marT="73152" marB="73152" anchor="ctr">
-                    <a:lnL w="9525" cap="flat" cmpd="sng" algn="ctr">
-                      <a:solidFill>
-                        <a:srgbClr val="D8DDE6"/>
-                      </a:solidFill>
-                      <a:prstDash val="solid"/>
-                      <a:round/>
-                      <a:headEnd type="none" w="med" len="med"/>
-                      <a:tailEnd type="none" w="med" len="med"/>
-                    </a:lnL>
-                    <a:lnR w="9525" cap="flat" cmpd="sng" algn="ctr">
-                      <a:solidFill>
-                        <a:srgbClr val="D8DDE6"/>
-                      </a:solidFill>
-                      <a:prstDash val="solid"/>
-                      <a:round/>
-                      <a:headEnd type="none" w="med" len="med"/>
-                      <a:tailEnd type="none" w="med" len="med"/>
-                    </a:lnR>
-                    <a:lnT w="9525" cap="flat" cmpd="sng" algn="ctr">
-                      <a:solidFill>
-                        <a:srgbClr val="D8DDE6"/>
-                      </a:solidFill>
-                      <a:prstDash val="solid"/>
-                      <a:round/>
-                      <a:headEnd type="none" w="med" len="med"/>
-                      <a:tailEnd type="none" w="med" len="med"/>
-                    </a:lnT>
-                    <a:lnB w="9525" cap="flat" cmpd="sng" algn="ctr">
-                      <a:solidFill>
-                        <a:srgbClr val="D8DDE6"/>
-                      </a:solidFill>
-                      <a:prstDash val="solid"/>
-                      <a:round/>
-                      <a:headEnd type="none" w="med" len="med"/>
-                      <a:tailEnd type="none" w="med" len="med"/>
-                    </a:lnB>
-                  </a:tcPr>
-                </a:tc>
-              </a:tr>
-              <a:tr h="457200">
-                <a:tc>
-                  <a:txBody>
-                    <a:bodyPr/>
-                    <a:lstStyle/>
-                    <a:p>
-                      <a:pPr indent="0" marL="0">
-                        <a:buNone/>
-                      </a:pPr>
-                      <a:r>
-                        <a:rPr lang="en-US" sz="1500" dirty="0">
-                          <a:solidFill>
-                            <a:srgbClr val="000000"/>
-                          </a:solidFill>
-                          <a:latin typeface="Arial" pitchFamily="34" charset="0"/>
-                          <a:ea typeface="Arial" pitchFamily="34" charset="-122"/>
-                          <a:cs typeface="Arial" pitchFamily="34" charset="-120"/>
-                        </a:rPr>
-                        <a:t>Classical params</a:t>
-                      </a:r>
-                      <a:endParaRPr lang="en-US" sz="1500" dirty="0">
-                        <a:latin typeface="Arial" charset="0"/>
-                        <a:ea typeface="Arial" charset="0"/>
-                        <a:cs typeface="Arial" charset="0"/>
-                      </a:endParaRPr>
-                    </a:p>
-                  </a:txBody>
-                  <a:tcPr marL="73152" marR="73152" marT="73152" marB="73152" anchor="ctr">
-                    <a:lnL w="9525" cap="flat" cmpd="sng" algn="ctr">
-                      <a:solidFill>
-                        <a:srgbClr val="D8DDE6"/>
-                      </a:solidFill>
-                      <a:prstDash val="solid"/>
-                      <a:round/>
-                      <a:headEnd type="none" w="med" len="med"/>
-                      <a:tailEnd type="none" w="med" len="med"/>
-                    </a:lnL>
-                    <a:lnR w="9525" cap="flat" cmpd="sng" algn="ctr">
-                      <a:solidFill>
-                        <a:srgbClr val="D8DDE6"/>
-                      </a:solidFill>
-                      <a:prstDash val="solid"/>
-                      <a:round/>
-                      <a:headEnd type="none" w="med" len="med"/>
-                      <a:tailEnd type="none" w="med" len="med"/>
-                    </a:lnR>
-                    <a:lnT w="9525" cap="flat" cmpd="sng" algn="ctr">
-                      <a:solidFill>
-                        <a:srgbClr val="D8DDE6"/>
-                      </a:solidFill>
-                      <a:prstDash val="solid"/>
-                      <a:round/>
-                      <a:headEnd type="none" w="med" len="med"/>
-                      <a:tailEnd type="none" w="med" len="med"/>
-                    </a:lnT>
-                    <a:lnB w="9525" cap="flat" cmpd="sng" algn="ctr">
-                      <a:solidFill>
-                        <a:srgbClr val="D8DDE6"/>
-                      </a:solidFill>
-                      <a:prstDash val="solid"/>
-                      <a:round/>
-                      <a:headEnd type="none" w="med" len="med"/>
-                      <a:tailEnd type="none" w="med" len="med"/>
-                    </a:lnB>
-                  </a:tcPr>
-                </a:tc>
-                <a:tc>
-                  <a:txBody>
-                    <a:bodyPr/>
-                    <a:lstStyle/>
-                    <a:p>
-                      <a:pPr indent="0" marL="0">
-                        <a:buNone/>
-                      </a:pPr>
-                      <a:r>
-                        <a:rPr lang="en-US" sz="1500" dirty="0">
-                          <a:solidFill>
-                            <a:srgbClr val="000000"/>
-                          </a:solidFill>
-                          <a:latin typeface="Arial" pitchFamily="34" charset="0"/>
-                          <a:ea typeface="Arial" pitchFamily="34" charset="-122"/>
-                          <a:cs typeface="Arial" pitchFamily="34" charset="-120"/>
-                        </a:rPr>
-                        <a:t>zero - nothing outside the circuit can fix a bad circuit</a:t>
-                      </a:r>
-                      <a:endParaRPr lang="en-US" sz="1500" dirty="0">
-                        <a:latin typeface="Arial" charset="0"/>
-                        <a:ea typeface="Arial" charset="0"/>
-                        <a:cs typeface="Arial" charset="0"/>
-                      </a:endParaRPr>
-                    </a:p>
-                  </a:txBody>
-                  <a:tcPr marL="73152" marR="73152" marT="73152" marB="73152" anchor="ctr">
+                  <a:tcPr marL="64008" marR="64008" marT="64008" marB="64008" anchor="ctr">
                     <a:lnL w="9525" cap="flat" cmpd="sng" algn="ctr">
                       <a:solidFill>
                         <a:srgbClr val="D8DDE6"/>
@@ -4319,7 +4383,7 @@
       </p:graphicFrame>
       <p:sp>
         <p:nvSpPr>
-          <p:cNvPr id="7" name="Text 4"/>
+          <p:cNvPr id="8" name="Text 4"/>
           <p:cNvSpPr/>
           <p:nvPr/>
         </p:nvSpPr>
@@ -4350,575 +4414,7 @@
                 <a:ea typeface="Arial" pitchFamily="34" charset="-122"/>
                 <a:cs typeface="Arial" pitchFamily="34" charset="-120"/>
               </a:rPr>
-              <a:t>One operation = one physical gate; a 5-gate circuit compiles to 5 gates. The same grammar check is applied to classical samplers and LLM replies alike</a:t>
-            </a:r>
-            <a:endParaRPr lang="en-US" sz="1100" dirty="0"/>
-          </a:p>
-        </p:txBody>
-      </p:sp>
-    </p:spTree>
-  </p:cSld>
-  <p:clrMapOvr>
-    <a:masterClrMapping/>
-  </p:clrMapOvr>
-</p:sld>
-</file>
-
-<file path=ppt/slides/slide4.xml><?xml version="1.0" encoding="utf-8"?>
-<p:sld xmlns:a="http://schemas.openxmlformats.org/drawingml/2006/main" xmlns:r="http://schemas.openxmlformats.org/officeDocument/2006/relationships" xmlns:p="http://schemas.openxmlformats.org/presentationml/2006/main">
-  <p:cSld name="Slide 4">
-    <p:bg>
-      <p:bgPr>
-        <a:solidFill>
-          <a:srgbClr val="FFFFFF"/>
-        </a:solidFill>
-      </p:bgPr>
-    </p:bg>
-    <p:spTree>
-      <p:nvGrpSpPr>
-        <p:cNvPr id="1" name=""/>
-        <p:cNvGrpSpPr/>
-        <p:nvPr/>
-      </p:nvGrpSpPr>
-      <p:grpSpPr>
-        <a:xfrm>
-          <a:off x="0" y="0"/>
-          <a:ext cx="0" cy="0"/>
-          <a:chOff x="0" y="0"/>
-          <a:chExt cx="0" cy="0"/>
-        </a:xfrm>
-      </p:grpSpPr>
-      <p:sp>
-        <p:nvSpPr>
-          <p:cNvPr id="2" name="Text 0"/>
-          <p:cNvSpPr/>
-          <p:nvPr/>
-        </p:nvSpPr>
-        <p:spPr>
-          <a:xfrm>
-            <a:off x="502920" y="274320"/>
-            <a:ext cx="11185855" cy="274320"/>
-          </a:xfrm>
-          <a:prstGeom prst="rect">
-            <a:avLst/>
-          </a:prstGeom>
-          <a:noFill/>
-          <a:ln/>
-        </p:spPr>
-        <p:txBody>
-          <a:bodyPr wrap="square" lIns="0" tIns="0" rIns="0" bIns="0" rtlCol="0" anchor="ctr"/>
-          <a:lstStyle/>
-          <a:p>
-            <a:pPr indent="0" marL="0">
-              <a:buNone/>
-            </a:pPr>
-            <a:r>
-              <a:rPr lang="en-US" sz="1300" b="1" spc="150" kern="0" dirty="0">
-                <a:solidFill>
-                  <a:srgbClr val="B3261E"/>
-                </a:solidFill>
-                <a:latin typeface="Arial" pitchFamily="34" charset="0"/>
-                <a:ea typeface="Arial" pitchFamily="34" charset="-122"/>
-                <a:cs typeface="Arial" pitchFamily="34" charset="-120"/>
-              </a:rPr>
-              <a:t>WHAT IS MEASURED</a:t>
-            </a:r>
-            <a:endParaRPr lang="en-US" sz="1300" dirty="0"/>
-          </a:p>
-        </p:txBody>
-      </p:sp>
-      <p:sp>
-        <p:nvSpPr>
-          <p:cNvPr id="3" name="Text 1"/>
-          <p:cNvSpPr/>
-          <p:nvPr/>
-        </p:nvSpPr>
-        <p:spPr>
-          <a:xfrm>
-            <a:off x="502920" y="548640"/>
-            <a:ext cx="11185855" cy="658368"/>
-          </a:xfrm>
-          <a:prstGeom prst="rect">
-            <a:avLst/>
-          </a:prstGeom>
-          <a:noFill/>
-          <a:ln/>
-        </p:spPr>
-        <p:txBody>
-          <a:bodyPr wrap="square" lIns="0" tIns="0" rIns="0" bIns="0" rtlCol="0" anchor="ctr"/>
-          <a:lstStyle/>
-          <a:p>
-            <a:pPr indent="0" marL="0">
-              <a:buNone/>
-            </a:pPr>
-            <a:r>
-              <a:rPr lang="en-US" sz="3000" b="1" dirty="0">
-                <a:solidFill>
-                  <a:srgbClr val="1E3A5F"/>
-                </a:solidFill>
-                <a:latin typeface="Arial" pitchFamily="34" charset="0"/>
-                <a:ea typeface="Arial" pitchFamily="34" charset="-122"/>
-                <a:cs typeface="Arial" pitchFamily="34" charset="-120"/>
-              </a:rPr>
-              <a:t>One number: RMSE, the typical size of the error</a:t>
-            </a:r>
-            <a:endParaRPr lang="en-US" sz="3000" dirty="0"/>
-          </a:p>
-        </p:txBody>
-      </p:sp>
-      <p:sp>
-        <p:nvSpPr>
-          <p:cNvPr id="4" name="Shape 2"/>
-          <p:cNvSpPr/>
-          <p:nvPr/>
-        </p:nvSpPr>
-        <p:spPr>
-          <a:xfrm>
-            <a:off x="5699455" y="256032"/>
-            <a:ext cx="5989320" cy="402336"/>
-          </a:xfrm>
-          <a:prstGeom prst="roundRect">
-            <a:avLst>
-              <a:gd name="adj" fmla="val 15909"/>
-            </a:avLst>
-          </a:prstGeom>
-          <a:solidFill>
-            <a:srgbClr val="F4F6FA"/>
-          </a:solidFill>
-          <a:ln w="12700">
-            <a:solidFill>
-              <a:srgbClr val="D8DDE6"/>
-            </a:solidFill>
-            <a:prstDash val="solid"/>
-          </a:ln>
-        </p:spPr>
-      </p:sp>
-      <p:sp>
-        <p:nvSpPr>
-          <p:cNvPr id="5" name="Text 3"/>
-          <p:cNvSpPr/>
-          <p:nvPr/>
-        </p:nvSpPr>
-        <p:spPr>
-          <a:xfrm>
-            <a:off x="5836615" y="274320"/>
-            <a:ext cx="5715000" cy="365760"/>
-          </a:xfrm>
-          <a:prstGeom prst="rect">
-            <a:avLst/>
-          </a:prstGeom>
-          <a:noFill/>
-          <a:ln/>
-        </p:spPr>
-        <p:txBody>
-          <a:bodyPr wrap="square" lIns="0" tIns="0" rIns="0" bIns="0" rtlCol="0" anchor="ctr"/>
-          <a:lstStyle/>
-          <a:p>
-            <a:pPr algn="r" indent="0" marL="0">
-              <a:buNone/>
-            </a:pPr>
-            <a:r>
-              <a:rPr lang="en-US" sz="1150" b="1" dirty="0">
-                <a:solidFill>
-                  <a:srgbClr val="1E3A5F"/>
-                </a:solidFill>
-                <a:latin typeface="Arial" pitchFamily="34" charset="0"/>
-                <a:ea typeface="Arial" pitchFamily="34" charset="-122"/>
-                <a:cs typeface="Arial" pitchFamily="34" charset="-120"/>
-              </a:rPr>
-              <a:t>Applies to all three conditions</a:t>
-            </a:r>
-            <a:pPr algn="r" indent="0" marL="0">
-              <a:buNone/>
-            </a:pPr>
-            <a:r>
-              <a:rPr lang="en-US" sz="1150" dirty="0">
-                <a:solidFill>
-                  <a:srgbClr val="55606E"/>
-                </a:solidFill>
-                <a:latin typeface="Arial" pitchFamily="34" charset="0"/>
-                <a:ea typeface="Arial" pitchFamily="34" charset="-122"/>
-                <a:cs typeface="Arial" pitchFamily="34" charset="-120"/>
-              </a:rPr>
-              <a:t>   same pipeline throughout</a:t>
-            </a:r>
-            <a:endParaRPr lang="en-US" sz="1150" dirty="0"/>
-          </a:p>
-        </p:txBody>
-      </p:sp>
-      <p:pic>
-        <p:nvPicPr>
-          <p:cNvPr id="6" name="Image 0" descr="/Users/hatanakatomoya/Developer/Sim/llm-vqc/.claude/worktrees/github-author-config-faee6e/docs/presentation/mini5/figures/fig_contract.png">    </p:cNvPr>
-          <p:cNvPicPr>
-            <a:picLocks noChangeAspect="1"/>
-          </p:cNvPicPr>
-          <p:nvPr/>
-        </p:nvPicPr>
-        <p:blipFill>
-          <a:blip r:embed="rId1"/>
-          <a:stretch>
-            <a:fillRect/>
-          </a:stretch>
-        </p:blipFill>
-        <p:spPr>
-          <a:xfrm>
-            <a:off x="411480" y="1371600"/>
-            <a:ext cx="11384280" cy="2624328"/>
-          </a:xfrm>
-          <a:prstGeom prst="rect">
-            <a:avLst/>
-          </a:prstGeom>
-        </p:spPr>
-      </p:pic>
-      <p:sp>
-        <p:nvSpPr>
-          <p:cNvPr id="7" name="Shape 4"/>
-          <p:cNvSpPr/>
-          <p:nvPr/>
-        </p:nvSpPr>
-        <p:spPr>
-          <a:xfrm>
-            <a:off x="548640" y="4206240"/>
-            <a:ext cx="3520440" cy="1600200"/>
-          </a:xfrm>
-          <a:prstGeom prst="roundRect">
-            <a:avLst>
-              <a:gd name="adj" fmla="val 5714"/>
-            </a:avLst>
-          </a:prstGeom>
-          <a:solidFill>
-            <a:srgbClr val="F4F6FA"/>
-          </a:solidFill>
-          <a:ln w="19050">
-            <a:solidFill>
-              <a:srgbClr val="1E3A5F"/>
-            </a:solidFill>
-            <a:prstDash val="solid"/>
-          </a:ln>
-        </p:spPr>
-      </p:sp>
-      <p:sp>
-        <p:nvSpPr>
-          <p:cNvPr id="8" name="Text 5"/>
-          <p:cNvSpPr/>
-          <p:nvPr/>
-        </p:nvSpPr>
-        <p:spPr>
-          <a:xfrm>
-            <a:off x="777240" y="4315968"/>
-            <a:ext cx="3108960" cy="320040"/>
-          </a:xfrm>
-          <a:prstGeom prst="rect">
-            <a:avLst/>
-          </a:prstGeom>
-          <a:noFill/>
-          <a:ln/>
-        </p:spPr>
-        <p:txBody>
-          <a:bodyPr wrap="square" lIns="0" tIns="0" rIns="0" bIns="0" rtlCol="0" anchor="ctr"/>
-          <a:lstStyle/>
-          <a:p>
-            <a:pPr indent="0" marL="0">
-              <a:buNone/>
-            </a:pPr>
-            <a:r>
-              <a:rPr lang="en-US" sz="1500" b="1" dirty="0">
-                <a:solidFill>
-                  <a:srgbClr val="1E3A5F"/>
-                </a:solidFill>
-                <a:latin typeface="Arial" pitchFamily="34" charset="0"/>
-                <a:ea typeface="Arial" pitchFamily="34" charset="-122"/>
-                <a:cs typeface="Arial" pitchFamily="34" charset="-120"/>
-              </a:rPr>
-              <a:t>Validation RMSE</a:t>
-            </a:r>
-            <a:endParaRPr lang="en-US" sz="1500" dirty="0"/>
-          </a:p>
-        </p:txBody>
-      </p:sp>
-      <p:sp>
-        <p:nvSpPr>
-          <p:cNvPr id="9" name="Text 6"/>
-          <p:cNvSpPr/>
-          <p:nvPr/>
-        </p:nvSpPr>
-        <p:spPr>
-          <a:xfrm>
-            <a:off x="777240" y="4681728"/>
-            <a:ext cx="3108960" cy="1005840"/>
-          </a:xfrm>
-          <a:prstGeom prst="rect">
-            <a:avLst/>
-          </a:prstGeom>
-          <a:noFill/>
-          <a:ln/>
-        </p:spPr>
-        <p:txBody>
-          <a:bodyPr wrap="square" lIns="0" tIns="0" rIns="0" bIns="0" rtlCol="0" anchor="t"/>
-          <a:lstStyle/>
-          <a:p>
-            <a:pPr indent="0" marL="0">
-              <a:buNone/>
-            </a:pPr>
-            <a:r>
-              <a:rPr lang="en-US" sz="1350" dirty="0">
-                <a:solidFill>
-                  <a:srgbClr val="1A1A2E"/>
-                </a:solidFill>
-                <a:latin typeface="Arial" pitchFamily="34" charset="0"/>
-                <a:ea typeface="Arial" pitchFamily="34" charset="-122"/>
-                <a:cs typeface="Arial" pitchFamily="34" charset="-120"/>
-              </a:rPr>
-              <a:t>drives the search - each method keeps its own best</a:t>
-            </a:r>
-            <a:endParaRPr lang="en-US" sz="1350" dirty="0"/>
-          </a:p>
-        </p:txBody>
-      </p:sp>
-      <p:sp>
-        <p:nvSpPr>
-          <p:cNvPr id="10" name="Shape 7"/>
-          <p:cNvSpPr/>
-          <p:nvPr/>
-        </p:nvSpPr>
-        <p:spPr>
-          <a:xfrm>
-            <a:off x="4315968" y="4206240"/>
-            <a:ext cx="3520440" cy="1600200"/>
-          </a:xfrm>
-          <a:prstGeom prst="roundRect">
-            <a:avLst>
-              <a:gd name="adj" fmla="val 5714"/>
-            </a:avLst>
-          </a:prstGeom>
-          <a:solidFill>
-            <a:srgbClr val="F4F6FA"/>
-          </a:solidFill>
-          <a:ln w="19050">
-            <a:solidFill>
-              <a:srgbClr val="0B7A4B"/>
-            </a:solidFill>
-            <a:prstDash val="solid"/>
-          </a:ln>
-        </p:spPr>
-      </p:sp>
-      <p:sp>
-        <p:nvSpPr>
-          <p:cNvPr id="11" name="Text 8"/>
-          <p:cNvSpPr/>
-          <p:nvPr/>
-        </p:nvSpPr>
-        <p:spPr>
-          <a:xfrm>
-            <a:off x="4544568" y="4315968"/>
-            <a:ext cx="3108960" cy="320040"/>
-          </a:xfrm>
-          <a:prstGeom prst="rect">
-            <a:avLst/>
-          </a:prstGeom>
-          <a:noFill/>
-          <a:ln/>
-        </p:spPr>
-        <p:txBody>
-          <a:bodyPr wrap="square" lIns="0" tIns="0" rIns="0" bIns="0" rtlCol="0" anchor="ctr"/>
-          <a:lstStyle/>
-          <a:p>
-            <a:pPr indent="0" marL="0">
-              <a:buNone/>
-            </a:pPr>
-            <a:r>
-              <a:rPr lang="en-US" sz="1500" b="1" dirty="0">
-                <a:solidFill>
-                  <a:srgbClr val="0B7A4B"/>
-                </a:solidFill>
-                <a:latin typeface="Arial" pitchFamily="34" charset="0"/>
-                <a:ea typeface="Arial" pitchFamily="34" charset="-122"/>
-                <a:cs typeface="Arial" pitchFamily="34" charset="-120"/>
-              </a:rPr>
-              <a:t>Test RMSE</a:t>
-            </a:r>
-            <a:endParaRPr lang="en-US" sz="1500" dirty="0"/>
-          </a:p>
-        </p:txBody>
-      </p:sp>
-      <p:sp>
-        <p:nvSpPr>
-          <p:cNvPr id="12" name="Text 9"/>
-          <p:cNvSpPr/>
-          <p:nvPr/>
-        </p:nvSpPr>
-        <p:spPr>
-          <a:xfrm>
-            <a:off x="4544568" y="4681728"/>
-            <a:ext cx="3108960" cy="1005840"/>
-          </a:xfrm>
-          <a:prstGeom prst="rect">
-            <a:avLst/>
-          </a:prstGeom>
-          <a:noFill/>
-          <a:ln/>
-        </p:spPr>
-        <p:txBody>
-          <a:bodyPr wrap="square" lIns="0" tIns="0" rIns="0" bIns="0" rtlCol="0" anchor="t"/>
-          <a:lstStyle/>
-          <a:p>
-            <a:pPr indent="0" marL="0">
-              <a:buNone/>
-            </a:pPr>
-            <a:r>
-              <a:rPr lang="en-US" sz="1350" dirty="0">
-                <a:solidFill>
-                  <a:srgbClr val="1A1A2E"/>
-                </a:solidFill>
-                <a:latin typeface="Arial" pitchFamily="34" charset="0"/>
-                <a:ea typeface="Arial" pitchFamily="34" charset="-122"/>
-                <a:cs typeface="Arial" pitchFamily="34" charset="-120"/>
-              </a:rPr>
-              <a:t>reported once, after the choice is frozen. Never used to choose.</a:t>
-            </a:r>
-            <a:endParaRPr lang="en-US" sz="1350" dirty="0"/>
-          </a:p>
-        </p:txBody>
-      </p:sp>
-      <p:sp>
-        <p:nvSpPr>
-          <p:cNvPr id="13" name="Shape 10"/>
-          <p:cNvSpPr/>
-          <p:nvPr/>
-        </p:nvSpPr>
-        <p:spPr>
-          <a:xfrm>
-            <a:off x="8092440" y="4206240"/>
-            <a:ext cx="3520440" cy="1600200"/>
-          </a:xfrm>
-          <a:prstGeom prst="roundRect">
-            <a:avLst>
-              <a:gd name="adj" fmla="val 5714"/>
-            </a:avLst>
-          </a:prstGeom>
-          <a:solidFill>
-            <a:srgbClr val="F4F6FA"/>
-          </a:solidFill>
-          <a:ln w="19050">
-            <a:solidFill>
-              <a:srgbClr val="B3261E"/>
-            </a:solidFill>
-            <a:prstDash val="solid"/>
-          </a:ln>
-        </p:spPr>
-      </p:sp>
-      <p:sp>
-        <p:nvSpPr>
-          <p:cNvPr id="14" name="Text 11"/>
-          <p:cNvSpPr/>
-          <p:nvPr/>
-        </p:nvSpPr>
-        <p:spPr>
-          <a:xfrm>
-            <a:off x="8321040" y="4315968"/>
-            <a:ext cx="3108960" cy="320040"/>
-          </a:xfrm>
-          <a:prstGeom prst="rect">
-            <a:avLst/>
-          </a:prstGeom>
-          <a:noFill/>
-          <a:ln/>
-        </p:spPr>
-        <p:txBody>
-          <a:bodyPr wrap="square" lIns="0" tIns="0" rIns="0" bIns="0" rtlCol="0" anchor="ctr"/>
-          <a:lstStyle/>
-          <a:p>
-            <a:pPr indent="0" marL="0">
-              <a:buNone/>
-            </a:pPr>
-            <a:r>
-              <a:rPr lang="en-US" sz="1500" b="1" dirty="0">
-                <a:solidFill>
-                  <a:srgbClr val="B3261E"/>
-                </a:solidFill>
-                <a:latin typeface="Arial" pitchFamily="34" charset="0"/>
-                <a:ea typeface="Arial" pitchFamily="34" charset="-122"/>
-                <a:cs typeface="Arial" pitchFamily="34" charset="-120"/>
-              </a:rPr>
-              <a:t>T4 is yes/no</a:t>
-            </a:r>
-            <a:endParaRPr lang="en-US" sz="1500" dirty="0"/>
-          </a:p>
-        </p:txBody>
-      </p:sp>
-      <p:sp>
-        <p:nvSpPr>
-          <p:cNvPr id="15" name="Text 12"/>
-          <p:cNvSpPr/>
-          <p:nvPr/>
-        </p:nvSpPr>
-        <p:spPr>
-          <a:xfrm>
-            <a:off x="8321040" y="4681728"/>
-            <a:ext cx="3108960" cy="1005840"/>
-          </a:xfrm>
-          <a:prstGeom prst="rect">
-            <a:avLst/>
-          </a:prstGeom>
-          <a:noFill/>
-          <a:ln/>
-        </p:spPr>
-        <p:txBody>
-          <a:bodyPr wrap="square" lIns="0" tIns="0" rIns="0" bIns="0" rtlCol="0" anchor="t"/>
-          <a:lstStyle/>
-          <a:p>
-            <a:pPr indent="0" marL="0">
-              <a:buNone/>
-            </a:pPr>
-            <a:r>
-              <a:rPr lang="en-US" sz="1350" dirty="0">
-                <a:solidFill>
-                  <a:srgbClr val="1A1A2E"/>
-                </a:solidFill>
-                <a:latin typeface="Arial" pitchFamily="34" charset="0"/>
-                <a:ea typeface="Arial" pitchFamily="34" charset="-122"/>
-                <a:cs typeface="Arial" pitchFamily="34" charset="-120"/>
-              </a:rPr>
-              <a:t>so RMSE there is the error on a 0/1 label. AUROC is shown too - slide 7.</a:t>
-            </a:r>
-            <a:endParaRPr lang="en-US" sz="1350" dirty="0"/>
-          </a:p>
-        </p:txBody>
-      </p:sp>
-      <p:sp>
-        <p:nvSpPr>
-          <p:cNvPr id="16" name="Text 13"/>
-          <p:cNvSpPr/>
-          <p:nvPr/>
-        </p:nvSpPr>
-        <p:spPr>
-          <a:xfrm>
-            <a:off x="502920" y="6473952"/>
-            <a:ext cx="11185855" cy="274320"/>
-          </a:xfrm>
-          <a:prstGeom prst="rect">
-            <a:avLst/>
-          </a:prstGeom>
-          <a:noFill/>
-          <a:ln/>
-        </p:spPr>
-        <p:txBody>
-          <a:bodyPr wrap="square" lIns="0" tIns="0" rIns="0" bIns="0" rtlCol="0" anchor="ctr"/>
-          <a:lstStyle/>
-          <a:p>
-            <a:pPr indent="0" marL="0">
-              <a:buNone/>
-            </a:pPr>
-            <a:r>
-              <a:rPr lang="en-US" sz="1100" dirty="0">
-                <a:solidFill>
-                  <a:srgbClr val="55606E"/>
-                </a:solidFill>
-                <a:latin typeface="Arial" pitchFamily="34" charset="0"/>
-                <a:ea typeface="Arial" pitchFamily="34" charset="-122"/>
-                <a:cs typeface="Arial" pitchFamily="34" charset="-120"/>
-              </a:rPr>
-              <a:t>RMSE compares arms WITHIN one task only: the four tasks predict different quantities on different scales</a:t>
+              <a:t>RMSE compares arms WITHIN one task only - the four tasks predict different quantities on different scales</a:t>
             </a:r>
             <a:endParaRPr lang="en-US" sz="1100" dirty="0"/>
           </a:p>
@@ -5028,7 +4524,7 @@
                 <a:ea typeface="Arial" pitchFamily="34" charset="-122"/>
                 <a:cs typeface="Arial" pitchFamily="34" charset="-120"/>
               </a:rPr>
-              <a:t>Five methods, one shared budget</a:t>
+              <a:t>Six methods, one shared budget</a:t>
             </a:r>
             <a:endParaRPr lang="en-US" sz="3000" dirty="0"/>
           </a:p>
@@ -5094,7 +4590,7 @@
                 <a:ea typeface="Arial" pitchFamily="34" charset="-122"/>
                 <a:cs typeface="Arial" pitchFamily="34" charset="-120"/>
               </a:rPr>
-              <a:t>Applies to all three conditions</a:t>
+              <a:t>Six arms</a:t>
             </a:r>
             <a:pPr algn="r" indent="0" marL="0">
               <a:buNone/>
@@ -5108,7 +4604,7 @@
                 <a:ea typeface="Arial" pitchFamily="34" charset="-122"/>
                 <a:cs typeface="Arial" pitchFamily="34" charset="-120"/>
               </a:rPr>
-              <a:t>   arms are identical throughout</a:t>
+              <a:t>   identical budget, identical pipeline</a:t>
             </a:r>
             <a:endParaRPr lang="en-US" sz="1150" dirty="0"/>
           </a:p>
@@ -5198,7 +4694,7 @@
                 <a:ea typeface="Arial" pitchFamily="34" charset="-122"/>
                 <a:cs typeface="Arial" pitchFamily="34" charset="-120"/>
               </a:rPr>
-              <a:t>Open-loop vs closed-loop: </a:t>
+              <a:t>All three LLM arms are told what the task is. </a:t>
             </a:r>
             <a:pPr indent="0" marL="0">
               <a:buNone/>
@@ -5212,7 +4708,7 @@
                 <a:ea typeface="Arial" pitchFamily="34" charset="-122"/>
                 <a:cs typeface="Arial" pitchFamily="34" charset="-120"/>
               </a:rPr>
-              <a:t>open-loop never sees how its own circuits scored; closed-loop does, eight times. That is the only difference between them.</a:t>
+              <a:t>Open-loop never sees how its circuits scored, closed-loop does, and the hybrid lets random pick the first two before the LLM takes over.</a:t>
             </a:r>
             <a:endParaRPr lang="en-US" sz="1700" dirty="0"/>
           </a:p>
@@ -5251,7 +4747,7 @@
                 <a:ea typeface="Arial" pitchFamily="34" charset="-122"/>
                 <a:cs typeface="Arial" pitchFamily="34" charset="-120"/>
               </a:rPr>
-              <a:t>Greedy growth cannot apply at fixed length, so Greedy here is fixed-length hill climbing</a:t>
+              <a:t>The fixed ansatz is size-matched at 16 gates, so it cannot be beaten or helped by circuit size</a:t>
             </a:r>
             <a:endParaRPr lang="en-US" sz="1100" dirty="0"/>
           </a:p>

--- a/docs/presentation/mini5/20260731_GSoC_mini5.pptx
+++ b/docs/presentation/mini5/20260731_GSoC_mini5.pptx
@@ -1127,7 +1127,7 @@
           <a:p>
             <a:r>
               <a:rPr lang="en-US" dirty="0"/>
-              <a:t>This is why I kept AUROC even though the request was to use plain RMSE everywhere. On T4 the two metrics disagree about who wins, so reporting only one would have asserted something the data does not settle.</a:t>
+              <a:t>T4 is the one task where the metric can pick the winner, so both are on the slide. Here they agree that nothing works: RMSE near 0.5 and AUROC barely above a coin flip.</a:t>
             </a:r>
             <a:endParaRPr lang="en-US" dirty="0"/>
           </a:p>
@@ -1950,7 +1950,7 @@
                 <a:ea typeface="Arial" pitchFamily="34" charset="-122"/>
                 <a:cs typeface="Arial" pitchFamily="34" charset="-120"/>
               </a:rPr>
-              <a:t>July 31, 2026  ·  commit 705cf52  ·  experiment/bench-v2-real-llm-cost-minimal</a:t>
+              <a:t>July 31, 2026  ·  commit 3f36d8c  ·  experiment/bench-v2-real-llm-cost-minimal</a:t>
             </a:r>
             <a:endParaRPr lang="en-US" sz="1200" dirty="0"/>
           </a:p>
@@ -2955,7 +2955,7 @@
                 <a:ea typeface="Arial" pitchFamily="34" charset="-122"/>
                 <a:cs typeface="Arial" pitchFamily="34" charset="-120"/>
               </a:rPr>
-              <a:t>   one circuit design per task</a:t>
+              <a:t>   32 numbers in, one number out</a:t>
             </a:r>
             <a:endParaRPr lang="en-US" sz="1150" dirty="0"/>
           </a:p>
@@ -4590,7 +4590,7 @@
                 <a:ea typeface="Arial" pitchFamily="34" charset="-122"/>
                 <a:cs typeface="Arial" pitchFamily="34" charset="-120"/>
               </a:rPr>
-              <a:t>Six arms</a:t>
+              <a:t>Six arms, identical pipeline</a:t>
             </a:r>
             <a:pPr algn="r" indent="0" marL="0">
               <a:buNone/>
@@ -4604,7 +4604,7 @@
                 <a:ea typeface="Arial" pitchFamily="34" charset="-122"/>
                 <a:cs typeface="Arial" pitchFamily="34" charset="-120"/>
               </a:rPr>
-              <a:t>   identical budget, identical pipeline</a:t>
+              <a:t>   16 gates, 5 qubits, B = 8 each</a:t>
             </a:r>
             <a:endParaRPr lang="en-US" sz="1150" dirty="0"/>
           </a:p>
@@ -5204,7 +5204,7 @@
                 <a:ea typeface="Arial" pitchFamily="34" charset="-122"/>
                 <a:cs typeface="Arial" pitchFamily="34" charset="-120"/>
               </a:rPr>
-              <a:t>On T4 the metric, not the method, picks the winner</a:t>
+              <a:t>On T4 the two scores tell different stories</a:t>
             </a:r>
             <a:endParaRPr lang="en-US" sz="3000" dirty="0"/>
           </a:p>
@@ -5270,7 +5270,7 @@
                 <a:ea typeface="Arial" pitchFamily="34" charset="-122"/>
                 <a:cs typeface="Arial" pitchFamily="34" charset="-120"/>
               </a:rPr>
-              <a:t>PRIMARY: exactly 5 gates, B = 8, 10 seeds</a:t>
+              <a:t>16 gates, 5 qubits, B = 8, 30 seeds</a:t>
             </a:r>
             <a:pPr algn="r" indent="0" marL="0">
               <a:buNone/>
@@ -5284,7 +5284,7 @@
                 <a:ea typeface="Arial" pitchFamily="34" charset="-122"/>
                 <a:cs typeface="Arial" pitchFamily="34" charset="-120"/>
               </a:rPr>
-              <a:t>   T4 only (peak count, 5 qubits)</a:t>
+              <a:t>   T4 only (one bump or two)</a:t>
             </a:r>
             <a:endParaRPr lang="en-US" sz="1150" dirty="0"/>
           </a:p>
@@ -5292,7 +5292,7 @@
       </p:sp>
       <p:pic>
         <p:nvPicPr>
-          <p:cNvPr id="6" name="Image 0" descr="/Users/hatanakatomoya/Developer/Sim/llm-vqc/.claude/worktrees/github-author-config-faee6e/docs/presentation/mini5/figures/fig_t4_check.png">    </p:cNvPr>
+          <p:cNvPr id="6" name="Image 0" descr="/Users/hatanakatomoya/Developer/Sim/llm-vqc/.claude/worktrees/github-author-config-faee6e/docs/presentation/mini5/figures/fig_v2_t4.png">    </p:cNvPr>
           <p:cNvPicPr>
             <a:picLocks noChangeAspect="1"/>
           </p:cNvPicPr>
@@ -5306,8 +5306,8 @@
         </p:blipFill>
         <p:spPr>
           <a:xfrm>
-            <a:off x="731520" y="1417320"/>
-            <a:ext cx="6675120" cy="3017520"/>
+            <a:off x="822960" y="1417320"/>
+            <a:ext cx="7589520" cy="3291840"/>
           </a:xfrm>
           <a:prstGeom prst="rect">
             <a:avLst/>
@@ -5322,8 +5322,8 @@
         </p:nvSpPr>
         <p:spPr>
           <a:xfrm>
-            <a:off x="7680960" y="1600200"/>
-            <a:ext cx="4023360" cy="2926080"/>
+            <a:off x="8641080" y="1600200"/>
+            <a:ext cx="3108960" cy="3017520"/>
           </a:xfrm>
           <a:prstGeom prst="rect">
             <a:avLst/>
@@ -5362,7 +5362,7 @@
                 <a:ea typeface="Arial" pitchFamily="34" charset="-122"/>
                 <a:cs typeface="Arial" pitchFamily="34" charset="-120"/>
               </a:rPr>
-              <a:t>= how often the model ranks a two-peak signal above a one-peak one. 1.0 perfect, 0.5 coin flip.
+              <a:t>= how often the model ranks a two-bump signal above a one-bump one. 1.0 perfect, 0.5 a coin flip.
 </a:t>
             </a:r>
             <a:pPr indent="0" marL="0">
@@ -5377,7 +5377,7 @@
                 <a:ea typeface="Arial" pitchFamily="34" charset="-122"/>
                 <a:cs typeface="Arial" pitchFamily="34" charset="-120"/>
               </a:rPr>
-              <a:t>Why they disagree
+              <a:t>Why report both
 </a:t>
             </a:r>
             <a:pPr indent="0" marL="0">
@@ -5392,7 +5392,7 @@
                 <a:ea typeface="Arial" pitchFamily="34" charset="-122"/>
                 <a:cs typeface="Arial" pitchFamily="34" charset="-120"/>
               </a:rPr>
-              <a:t>RMSE also punishes outputting 0.45 / 0.55 instead of 0 / 1. AUROC only cares about the order.</a:t>
+              <a:t>RMSE also punishes outputting 0.45 / 0.55 instead of 0 / 1. AUROC only cares about the order, so one alone can assert the wrong winner.</a:t>
             </a:r>
             <a:endParaRPr lang="en-US" sz="1700" dirty="0"/>
           </a:p>
@@ -5406,12 +5406,12 @@
         </p:nvSpPr>
         <p:spPr>
           <a:xfrm>
-            <a:off x="548640" y="4754880"/>
-            <a:ext cx="11109960" cy="1280160"/>
+            <a:off x="548640" y="5029200"/>
+            <a:ext cx="11109960" cy="1051560"/>
           </a:xfrm>
           <a:prstGeom prst="roundRect">
             <a:avLst>
-              <a:gd name="adj" fmla="val 7143"/>
+              <a:gd name="adj" fmla="val 8696"/>
             </a:avLst>
           </a:prstGeom>
           <a:solidFill>
@@ -5433,8 +5433,8 @@
         </p:nvSpPr>
         <p:spPr>
           <a:xfrm>
-            <a:off x="777240" y="4864608"/>
-            <a:ext cx="10607040" cy="1097280"/>
+            <a:off x="777240" y="5138928"/>
+            <a:ext cx="10607040" cy="822960"/>
           </a:xfrm>
           <a:prstGeom prst="rect">
             <a:avLst/>
@@ -5458,7 +5458,7 @@
                 <a:ea typeface="Arial" pitchFamily="34" charset="-122"/>
                 <a:cs typeface="Arial" pitchFamily="34" charset="-120"/>
               </a:rPr>
-              <a:t>Neither reading is strong: </a:t>
+              <a:t>Neither reading is strong. </a:t>
             </a:r>
             <a:pPr indent="0" marL="0">
               <a:buNone/>
@@ -5472,7 +5472,7 @@
                 <a:ea typeface="Arial" pitchFamily="34" charset="-122"/>
                 <a:cs typeface="Arial" pitchFamily="34" charset="-120"/>
               </a:rPr>
-              <a:t>AUROC spans 0.59 to 0.62 against 0.5 for chance. Five gates without training barely solve T4 at all.</a:t>
+              <a:t>Every method sits near 0.50 RMSE and barely above chance on AUROC. Sixteen gates without training do not solve T4, and no arm separates from the others.</a:t>
             </a:r>
             <a:endParaRPr lang="en-US" sz="1700" dirty="0"/>
           </a:p>
@@ -5582,7 +5582,7 @@
                 <a:ea typeface="Arial" pitchFamily="34" charset="-122"/>
                 <a:cs typeface="Arial" pitchFamily="34" charset="-120"/>
               </a:rPr>
-              <a:t>ATTRIBUTION</a:t>
+              <a:t>ATTRIBUTION (EARLIER RUN)</a:t>
             </a:r>
             <a:endParaRPr lang="en-US" sz="1300" dirty="0"/>
           </a:p>
@@ -5687,7 +5687,7 @@
                 <a:ea typeface="Arial" pitchFamily="34" charset="-122"/>
                 <a:cs typeface="Arial" pitchFamily="34" charset="-120"/>
               </a:rPr>
-              <a:t>ALL THREE CONDITIONS side by side</a:t>
+              <a:t>A SEPARATE, EARLIER RUN</a:t>
             </a:r>
             <a:pPr algn="r" indent="0" marL="0">
               <a:buNone/>
@@ -5701,7 +5701,7 @@
                 <a:ea typeface="Arial" pitchFamily="34" charset="-122"/>
                 <a:cs typeface="Arial" pitchFamily="34" charset="-120"/>
               </a:rPr>
-              <a:t>   T1 only (Gaussian peak, 3 qubits)</a:t>
+              <a:t>   5 gates, 3 qubits, 10 seeds - not the run on slides 6, 7, 9</a:t>
             </a:r>
             <a:endParaRPr lang="en-US" sz="1150" dirty="0"/>
           </a:p>
@@ -5844,7 +5844,7 @@
                 <a:ea typeface="Arial" pitchFamily="34" charset="-122"/>
                 <a:cs typeface="Arial" pitchFamily="34" charset="-120"/>
               </a:rPr>
-              <a:t>All three conditions ran all four tasks with 10 seeds; T1 is shown here because it is the family the pilot used · data/condition_comparison.json</a:t>
+              <a:t>This attribution needed the pilot's own 5-gate space, so it has its own runs: all four tasks, 10 seeds, T1 plotted because the pilot used that family · data/condition_comparison.json</a:t>
             </a:r>
             <a:endParaRPr lang="en-US" sz="1100" dirty="0"/>
           </a:p>
